--- a/presentation.pptx
+++ b/presentation.pptx
@@ -38980,6 +38980,376 @@
           </a:p>
         </p:txBody>
       </p:sp>
+      <p:graphicFrame>
+        <p:nvGraphicFramePr>
+          <p:cNvPr id="11" name="Table 10">
+            <a:extLst>
+              <a:ext uri="{FF2B5EF4-FFF2-40B4-BE49-F238E27FC236}">
+                <a16:creationId xmlns:a16="http://schemas.microsoft.com/office/drawing/2014/main" id="{80EE1730-23A6-5CD6-C59D-DB15C0A26619}"/>
+              </a:ext>
+            </a:extLst>
+          </p:cNvPr>
+          <p:cNvGraphicFramePr>
+            <a:graphicFrameLocks noGrp="1"/>
+          </p:cNvGraphicFramePr>
+          <p:nvPr>
+            <p:extLst>
+              <p:ext uri="{D42A27DB-BD31-4B8C-83A1-F6EECF244321}">
+                <p14:modId xmlns:p14="http://schemas.microsoft.com/office/powerpoint/2010/main" val="1275318209"/>
+              </p:ext>
+            </p:extLst>
+          </p:nvPr>
+        </p:nvGraphicFramePr>
+        <p:xfrm>
+          <a:off x="760343" y="1404608"/>
+          <a:ext cx="7623314" cy="1631696"/>
+        </p:xfrm>
+        <a:graphic>
+          <a:graphicData uri="http://schemas.openxmlformats.org/drawingml/2006/table">
+            <a:tbl>
+              <a:tblPr>
+                <a:tableStyleId>{B6F588F0-DA45-466C-91A0-1F1EBF44E27B}</a:tableStyleId>
+              </a:tblPr>
+              <a:tblGrid>
+                <a:gridCol w="3382618">
+                  <a:extLst>
+                    <a:ext uri="{9D8B030D-6E8A-4147-A177-3AD203B41FA5}">
+                      <a16:colId xmlns:a16="http://schemas.microsoft.com/office/drawing/2014/main" val="253224325"/>
+                    </a:ext>
+                  </a:extLst>
+                </a:gridCol>
+                <a:gridCol w="4240696">
+                  <a:extLst>
+                    <a:ext uri="{9D8B030D-6E8A-4147-A177-3AD203B41FA5}">
+                      <a16:colId xmlns:a16="http://schemas.microsoft.com/office/drawing/2014/main" val="3200457109"/>
+                    </a:ext>
+                  </a:extLst>
+                </a:gridCol>
+              </a:tblGrid>
+              <a:tr h="0">
+                <a:tc>
+                  <a:txBody>
+                    <a:bodyPr/>
+                    <a:lstStyle/>
+                    <a:p>
+                      <a:pPr algn="l">
+                        <a:lnSpc>
+                          <a:spcPts val="1875"/>
+                        </a:lnSpc>
+                        <a:buNone/>
+                      </a:pPr>
+                      <a:r>
+                        <a:rPr lang="en-GB" sz="1200" b="0" dirty="0">
+                          <a:solidFill>
+                            <a:schemeClr val="tx1"/>
+                          </a:solidFill>
+                          <a:effectLst/>
+                          <a:latin typeface="Mulish" panose="020B0604020202020204" charset="0"/>
+                        </a:rPr>
+                        <a:t>Direction</a:t>
+                      </a:r>
+                      <a:endParaRPr lang="en-GB" sz="1200" b="0" i="0" dirty="0">
+                        <a:solidFill>
+                          <a:schemeClr val="tx1"/>
+                        </a:solidFill>
+                        <a:effectLst/>
+                        <a:latin typeface="Mulish" panose="020B0604020202020204" charset="0"/>
+                      </a:endParaRPr>
+                    </a:p>
+                  </a:txBody>
+                  <a:tcPr marR="152400" marT="95250" marB="95250" anchor="ctr"/>
+                </a:tc>
+                <a:tc>
+                  <a:txBody>
+                    <a:bodyPr/>
+                    <a:lstStyle/>
+                    <a:p>
+                      <a:pPr algn="l">
+                        <a:lnSpc>
+                          <a:spcPts val="1875"/>
+                        </a:lnSpc>
+                        <a:buNone/>
+                      </a:pPr>
+                      <a:r>
+                        <a:rPr lang="en-GB" sz="1200" b="0">
+                          <a:solidFill>
+                            <a:schemeClr val="tx1"/>
+                          </a:solidFill>
+                          <a:effectLst/>
+                          <a:latin typeface="Mulish" panose="020B0604020202020204" charset="0"/>
+                        </a:rPr>
+                        <a:t>Goal</a:t>
+                      </a:r>
+                      <a:endParaRPr lang="en-GB" sz="1200" b="0" i="0">
+                        <a:solidFill>
+                          <a:schemeClr val="tx1"/>
+                        </a:solidFill>
+                        <a:effectLst/>
+                        <a:latin typeface="Mulish" panose="020B0604020202020204" charset="0"/>
+                      </a:endParaRPr>
+                    </a:p>
+                  </a:txBody>
+                  <a:tcPr marL="152400" marR="152400" marT="95250" marB="95250" anchor="ctr"/>
+                </a:tc>
+                <a:extLst>
+                  <a:ext uri="{0D108BD9-81ED-4DB2-BD59-A6C34878D82A}">
+                    <a16:rowId xmlns:a16="http://schemas.microsoft.com/office/drawing/2014/main" val="2370418667"/>
+                  </a:ext>
+                </a:extLst>
+              </a:tr>
+              <a:tr h="0">
+                <a:tc>
+                  <a:txBody>
+                    <a:bodyPr/>
+                    <a:lstStyle/>
+                    <a:p>
+                      <a:pPr algn="l">
+                        <a:lnSpc>
+                          <a:spcPts val="1875"/>
+                        </a:lnSpc>
+                        <a:buNone/>
+                      </a:pPr>
+                      <a:r>
+                        <a:rPr lang="en-GB" sz="1200" b="1">
+                          <a:solidFill>
+                            <a:schemeClr val="tx1"/>
+                          </a:solidFill>
+                          <a:effectLst/>
+                          <a:latin typeface="Mulish" panose="020B0604020202020204" charset="0"/>
+                        </a:rPr>
+                        <a:t>Dynamic Detection</a:t>
+                      </a:r>
+                      <a:endParaRPr lang="en-GB" sz="1200" b="0" i="0">
+                        <a:solidFill>
+                          <a:schemeClr val="tx1"/>
+                        </a:solidFill>
+                        <a:effectLst/>
+                        <a:latin typeface="Mulish" panose="020B0604020202020204" charset="0"/>
+                      </a:endParaRPr>
+                    </a:p>
+                  </a:txBody>
+                  <a:tcPr marR="152400" marT="95250" marB="95250" anchor="ctr"/>
+                </a:tc>
+                <a:tc>
+                  <a:txBody>
+                    <a:bodyPr/>
+                    <a:lstStyle/>
+                    <a:p>
+                      <a:pPr algn="l">
+                        <a:lnSpc>
+                          <a:spcPts val="1875"/>
+                        </a:lnSpc>
+                        <a:buNone/>
+                      </a:pPr>
+                      <a:r>
+                        <a:rPr lang="en-GB" sz="1200" b="0">
+                          <a:solidFill>
+                            <a:schemeClr val="tx1"/>
+                          </a:solidFill>
+                          <a:effectLst/>
+                          <a:latin typeface="Mulish" panose="020B0604020202020204" charset="0"/>
+                        </a:rPr>
+                        <a:t>Real-time, incremental community updates</a:t>
+                      </a:r>
+                      <a:endParaRPr lang="en-GB" sz="1200" b="0" i="0">
+                        <a:solidFill>
+                          <a:schemeClr val="tx1"/>
+                        </a:solidFill>
+                        <a:effectLst/>
+                        <a:latin typeface="Mulish" panose="020B0604020202020204" charset="0"/>
+                      </a:endParaRPr>
+                    </a:p>
+                  </a:txBody>
+                  <a:tcPr marL="152400" marT="95250" marB="95250" anchor="ctr"/>
+                </a:tc>
+                <a:extLst>
+                  <a:ext uri="{0D108BD9-81ED-4DB2-BD59-A6C34878D82A}">
+                    <a16:rowId xmlns:a16="http://schemas.microsoft.com/office/drawing/2014/main" val="2967948659"/>
+                  </a:ext>
+                </a:extLst>
+              </a:tr>
+              <a:tr h="0">
+                <a:tc>
+                  <a:txBody>
+                    <a:bodyPr/>
+                    <a:lstStyle/>
+                    <a:p>
+                      <a:pPr algn="l">
+                        <a:lnSpc>
+                          <a:spcPts val="1875"/>
+                        </a:lnSpc>
+                        <a:buNone/>
+                      </a:pPr>
+                      <a:r>
+                        <a:rPr lang="en-GB" sz="1200" b="1" dirty="0">
+                          <a:solidFill>
+                            <a:schemeClr val="tx1"/>
+                          </a:solidFill>
+                          <a:effectLst/>
+                          <a:latin typeface="Mulish" panose="020B0604020202020204" charset="0"/>
+                        </a:rPr>
+                        <a:t>Cross-Domain</a:t>
+                      </a:r>
+                      <a:endParaRPr lang="en-GB" sz="1200" b="0" i="0" dirty="0">
+                        <a:solidFill>
+                          <a:schemeClr val="tx1"/>
+                        </a:solidFill>
+                        <a:effectLst/>
+                        <a:latin typeface="Mulish" panose="020B0604020202020204" charset="0"/>
+                      </a:endParaRPr>
+                    </a:p>
+                  </a:txBody>
+                  <a:tcPr marR="152400" marT="95250" marB="95250" anchor="ctr"/>
+                </a:tc>
+                <a:tc>
+                  <a:txBody>
+                    <a:bodyPr/>
+                    <a:lstStyle/>
+                    <a:p>
+                      <a:pPr algn="l">
+                        <a:lnSpc>
+                          <a:spcPts val="1875"/>
+                        </a:lnSpc>
+                        <a:buNone/>
+                      </a:pPr>
+                      <a:r>
+                        <a:rPr lang="en-GB" sz="1200" b="0">
+                          <a:solidFill>
+                            <a:schemeClr val="tx1"/>
+                          </a:solidFill>
+                          <a:effectLst/>
+                          <a:latin typeface="Mulish" panose="020B0604020202020204" charset="0"/>
+                        </a:rPr>
+                        <a:t>Validate on movies, music, social media</a:t>
+                      </a:r>
+                      <a:endParaRPr lang="en-GB" sz="1200" b="0" i="0">
+                        <a:solidFill>
+                          <a:schemeClr val="tx1"/>
+                        </a:solidFill>
+                        <a:effectLst/>
+                        <a:latin typeface="Mulish" panose="020B0604020202020204" charset="0"/>
+                      </a:endParaRPr>
+                    </a:p>
+                  </a:txBody>
+                  <a:tcPr marL="152400" marT="95250" marB="95250" anchor="ctr"/>
+                </a:tc>
+                <a:extLst>
+                  <a:ext uri="{0D108BD9-81ED-4DB2-BD59-A6C34878D82A}">
+                    <a16:rowId xmlns:a16="http://schemas.microsoft.com/office/drawing/2014/main" val="2606477272"/>
+                  </a:ext>
+                </a:extLst>
+              </a:tr>
+              <a:tr h="0">
+                <a:tc>
+                  <a:txBody>
+                    <a:bodyPr/>
+                    <a:lstStyle/>
+                    <a:p>
+                      <a:pPr algn="l">
+                        <a:lnSpc>
+                          <a:spcPts val="1875"/>
+                        </a:lnSpc>
+                        <a:buNone/>
+                      </a:pPr>
+                      <a:r>
+                        <a:rPr lang="en-GB" sz="1200" b="1" dirty="0">
+                          <a:solidFill>
+                            <a:schemeClr val="tx1"/>
+                          </a:solidFill>
+                          <a:effectLst/>
+                          <a:latin typeface="Mulish" panose="020B0604020202020204" charset="0"/>
+                        </a:rPr>
+                        <a:t>Explainability</a:t>
+                      </a:r>
+                      <a:endParaRPr lang="en-GB" sz="1200" b="0" i="0" dirty="0">
+                        <a:solidFill>
+                          <a:schemeClr val="tx1"/>
+                        </a:solidFill>
+                        <a:effectLst/>
+                        <a:latin typeface="Mulish" panose="020B0604020202020204" charset="0"/>
+                      </a:endParaRPr>
+                    </a:p>
+                  </a:txBody>
+                  <a:tcPr marR="152400" marT="95250" marB="95250" anchor="ctr"/>
+                </a:tc>
+                <a:tc>
+                  <a:txBody>
+                    <a:bodyPr/>
+                    <a:lstStyle/>
+                    <a:p>
+                      <a:pPr algn="l">
+                        <a:lnSpc>
+                          <a:spcPts val="1875"/>
+                        </a:lnSpc>
+                        <a:buNone/>
+                      </a:pPr>
+                      <a:r>
+                        <a:rPr lang="en-GB" sz="1200" b="0" dirty="0">
+                          <a:solidFill>
+                            <a:schemeClr val="tx1"/>
+                          </a:solidFill>
+                          <a:effectLst/>
+                          <a:latin typeface="Mulish" panose="020B0604020202020204" charset="0"/>
+                        </a:rPr>
+                        <a:t>User trust through community-based explanations</a:t>
+                      </a:r>
+                      <a:endParaRPr lang="en-GB" sz="1200" b="0" i="0" dirty="0">
+                        <a:solidFill>
+                          <a:schemeClr val="tx1"/>
+                        </a:solidFill>
+                        <a:effectLst/>
+                        <a:latin typeface="Mulish" panose="020B0604020202020204" charset="0"/>
+                      </a:endParaRPr>
+                    </a:p>
+                  </a:txBody>
+                  <a:tcPr marL="152400" marT="95250" marB="95250" anchor="ctr"/>
+                </a:tc>
+                <a:extLst>
+                  <a:ext uri="{0D108BD9-81ED-4DB2-BD59-A6C34878D82A}">
+                    <a16:rowId xmlns:a16="http://schemas.microsoft.com/office/drawing/2014/main" val="4014426703"/>
+                  </a:ext>
+                </a:extLst>
+              </a:tr>
+            </a:tbl>
+          </a:graphicData>
+        </a:graphic>
+      </p:graphicFrame>
+      <p:sp>
+        <p:nvSpPr>
+          <p:cNvPr id="13" name="TextBox 12">
+            <a:extLst>
+              <a:ext uri="{FF2B5EF4-FFF2-40B4-BE49-F238E27FC236}">
+                <a16:creationId xmlns:a16="http://schemas.microsoft.com/office/drawing/2014/main" id="{0A6A85B6-6A1D-87EF-C311-31404E36172A}"/>
+              </a:ext>
+            </a:extLst>
+          </p:cNvPr>
+          <p:cNvSpPr txBox="1"/>
+          <p:nvPr/>
+        </p:nvSpPr>
+        <p:spPr>
+          <a:xfrm>
+            <a:off x="524792" y="911278"/>
+            <a:ext cx="3766642" cy="307777"/>
+          </a:xfrm>
+          <a:prstGeom prst="rect">
+            <a:avLst/>
+          </a:prstGeom>
+          <a:noFill/>
+        </p:spPr>
+        <p:txBody>
+          <a:bodyPr wrap="square" rtlCol="0">
+            <a:spAutoFit/>
+          </a:bodyPr>
+          <a:lstStyle/>
+          <a:p>
+            <a:r>
+              <a:rPr lang="en-GB" b="1" dirty="0"/>
+              <a:t>Future Perspectives</a:t>
+            </a:r>
+            <a:endParaRPr lang="en-GB" dirty="0"/>
+          </a:p>
+        </p:txBody>
+      </p:sp>
     </p:spTree>
     <p:extLst>
       <p:ext uri="{BB962C8B-B14F-4D97-AF65-F5344CB8AC3E}">

--- a/presentation.pptx
+++ b/presentation.pptx
@@ -32,8 +32,8 @@
     <p:sldId id="325" r:id="rId23"/>
     <p:sldId id="324" r:id="rId24"/>
     <p:sldId id="326" r:id="rId25"/>
-    <p:sldId id="329" r:id="rId26"/>
-    <p:sldId id="337" r:id="rId27"/>
+    <p:sldId id="337" r:id="rId26"/>
+    <p:sldId id="329" r:id="rId27"/>
     <p:sldId id="260" r:id="rId28"/>
     <p:sldId id="330" r:id="rId29"/>
     <p:sldId id="336" r:id="rId30"/>
@@ -2356,7 +2356,7 @@
               <a:buFont typeface="Arial"/>
               <a:buNone/>
             </a:pPr>
-            <a:endParaRPr sz="1200" i="1">
+            <a:endParaRPr sz="1200" i="1" dirty="0">
               <a:solidFill>
                 <a:srgbClr val="595959"/>
               </a:solidFill>
@@ -2376,7 +2376,7 @@
               </a:spcAft>
               <a:buNone/>
             </a:pPr>
-            <a:endParaRPr/>
+            <a:endParaRPr dirty="0"/>
           </a:p>
         </p:txBody>
       </p:sp>
@@ -3065,6 +3065,140 @@
         <p:cNvPr id="1" name="Shape 1467">
           <a:extLst>
             <a:ext uri="{FF2B5EF4-FFF2-40B4-BE49-F238E27FC236}">
+              <a16:creationId xmlns:a16="http://schemas.microsoft.com/office/drawing/2014/main" id="{225FE6A0-F71D-2A35-1B3F-0F68700A3B76}"/>
+            </a:ext>
+          </a:extLst>
+        </p:cNvPr>
+        <p:cNvGrpSpPr/>
+        <p:nvPr/>
+      </p:nvGrpSpPr>
+      <p:grpSpPr>
+        <a:xfrm>
+          <a:off x="0" y="0"/>
+          <a:ext cx="0" cy="0"/>
+          <a:chOff x="0" y="0"/>
+          <a:chExt cx="0" cy="0"/>
+        </a:xfrm>
+      </p:grpSpPr>
+      <p:sp>
+        <p:nvSpPr>
+          <p:cNvPr id="1468" name="Google Shape;1468;gd431007ba2_0_208:notes">
+            <a:extLst>
+              <a:ext uri="{FF2B5EF4-FFF2-40B4-BE49-F238E27FC236}">
+                <a16:creationId xmlns:a16="http://schemas.microsoft.com/office/drawing/2014/main" id="{7EA0E642-4375-8C6D-265F-FD3028B00C64}"/>
+              </a:ext>
+            </a:extLst>
+          </p:cNvPr>
+          <p:cNvSpPr>
+            <a:spLocks noGrp="1" noRot="1" noChangeAspect="1"/>
+          </p:cNvSpPr>
+          <p:nvPr>
+            <p:ph type="sldImg" idx="2"/>
+          </p:nvPr>
+        </p:nvSpPr>
+        <p:spPr>
+          <a:xfrm>
+            <a:off x="381000" y="685800"/>
+            <a:ext cx="6096000" cy="3429000"/>
+          </a:xfrm>
+          <a:custGeom>
+            <a:avLst/>
+            <a:gdLst/>
+            <a:ahLst/>
+            <a:cxnLst/>
+            <a:rect l="l" t="t" r="r" b="b"/>
+            <a:pathLst>
+              <a:path w="120000" h="120000" extrusionOk="0">
+                <a:moveTo>
+                  <a:pt x="0" y="0"/>
+                </a:moveTo>
+                <a:lnTo>
+                  <a:pt x="120000" y="0"/>
+                </a:lnTo>
+                <a:lnTo>
+                  <a:pt x="120000" y="120000"/>
+                </a:lnTo>
+                <a:lnTo>
+                  <a:pt x="0" y="120000"/>
+                </a:lnTo>
+                <a:close/>
+              </a:path>
+            </a:pathLst>
+          </a:custGeom>
+        </p:spPr>
+        <p:txBody>
+          <a:bodyPr/>
+          <a:lstStyle/>
+          <a:p>
+            <a:endParaRPr lang="en-GB"/>
+          </a:p>
+        </p:txBody>
+      </p:sp>
+      <p:sp>
+        <p:nvSpPr>
+          <p:cNvPr id="1469" name="Google Shape;1469;gd431007ba2_0_208:notes">
+            <a:extLst>
+              <a:ext uri="{FF2B5EF4-FFF2-40B4-BE49-F238E27FC236}">
+                <a16:creationId xmlns:a16="http://schemas.microsoft.com/office/drawing/2014/main" id="{A4D27BB1-40DA-8135-C6BB-B6B704F43896}"/>
+              </a:ext>
+            </a:extLst>
+          </p:cNvPr>
+          <p:cNvSpPr txBox="1">
+            <a:spLocks noGrp="1"/>
+          </p:cNvSpPr>
+          <p:nvPr>
+            <p:ph type="body" idx="1"/>
+          </p:nvPr>
+        </p:nvSpPr>
+        <p:spPr>
+          <a:xfrm>
+            <a:off x="685800" y="4343400"/>
+            <a:ext cx="5486400" cy="4114800"/>
+          </a:xfrm>
+          <a:prstGeom prst="rect">
+            <a:avLst/>
+          </a:prstGeom>
+        </p:spPr>
+        <p:txBody>
+          <a:bodyPr spcFirstLastPara="1" wrap="square" lIns="91425" tIns="91425" rIns="91425" bIns="91425" anchor="t" anchorCtr="0">
+            <a:noAutofit/>
+          </a:bodyPr>
+          <a:lstStyle/>
+          <a:p>
+            <a:pPr marL="0" lvl="0" indent="0" algn="l" rtl="0">
+              <a:spcBef>
+                <a:spcPts val="0"/>
+              </a:spcBef>
+              <a:spcAft>
+                <a:spcPts val="0"/>
+              </a:spcAft>
+              <a:buNone/>
+            </a:pPr>
+            <a:endParaRPr dirty="0"/>
+          </a:p>
+        </p:txBody>
+      </p:sp>
+    </p:spTree>
+    <p:extLst>
+      <p:ext uri="{BB962C8B-B14F-4D97-AF65-F5344CB8AC3E}">
+        <p14:creationId xmlns:p14="http://schemas.microsoft.com/office/powerpoint/2010/main" val="897538169"/>
+      </p:ext>
+    </p:extLst>
+  </p:cSld>
+  <p:clrMapOvr>
+    <a:masterClrMapping/>
+  </p:clrMapOvr>
+</p:notes>
+</file>
+
+<file path=ppt/notesSlides/notesSlide26.xml><?xml version="1.0" encoding="utf-8"?>
+<p:notes xmlns:a="http://schemas.openxmlformats.org/drawingml/2006/main" xmlns:r="http://schemas.openxmlformats.org/officeDocument/2006/relationships" xmlns:p="http://schemas.openxmlformats.org/presentationml/2006/main" showMasterSp="0" showMasterPhAnim="0">
+  <p:cSld>
+    <p:spTree>
+      <p:nvGrpSpPr>
+        <p:cNvPr id="1" name="Shape 1467">
+          <a:extLst>
+            <a:ext uri="{FF2B5EF4-FFF2-40B4-BE49-F238E27FC236}">
               <a16:creationId xmlns:a16="http://schemas.microsoft.com/office/drawing/2014/main" id="{08984B35-E1CC-34C6-896D-1441236D35BC}"/>
             </a:ext>
           </a:extLst>
@@ -3182,140 +3316,6 @@
     <p:extLst>
       <p:ext uri="{BB962C8B-B14F-4D97-AF65-F5344CB8AC3E}">
         <p14:creationId xmlns:p14="http://schemas.microsoft.com/office/powerpoint/2010/main" val="90390593"/>
-      </p:ext>
-    </p:extLst>
-  </p:cSld>
-  <p:clrMapOvr>
-    <a:masterClrMapping/>
-  </p:clrMapOvr>
-</p:notes>
-</file>
-
-<file path=ppt/notesSlides/notesSlide26.xml><?xml version="1.0" encoding="utf-8"?>
-<p:notes xmlns:a="http://schemas.openxmlformats.org/drawingml/2006/main" xmlns:r="http://schemas.openxmlformats.org/officeDocument/2006/relationships" xmlns:p="http://schemas.openxmlformats.org/presentationml/2006/main" showMasterSp="0" showMasterPhAnim="0">
-  <p:cSld>
-    <p:spTree>
-      <p:nvGrpSpPr>
-        <p:cNvPr id="1" name="Shape 1467">
-          <a:extLst>
-            <a:ext uri="{FF2B5EF4-FFF2-40B4-BE49-F238E27FC236}">
-              <a16:creationId xmlns:a16="http://schemas.microsoft.com/office/drawing/2014/main" id="{225FE6A0-F71D-2A35-1B3F-0F68700A3B76}"/>
-            </a:ext>
-          </a:extLst>
-        </p:cNvPr>
-        <p:cNvGrpSpPr/>
-        <p:nvPr/>
-      </p:nvGrpSpPr>
-      <p:grpSpPr>
-        <a:xfrm>
-          <a:off x="0" y="0"/>
-          <a:ext cx="0" cy="0"/>
-          <a:chOff x="0" y="0"/>
-          <a:chExt cx="0" cy="0"/>
-        </a:xfrm>
-      </p:grpSpPr>
-      <p:sp>
-        <p:nvSpPr>
-          <p:cNvPr id="1468" name="Google Shape;1468;gd431007ba2_0_208:notes">
-            <a:extLst>
-              <a:ext uri="{FF2B5EF4-FFF2-40B4-BE49-F238E27FC236}">
-                <a16:creationId xmlns:a16="http://schemas.microsoft.com/office/drawing/2014/main" id="{7EA0E642-4375-8C6D-265F-FD3028B00C64}"/>
-              </a:ext>
-            </a:extLst>
-          </p:cNvPr>
-          <p:cNvSpPr>
-            <a:spLocks noGrp="1" noRot="1" noChangeAspect="1"/>
-          </p:cNvSpPr>
-          <p:nvPr>
-            <p:ph type="sldImg" idx="2"/>
-          </p:nvPr>
-        </p:nvSpPr>
-        <p:spPr>
-          <a:xfrm>
-            <a:off x="381000" y="685800"/>
-            <a:ext cx="6096000" cy="3429000"/>
-          </a:xfrm>
-          <a:custGeom>
-            <a:avLst/>
-            <a:gdLst/>
-            <a:ahLst/>
-            <a:cxnLst/>
-            <a:rect l="l" t="t" r="r" b="b"/>
-            <a:pathLst>
-              <a:path w="120000" h="120000" extrusionOk="0">
-                <a:moveTo>
-                  <a:pt x="0" y="0"/>
-                </a:moveTo>
-                <a:lnTo>
-                  <a:pt x="120000" y="0"/>
-                </a:lnTo>
-                <a:lnTo>
-                  <a:pt x="120000" y="120000"/>
-                </a:lnTo>
-                <a:lnTo>
-                  <a:pt x="0" y="120000"/>
-                </a:lnTo>
-                <a:close/>
-              </a:path>
-            </a:pathLst>
-          </a:custGeom>
-        </p:spPr>
-        <p:txBody>
-          <a:bodyPr/>
-          <a:lstStyle/>
-          <a:p>
-            <a:endParaRPr lang="en-GB"/>
-          </a:p>
-        </p:txBody>
-      </p:sp>
-      <p:sp>
-        <p:nvSpPr>
-          <p:cNvPr id="1469" name="Google Shape;1469;gd431007ba2_0_208:notes">
-            <a:extLst>
-              <a:ext uri="{FF2B5EF4-FFF2-40B4-BE49-F238E27FC236}">
-                <a16:creationId xmlns:a16="http://schemas.microsoft.com/office/drawing/2014/main" id="{A4D27BB1-40DA-8135-C6BB-B6B704F43896}"/>
-              </a:ext>
-            </a:extLst>
-          </p:cNvPr>
-          <p:cNvSpPr txBox="1">
-            <a:spLocks noGrp="1"/>
-          </p:cNvSpPr>
-          <p:nvPr>
-            <p:ph type="body" idx="1"/>
-          </p:nvPr>
-        </p:nvSpPr>
-        <p:spPr>
-          <a:xfrm>
-            <a:off x="685800" y="4343400"/>
-            <a:ext cx="5486400" cy="4114800"/>
-          </a:xfrm>
-          <a:prstGeom prst="rect">
-            <a:avLst/>
-          </a:prstGeom>
-        </p:spPr>
-        <p:txBody>
-          <a:bodyPr spcFirstLastPara="1" wrap="square" lIns="91425" tIns="91425" rIns="91425" bIns="91425" anchor="t" anchorCtr="0">
-            <a:noAutofit/>
-          </a:bodyPr>
-          <a:lstStyle/>
-          <a:p>
-            <a:pPr marL="0" lvl="0" indent="0" algn="l" rtl="0">
-              <a:spcBef>
-                <a:spcPts val="0"/>
-              </a:spcBef>
-              <a:spcAft>
-                <a:spcPts val="0"/>
-              </a:spcAft>
-              <a:buNone/>
-            </a:pPr>
-            <a:endParaRPr dirty="0"/>
-          </a:p>
-        </p:txBody>
-      </p:sp>
-    </p:spTree>
-    <p:extLst>
-      <p:ext uri="{BB962C8B-B14F-4D97-AF65-F5344CB8AC3E}">
-        <p14:creationId xmlns:p14="http://schemas.microsoft.com/office/powerpoint/2010/main" val="897538169"/>
       </p:ext>
     </p:extLst>
   </p:cSld>
@@ -28541,10 +28541,10 @@
       </p:sp>
       <p:pic>
         <p:nvPicPr>
-          <p:cNvPr id="3" name="Picture 2">
+          <p:cNvPr id="8" name="Picture 7">
             <a:extLst>
               <a:ext uri="{FF2B5EF4-FFF2-40B4-BE49-F238E27FC236}">
-                <a16:creationId xmlns:a16="http://schemas.microsoft.com/office/drawing/2014/main" id="{7074EDC8-B483-2A63-E5E0-F2A863FCF5CD}"/>
+                <a16:creationId xmlns:a16="http://schemas.microsoft.com/office/drawing/2014/main" id="{992E2E88-5978-A5CA-EA45-5519FDF7806F}"/>
               </a:ext>
             </a:extLst>
           </p:cNvPr>
@@ -28555,14 +28555,15 @@
         </p:nvPicPr>
         <p:blipFill>
           <a:blip r:embed="rId3"/>
+          <a:srcRect b="1217"/>
           <a:stretch>
             <a:fillRect/>
           </a:stretch>
         </p:blipFill>
         <p:spPr>
           <a:xfrm>
-            <a:off x="1101662" y="1373631"/>
-            <a:ext cx="7057634" cy="3065727"/>
+            <a:off x="822212" y="1296145"/>
+            <a:ext cx="7330328" cy="3161553"/>
           </a:xfrm>
           <a:prstGeom prst="rect">
             <a:avLst/>
@@ -28659,7 +28660,7 @@
         <p:spPr>
           <a:xfrm>
             <a:off x="524792" y="800931"/>
-            <a:ext cx="3766642" cy="307777"/>
+            <a:ext cx="3323307" cy="307777"/>
           </a:xfrm>
           <a:prstGeom prst="rect">
             <a:avLst/>
@@ -28681,10 +28682,10 @@
       </p:sp>
       <p:pic>
         <p:nvPicPr>
-          <p:cNvPr id="3" name="Picture 2">
+          <p:cNvPr id="10" name="Picture 9">
             <a:extLst>
               <a:ext uri="{FF2B5EF4-FFF2-40B4-BE49-F238E27FC236}">
-                <a16:creationId xmlns:a16="http://schemas.microsoft.com/office/drawing/2014/main" id="{BC236D4E-1DE0-1E30-C7FC-EBC4A6CAFBDA}"/>
+                <a16:creationId xmlns:a16="http://schemas.microsoft.com/office/drawing/2014/main" id="{D60CAFC1-4406-19E3-AA4C-CEBD7F7DEB5C}"/>
               </a:ext>
             </a:extLst>
           </p:cNvPr>
@@ -28695,14 +28696,15 @@
         </p:nvPicPr>
         <p:blipFill>
           <a:blip r:embed="rId3"/>
+          <a:srcRect t="2450"/>
           <a:stretch>
             <a:fillRect/>
           </a:stretch>
         </p:blipFill>
         <p:spPr>
           <a:xfrm>
-            <a:off x="1126995" y="1373631"/>
-            <a:ext cx="6890009" cy="2996271"/>
+            <a:off x="827655" y="1373631"/>
+            <a:ext cx="7488690" cy="3172969"/>
           </a:xfrm>
           <a:prstGeom prst="rect">
             <a:avLst/>
@@ -28821,10 +28823,10 @@
       </p:sp>
       <p:pic>
         <p:nvPicPr>
-          <p:cNvPr id="4" name="Picture 3">
+          <p:cNvPr id="14" name="Picture 13">
             <a:extLst>
               <a:ext uri="{FF2B5EF4-FFF2-40B4-BE49-F238E27FC236}">
-                <a16:creationId xmlns:a16="http://schemas.microsoft.com/office/drawing/2014/main" id="{1B8E33C1-1CD7-AB79-7A3C-ACD2FBF8AA45}"/>
+                <a16:creationId xmlns:a16="http://schemas.microsoft.com/office/drawing/2014/main" id="{CDC3B0E4-3CFE-EFD9-7D28-C0F98EE1E82E}"/>
               </a:ext>
             </a:extLst>
           </p:cNvPr>
@@ -28835,14 +28837,15 @@
         </p:nvPicPr>
         <p:blipFill>
           <a:blip r:embed="rId3"/>
+          <a:srcRect t="3108"/>
           <a:stretch>
             <a:fillRect/>
           </a:stretch>
         </p:blipFill>
         <p:spPr>
           <a:xfrm>
-            <a:off x="925636" y="1241109"/>
-            <a:ext cx="7292728" cy="3211476"/>
+            <a:off x="833098" y="1373631"/>
+            <a:ext cx="7477804" cy="3084069"/>
           </a:xfrm>
           <a:prstGeom prst="rect">
             <a:avLst/>
@@ -33134,1911 +33137,6 @@
           </a:p>
         </p:txBody>
       </p:sp>
-      <p:graphicFrame>
-        <p:nvGraphicFramePr>
-          <p:cNvPr id="4" name="Table 3">
-            <a:extLst>
-              <a:ext uri="{FF2B5EF4-FFF2-40B4-BE49-F238E27FC236}">
-                <a16:creationId xmlns:a16="http://schemas.microsoft.com/office/drawing/2014/main" id="{A66C6707-85C2-A7E0-4F4C-D83B2BB40320}"/>
-              </a:ext>
-            </a:extLst>
-          </p:cNvPr>
-          <p:cNvGraphicFramePr>
-            <a:graphicFrameLocks noGrp="1"/>
-          </p:cNvGraphicFramePr>
-          <p:nvPr>
-            <p:extLst>
-              <p:ext uri="{D42A27DB-BD31-4B8C-83A1-F6EECF244321}">
-                <p14:modId xmlns:p14="http://schemas.microsoft.com/office/powerpoint/2010/main" val="2076944259"/>
-              </p:ext>
-            </p:extLst>
-          </p:nvPr>
-        </p:nvGraphicFramePr>
-        <p:xfrm>
-          <a:off x="601442" y="1108708"/>
-          <a:ext cx="7941115" cy="1409830"/>
-        </p:xfrm>
-        <a:graphic>
-          <a:graphicData uri="http://schemas.openxmlformats.org/drawingml/2006/table">
-            <a:tbl>
-              <a:tblPr firstRow="1" firstCol="1" bandRow="1">
-                <a:tableStyleId>{AE00A097-0C75-493B-BA82-CAC8FEF640B5}</a:tableStyleId>
-              </a:tblPr>
-              <a:tblGrid>
-                <a:gridCol w="983065">
-                  <a:extLst>
-                    <a:ext uri="{9D8B030D-6E8A-4147-A177-3AD203B41FA5}">
-                      <a16:colId xmlns:a16="http://schemas.microsoft.com/office/drawing/2014/main" val="3616488025"/>
-                    </a:ext>
-                  </a:extLst>
-                </a:gridCol>
-                <a:gridCol w="669434">
-                  <a:extLst>
-                    <a:ext uri="{9D8B030D-6E8A-4147-A177-3AD203B41FA5}">
-                      <a16:colId xmlns:a16="http://schemas.microsoft.com/office/drawing/2014/main" val="3155446673"/>
-                    </a:ext>
-                  </a:extLst>
-                </a:gridCol>
-                <a:gridCol w="730291">
-                  <a:extLst>
-                    <a:ext uri="{9D8B030D-6E8A-4147-A177-3AD203B41FA5}">
-                      <a16:colId xmlns:a16="http://schemas.microsoft.com/office/drawing/2014/main" val="4058151891"/>
-                    </a:ext>
-                  </a:extLst>
-                </a:gridCol>
-                <a:gridCol w="842953">
-                  <a:extLst>
-                    <a:ext uri="{9D8B030D-6E8A-4147-A177-3AD203B41FA5}">
-                      <a16:colId xmlns:a16="http://schemas.microsoft.com/office/drawing/2014/main" val="944134335"/>
-                    </a:ext>
-                  </a:extLst>
-                </a:gridCol>
-                <a:gridCol w="868057">
-                  <a:extLst>
-                    <a:ext uri="{9D8B030D-6E8A-4147-A177-3AD203B41FA5}">
-                      <a16:colId xmlns:a16="http://schemas.microsoft.com/office/drawing/2014/main" val="4026360934"/>
-                    </a:ext>
-                  </a:extLst>
-                </a:gridCol>
-                <a:gridCol w="677775">
-                  <a:extLst>
-                    <a:ext uri="{9D8B030D-6E8A-4147-A177-3AD203B41FA5}">
-                      <a16:colId xmlns:a16="http://schemas.microsoft.com/office/drawing/2014/main" val="1686710642"/>
-                    </a:ext>
-                  </a:extLst>
-                </a:gridCol>
-                <a:gridCol w="737809">
-                  <a:extLst>
-                    <a:ext uri="{9D8B030D-6E8A-4147-A177-3AD203B41FA5}">
-                      <a16:colId xmlns:a16="http://schemas.microsoft.com/office/drawing/2014/main" val="3581253123"/>
-                    </a:ext>
-                  </a:extLst>
-                </a:gridCol>
-                <a:gridCol w="737809">
-                  <a:extLst>
-                    <a:ext uri="{9D8B030D-6E8A-4147-A177-3AD203B41FA5}">
-                      <a16:colId xmlns:a16="http://schemas.microsoft.com/office/drawing/2014/main" val="3687334382"/>
-                    </a:ext>
-                  </a:extLst>
-                </a:gridCol>
-                <a:gridCol w="737809">
-                  <a:extLst>
-                    <a:ext uri="{9D8B030D-6E8A-4147-A177-3AD203B41FA5}">
-                      <a16:colId xmlns:a16="http://schemas.microsoft.com/office/drawing/2014/main" val="2782099018"/>
-                    </a:ext>
-                  </a:extLst>
-                </a:gridCol>
-                <a:gridCol w="956113">
-                  <a:extLst>
-                    <a:ext uri="{9D8B030D-6E8A-4147-A177-3AD203B41FA5}">
-                      <a16:colId xmlns:a16="http://schemas.microsoft.com/office/drawing/2014/main" val="2635150379"/>
-                    </a:ext>
-                  </a:extLst>
-                </a:gridCol>
-              </a:tblGrid>
-              <a:tr h="424054">
-                <a:tc>
-                  <a:txBody>
-                    <a:bodyPr/>
-                    <a:lstStyle/>
-                    <a:p>
-                      <a:pPr>
-                        <a:lnSpc>
-                          <a:spcPct val="200000"/>
-                        </a:lnSpc>
-                        <a:spcAft>
-                          <a:spcPts val="1000"/>
-                        </a:spcAft>
-                        <a:buNone/>
-                      </a:pPr>
-                      <a:r>
-                        <a:rPr lang="en-GB" sz="1200" kern="100" dirty="0">
-                          <a:effectLst/>
-                        </a:rPr>
-                        <a:t>Algorithm</a:t>
-                      </a:r>
-                      <a:endParaRPr lang="en-GB" sz="1100" kern="100" dirty="0">
-                        <a:effectLst/>
-                        <a:latin typeface="Aptos" panose="020B0004020202020204" pitchFamily="34" charset="0"/>
-                        <a:ea typeface="Aptos" panose="020B0004020202020204" pitchFamily="34" charset="0"/>
-                        <a:cs typeface="Arial" panose="020B0604020202020204" pitchFamily="34" charset="0"/>
-                      </a:endParaRPr>
-                    </a:p>
-                  </a:txBody>
-                  <a:tcPr marL="68580" marR="68580" marT="0" marB="0"/>
-                </a:tc>
-                <a:tc>
-                  <a:txBody>
-                    <a:bodyPr/>
-                    <a:lstStyle/>
-                    <a:p>
-                      <a:pPr>
-                        <a:lnSpc>
-                          <a:spcPct val="200000"/>
-                        </a:lnSpc>
-                        <a:spcAft>
-                          <a:spcPts val="1000"/>
-                        </a:spcAft>
-                        <a:buNone/>
-                      </a:pPr>
-                      <a:r>
-                        <a:rPr lang="en-GB" sz="1200" kern="100">
-                          <a:effectLst/>
-                        </a:rPr>
-                        <a:t>Karate</a:t>
-                      </a:r>
-                      <a:endParaRPr lang="en-GB" sz="1100" kern="100">
-                        <a:effectLst/>
-                        <a:latin typeface="Aptos" panose="020B0004020202020204" pitchFamily="34" charset="0"/>
-                        <a:ea typeface="Aptos" panose="020B0004020202020204" pitchFamily="34" charset="0"/>
-                        <a:cs typeface="Arial" panose="020B0604020202020204" pitchFamily="34" charset="0"/>
-                      </a:endParaRPr>
-                    </a:p>
-                  </a:txBody>
-                  <a:tcPr marL="68580" marR="68580" marT="0" marB="0"/>
-                </a:tc>
-                <a:tc>
-                  <a:txBody>
-                    <a:bodyPr/>
-                    <a:lstStyle/>
-                    <a:p>
-                      <a:pPr>
-                        <a:lnSpc>
-                          <a:spcPct val="200000"/>
-                        </a:lnSpc>
-                        <a:spcAft>
-                          <a:spcPts val="1000"/>
-                        </a:spcAft>
-                        <a:buNone/>
-                      </a:pPr>
-                      <a:r>
-                        <a:rPr lang="en-GB" sz="1200" kern="100" dirty="0">
-                          <a:effectLst/>
-                        </a:rPr>
-                        <a:t>Dolphins</a:t>
-                      </a:r>
-                      <a:endParaRPr lang="en-GB" sz="1100" kern="100" dirty="0">
-                        <a:effectLst/>
-                        <a:latin typeface="Aptos" panose="020B0004020202020204" pitchFamily="34" charset="0"/>
-                        <a:ea typeface="Aptos" panose="020B0004020202020204" pitchFamily="34" charset="0"/>
-                        <a:cs typeface="Arial" panose="020B0604020202020204" pitchFamily="34" charset="0"/>
-                      </a:endParaRPr>
-                    </a:p>
-                  </a:txBody>
-                  <a:tcPr marL="68580" marR="68580" marT="0" marB="0"/>
-                </a:tc>
-                <a:tc>
-                  <a:txBody>
-                    <a:bodyPr/>
-                    <a:lstStyle/>
-                    <a:p>
-                      <a:pPr>
-                        <a:lnSpc>
-                          <a:spcPct val="200000"/>
-                        </a:lnSpc>
-                        <a:spcAft>
-                          <a:spcPts val="1000"/>
-                        </a:spcAft>
-                        <a:buNone/>
-                      </a:pPr>
-                      <a:r>
-                        <a:rPr lang="en-GB" sz="1200" kern="100">
-                          <a:effectLst/>
-                        </a:rPr>
-                        <a:t>Football</a:t>
-                      </a:r>
-                      <a:endParaRPr lang="en-GB" sz="1100" kern="100">
-                        <a:effectLst/>
-                        <a:latin typeface="Aptos" panose="020B0004020202020204" pitchFamily="34" charset="0"/>
-                        <a:ea typeface="Aptos" panose="020B0004020202020204" pitchFamily="34" charset="0"/>
-                        <a:cs typeface="Arial" panose="020B0604020202020204" pitchFamily="34" charset="0"/>
-                      </a:endParaRPr>
-                    </a:p>
-                  </a:txBody>
-                  <a:tcPr marL="68580" marR="68580" marT="0" marB="0"/>
-                </a:tc>
-                <a:tc>
-                  <a:txBody>
-                    <a:bodyPr/>
-                    <a:lstStyle/>
-                    <a:p>
-                      <a:pPr>
-                        <a:lnSpc>
-                          <a:spcPct val="200000"/>
-                        </a:lnSpc>
-                        <a:spcAft>
-                          <a:spcPts val="1000"/>
-                        </a:spcAft>
-                        <a:buNone/>
-                      </a:pPr>
-                      <a:r>
-                        <a:rPr lang="en-GB" sz="1200" kern="100">
-                          <a:effectLst/>
-                        </a:rPr>
-                        <a:t>Polbooks</a:t>
-                      </a:r>
-                      <a:endParaRPr lang="en-GB" sz="1100" kern="100">
-                        <a:effectLst/>
-                        <a:latin typeface="Aptos" panose="020B0004020202020204" pitchFamily="34" charset="0"/>
-                        <a:ea typeface="Aptos" panose="020B0004020202020204" pitchFamily="34" charset="0"/>
-                        <a:cs typeface="Arial" panose="020B0604020202020204" pitchFamily="34" charset="0"/>
-                      </a:endParaRPr>
-                    </a:p>
-                  </a:txBody>
-                  <a:tcPr marL="68580" marR="68580" marT="0" marB="0"/>
-                </a:tc>
-                <a:tc>
-                  <a:txBody>
-                    <a:bodyPr/>
-                    <a:lstStyle/>
-                    <a:p>
-                      <a:pPr>
-                        <a:lnSpc>
-                          <a:spcPct val="200000"/>
-                        </a:lnSpc>
-                        <a:spcAft>
-                          <a:spcPts val="1000"/>
-                        </a:spcAft>
-                        <a:buNone/>
-                      </a:pPr>
-                      <a:r>
-                        <a:rPr lang="en-GB" sz="1200" kern="100">
-                          <a:effectLst/>
-                        </a:rPr>
-                        <a:t>PS</a:t>
-                      </a:r>
-                      <a:endParaRPr lang="en-GB" sz="1100" kern="100">
-                        <a:effectLst/>
-                        <a:latin typeface="Aptos" panose="020B0004020202020204" pitchFamily="34" charset="0"/>
-                        <a:ea typeface="Aptos" panose="020B0004020202020204" pitchFamily="34" charset="0"/>
-                        <a:cs typeface="Arial" panose="020B0604020202020204" pitchFamily="34" charset="0"/>
-                      </a:endParaRPr>
-                    </a:p>
-                  </a:txBody>
-                  <a:tcPr marL="68580" marR="68580" marT="0" marB="0"/>
-                </a:tc>
-                <a:tc>
-                  <a:txBody>
-                    <a:bodyPr/>
-                    <a:lstStyle/>
-                    <a:p>
-                      <a:pPr>
-                        <a:lnSpc>
-                          <a:spcPct val="200000"/>
-                        </a:lnSpc>
-                        <a:spcAft>
-                          <a:spcPts val="1000"/>
-                        </a:spcAft>
-                        <a:buNone/>
-                      </a:pPr>
-                      <a:r>
-                        <a:rPr lang="en-GB" sz="1200" kern="100">
-                          <a:effectLst/>
-                        </a:rPr>
-                        <a:t>VS13</a:t>
-                      </a:r>
-                      <a:endParaRPr lang="en-GB" sz="1100" kern="100">
-                        <a:effectLst/>
-                        <a:latin typeface="Aptos" panose="020B0004020202020204" pitchFamily="34" charset="0"/>
-                        <a:ea typeface="Aptos" panose="020B0004020202020204" pitchFamily="34" charset="0"/>
-                        <a:cs typeface="Arial" panose="020B0604020202020204" pitchFamily="34" charset="0"/>
-                      </a:endParaRPr>
-                    </a:p>
-                  </a:txBody>
-                  <a:tcPr marL="68580" marR="68580" marT="0" marB="0"/>
-                </a:tc>
-                <a:tc>
-                  <a:txBody>
-                    <a:bodyPr/>
-                    <a:lstStyle/>
-                    <a:p>
-                      <a:pPr>
-                        <a:lnSpc>
-                          <a:spcPct val="200000"/>
-                        </a:lnSpc>
-                        <a:spcAft>
-                          <a:spcPts val="1000"/>
-                        </a:spcAft>
-                        <a:buNone/>
-                      </a:pPr>
-                      <a:r>
-                        <a:rPr lang="en-GB" sz="1200" kern="100">
-                          <a:effectLst/>
-                        </a:rPr>
-                        <a:t>VS15</a:t>
-                      </a:r>
-                      <a:endParaRPr lang="en-GB" sz="1100" kern="100">
-                        <a:effectLst/>
-                        <a:latin typeface="Aptos" panose="020B0004020202020204" pitchFamily="34" charset="0"/>
-                        <a:ea typeface="Aptos" panose="020B0004020202020204" pitchFamily="34" charset="0"/>
-                        <a:cs typeface="Arial" panose="020B0604020202020204" pitchFamily="34" charset="0"/>
-                      </a:endParaRPr>
-                    </a:p>
-                  </a:txBody>
-                  <a:tcPr marL="68580" marR="68580" marT="0" marB="0"/>
-                </a:tc>
-                <a:tc>
-                  <a:txBody>
-                    <a:bodyPr/>
-                    <a:lstStyle/>
-                    <a:p>
-                      <a:pPr>
-                        <a:lnSpc>
-                          <a:spcPct val="200000"/>
-                        </a:lnSpc>
-                        <a:spcAft>
-                          <a:spcPts val="1000"/>
-                        </a:spcAft>
-                        <a:buNone/>
-                      </a:pPr>
-                      <a:r>
-                        <a:rPr lang="en-GB" sz="1200" kern="100">
-                          <a:effectLst/>
-                        </a:rPr>
-                        <a:t>FB</a:t>
-                      </a:r>
-                      <a:endParaRPr lang="en-GB" sz="1100" kern="100">
-                        <a:effectLst/>
-                        <a:latin typeface="Aptos" panose="020B0004020202020204" pitchFamily="34" charset="0"/>
-                        <a:ea typeface="Aptos" panose="020B0004020202020204" pitchFamily="34" charset="0"/>
-                        <a:cs typeface="Arial" panose="020B0604020202020204" pitchFamily="34" charset="0"/>
-                      </a:endParaRPr>
-                    </a:p>
-                  </a:txBody>
-                  <a:tcPr marL="68580" marR="68580" marT="0" marB="0"/>
-                </a:tc>
-                <a:tc>
-                  <a:txBody>
-                    <a:bodyPr/>
-                    <a:lstStyle/>
-                    <a:p>
-                      <a:pPr>
-                        <a:lnSpc>
-                          <a:spcPct val="200000"/>
-                        </a:lnSpc>
-                        <a:spcAft>
-                          <a:spcPts val="1000"/>
-                        </a:spcAft>
-                        <a:buNone/>
-                      </a:pPr>
-                      <a:r>
-                        <a:rPr lang="en-GB" sz="1200" kern="100" dirty="0" err="1">
-                          <a:effectLst/>
-                        </a:rPr>
-                        <a:t>LastFM</a:t>
-                      </a:r>
-                      <a:endParaRPr lang="en-GB" sz="1100" kern="100" dirty="0">
-                        <a:effectLst/>
-                        <a:latin typeface="Aptos" panose="020B0004020202020204" pitchFamily="34" charset="0"/>
-                        <a:ea typeface="Aptos" panose="020B0004020202020204" pitchFamily="34" charset="0"/>
-                        <a:cs typeface="Arial" panose="020B0604020202020204" pitchFamily="34" charset="0"/>
-                      </a:endParaRPr>
-                    </a:p>
-                  </a:txBody>
-                  <a:tcPr marL="68580" marR="68580" marT="0" marB="0"/>
-                </a:tc>
-                <a:extLst>
-                  <a:ext uri="{0D108BD9-81ED-4DB2-BD59-A6C34878D82A}">
-                    <a16:rowId xmlns:a16="http://schemas.microsoft.com/office/drawing/2014/main" val="2862840606"/>
-                  </a:ext>
-                </a:extLst>
-              </a:tr>
-              <a:tr h="206061">
-                <a:tc>
-                  <a:txBody>
-                    <a:bodyPr/>
-                    <a:lstStyle/>
-                    <a:p>
-                      <a:pPr>
-                        <a:lnSpc>
-                          <a:spcPct val="115000"/>
-                        </a:lnSpc>
-                        <a:spcAft>
-                          <a:spcPts val="1000"/>
-                        </a:spcAft>
-                        <a:buNone/>
-                      </a:pPr>
-                      <a:r>
-                        <a:rPr lang="en-GB" sz="1200" kern="100" dirty="0">
-                          <a:effectLst/>
-                        </a:rPr>
-                        <a:t>GCN</a:t>
-                      </a:r>
-                      <a:endParaRPr lang="en-GB" sz="1100" kern="100" dirty="0">
-                        <a:effectLst/>
-                        <a:latin typeface="Aptos" panose="020B0004020202020204" pitchFamily="34" charset="0"/>
-                        <a:ea typeface="Aptos" panose="020B0004020202020204" pitchFamily="34" charset="0"/>
-                        <a:cs typeface="Arial" panose="020B0604020202020204" pitchFamily="34" charset="0"/>
-                      </a:endParaRPr>
-                    </a:p>
-                  </a:txBody>
-                  <a:tcPr marL="68580" marR="68580" marT="0" marB="0"/>
-                </a:tc>
-                <a:tc>
-                  <a:txBody>
-                    <a:bodyPr/>
-                    <a:lstStyle/>
-                    <a:p>
-                      <a:pPr algn="just">
-                        <a:lnSpc>
-                          <a:spcPct val="150000"/>
-                        </a:lnSpc>
-                        <a:spcAft>
-                          <a:spcPts val="1000"/>
-                        </a:spcAft>
-                        <a:buNone/>
-                      </a:pPr>
-                      <a:r>
-                        <a:rPr lang="en-GB" sz="1200" b="0" kern="100" dirty="0">
-                          <a:solidFill>
-                            <a:schemeClr val="tx1"/>
-                          </a:solidFill>
-                          <a:effectLst/>
-                          <a:highlight>
-                            <a:srgbClr val="FFFF00"/>
-                          </a:highlight>
-                          <a:latin typeface="Times New Roman" panose="02020603050405020304" pitchFamily="18" charset="0"/>
-                          <a:ea typeface="Aptos" panose="020B0004020202020204" pitchFamily="34" charset="0"/>
-                          <a:cs typeface="Arial" panose="020B0604020202020204" pitchFamily="34" charset="0"/>
-                        </a:rPr>
-                        <a:t>0.8372</a:t>
-                      </a:r>
-                      <a:endParaRPr lang="en-GB" sz="1100" b="0" kern="100" dirty="0">
-                        <a:solidFill>
-                          <a:schemeClr val="tx1"/>
-                        </a:solidFill>
-                        <a:effectLst/>
-                        <a:latin typeface="Aptos" panose="020B0004020202020204" pitchFamily="34" charset="0"/>
-                        <a:ea typeface="Aptos" panose="020B0004020202020204" pitchFamily="34" charset="0"/>
-                        <a:cs typeface="Arial" panose="020B0604020202020204" pitchFamily="34" charset="0"/>
-                      </a:endParaRPr>
-                    </a:p>
-                  </a:txBody>
-                  <a:tcPr marL="68580" marR="68580" marT="0" marB="0"/>
-                </a:tc>
-                <a:tc>
-                  <a:txBody>
-                    <a:bodyPr/>
-                    <a:lstStyle/>
-                    <a:p>
-                      <a:pPr algn="just">
-                        <a:lnSpc>
-                          <a:spcPct val="150000"/>
-                        </a:lnSpc>
-                        <a:spcAft>
-                          <a:spcPts val="1000"/>
-                        </a:spcAft>
-                        <a:buNone/>
-                      </a:pPr>
-                      <a:r>
-                        <a:rPr lang="en-GB" sz="1200" b="0" kern="100" dirty="0">
-                          <a:solidFill>
-                            <a:schemeClr val="tx1"/>
-                          </a:solidFill>
-                          <a:effectLst/>
-                          <a:latin typeface="Times New Roman" panose="02020603050405020304" pitchFamily="18" charset="0"/>
-                          <a:ea typeface="Aptos" panose="020B0004020202020204" pitchFamily="34" charset="0"/>
-                          <a:cs typeface="Arial" panose="020B0604020202020204" pitchFamily="34" charset="0"/>
-                        </a:rPr>
-                        <a:t>0.8888</a:t>
-                      </a:r>
-                      <a:endParaRPr lang="en-GB" sz="1100" b="0" kern="100" dirty="0">
-                        <a:solidFill>
-                          <a:schemeClr val="tx1"/>
-                        </a:solidFill>
-                        <a:effectLst/>
-                        <a:latin typeface="Aptos" panose="020B0004020202020204" pitchFamily="34" charset="0"/>
-                        <a:ea typeface="Aptos" panose="020B0004020202020204" pitchFamily="34" charset="0"/>
-                        <a:cs typeface="Arial" panose="020B0604020202020204" pitchFamily="34" charset="0"/>
-                      </a:endParaRPr>
-                    </a:p>
-                  </a:txBody>
-                  <a:tcPr marL="68580" marR="68580" marT="0" marB="0"/>
-                </a:tc>
-                <a:tc>
-                  <a:txBody>
-                    <a:bodyPr/>
-                    <a:lstStyle/>
-                    <a:p>
-                      <a:pPr algn="just">
-                        <a:lnSpc>
-                          <a:spcPct val="150000"/>
-                        </a:lnSpc>
-                        <a:spcAft>
-                          <a:spcPts val="1000"/>
-                        </a:spcAft>
-                        <a:buNone/>
-                      </a:pPr>
-                      <a:r>
-                        <a:rPr lang="en-GB" sz="1200" b="0" kern="100" dirty="0">
-                          <a:solidFill>
-                            <a:schemeClr val="tx1"/>
-                          </a:solidFill>
-                          <a:effectLst/>
-                          <a:highlight>
-                            <a:srgbClr val="FFFF00"/>
-                          </a:highlight>
-                          <a:latin typeface="Times New Roman" panose="02020603050405020304" pitchFamily="18" charset="0"/>
-                          <a:ea typeface="Aptos" panose="020B0004020202020204" pitchFamily="34" charset="0"/>
-                          <a:cs typeface="Arial" panose="020B0604020202020204" pitchFamily="34" charset="0"/>
-                        </a:rPr>
-                        <a:t>0.925</a:t>
-                      </a:r>
-                      <a:endParaRPr lang="en-GB" sz="1100" b="0" kern="100" dirty="0">
-                        <a:solidFill>
-                          <a:schemeClr val="tx1"/>
-                        </a:solidFill>
-                        <a:effectLst/>
-                        <a:latin typeface="Aptos" panose="020B0004020202020204" pitchFamily="34" charset="0"/>
-                        <a:ea typeface="Aptos" panose="020B0004020202020204" pitchFamily="34" charset="0"/>
-                        <a:cs typeface="Arial" panose="020B0604020202020204" pitchFamily="34" charset="0"/>
-                      </a:endParaRPr>
-                    </a:p>
-                  </a:txBody>
-                  <a:tcPr marL="68580" marR="68580" marT="0" marB="0"/>
-                </a:tc>
-                <a:tc>
-                  <a:txBody>
-                    <a:bodyPr/>
-                    <a:lstStyle/>
-                    <a:p>
-                      <a:pPr algn="just">
-                        <a:lnSpc>
-                          <a:spcPct val="150000"/>
-                        </a:lnSpc>
-                        <a:spcAft>
-                          <a:spcPts val="1000"/>
-                        </a:spcAft>
-                        <a:buNone/>
-                      </a:pPr>
-                      <a:r>
-                        <a:rPr lang="en-GB" sz="1200" b="0" kern="100" dirty="0">
-                          <a:solidFill>
-                            <a:schemeClr val="tx1"/>
-                          </a:solidFill>
-                          <a:effectLst/>
-                          <a:highlight>
-                            <a:srgbClr val="FFFF00"/>
-                          </a:highlight>
-                          <a:latin typeface="Times New Roman" panose="02020603050405020304" pitchFamily="18" charset="0"/>
-                          <a:ea typeface="Aptos" panose="020B0004020202020204" pitchFamily="34" charset="0"/>
-                          <a:cs typeface="Arial" panose="020B0604020202020204" pitchFamily="34" charset="0"/>
-                        </a:rPr>
-                        <a:t>0.5745</a:t>
-                      </a:r>
-                      <a:endParaRPr lang="en-GB" sz="1100" b="0" kern="100" dirty="0">
-                        <a:solidFill>
-                          <a:schemeClr val="tx1"/>
-                        </a:solidFill>
-                        <a:effectLst/>
-                        <a:latin typeface="Aptos" panose="020B0004020202020204" pitchFamily="34" charset="0"/>
-                        <a:ea typeface="Aptos" panose="020B0004020202020204" pitchFamily="34" charset="0"/>
-                        <a:cs typeface="Arial" panose="020B0604020202020204" pitchFamily="34" charset="0"/>
-                      </a:endParaRPr>
-                    </a:p>
-                  </a:txBody>
-                  <a:tcPr marL="68580" marR="68580" marT="0" marB="0"/>
-                </a:tc>
-                <a:tc>
-                  <a:txBody>
-                    <a:bodyPr/>
-                    <a:lstStyle/>
-                    <a:p>
-                      <a:pPr algn="just">
-                        <a:lnSpc>
-                          <a:spcPct val="150000"/>
-                        </a:lnSpc>
-                        <a:spcAft>
-                          <a:spcPts val="1000"/>
-                        </a:spcAft>
-                        <a:buNone/>
-                      </a:pPr>
-                      <a:r>
-                        <a:rPr lang="en-GB" sz="1200" b="0" kern="100" dirty="0">
-                          <a:solidFill>
-                            <a:schemeClr val="tx1"/>
-                          </a:solidFill>
-                          <a:effectLst/>
-                          <a:highlight>
-                            <a:srgbClr val="FFFF00"/>
-                          </a:highlight>
-                          <a:latin typeface="Times New Roman" panose="02020603050405020304" pitchFamily="18" charset="0"/>
-                          <a:ea typeface="Aptos" panose="020B0004020202020204" pitchFamily="34" charset="0"/>
-                          <a:cs typeface="Arial" panose="020B0604020202020204" pitchFamily="34" charset="0"/>
-                        </a:rPr>
-                        <a:t>0.1421</a:t>
-                      </a:r>
-                      <a:endParaRPr lang="en-GB" sz="1100" b="0" kern="100" dirty="0">
-                        <a:solidFill>
-                          <a:schemeClr val="tx1"/>
-                        </a:solidFill>
-                        <a:effectLst/>
-                        <a:latin typeface="Aptos" panose="020B0004020202020204" pitchFamily="34" charset="0"/>
-                        <a:ea typeface="Aptos" panose="020B0004020202020204" pitchFamily="34" charset="0"/>
-                        <a:cs typeface="Arial" panose="020B0604020202020204" pitchFamily="34" charset="0"/>
-                      </a:endParaRPr>
-                    </a:p>
-                  </a:txBody>
-                  <a:tcPr marL="68580" marR="68580" marT="0" marB="0"/>
-                </a:tc>
-                <a:tc>
-                  <a:txBody>
-                    <a:bodyPr/>
-                    <a:lstStyle/>
-                    <a:p>
-                      <a:pPr algn="just">
-                        <a:lnSpc>
-                          <a:spcPct val="150000"/>
-                        </a:lnSpc>
-                        <a:spcAft>
-                          <a:spcPts val="1000"/>
-                        </a:spcAft>
-                        <a:buNone/>
-                      </a:pPr>
-                      <a:r>
-                        <a:rPr lang="en-GB" sz="1200" b="0" kern="100" dirty="0">
-                          <a:solidFill>
-                            <a:schemeClr val="tx1"/>
-                          </a:solidFill>
-                          <a:effectLst/>
-                          <a:latin typeface="Times New Roman" panose="02020603050405020304" pitchFamily="18" charset="0"/>
-                          <a:ea typeface="Aptos" panose="020B0004020202020204" pitchFamily="34" charset="0"/>
-                          <a:cs typeface="Arial" panose="020B0604020202020204" pitchFamily="34" charset="0"/>
-                        </a:rPr>
-                        <a:t>0.7871</a:t>
-                      </a:r>
-                      <a:endParaRPr lang="en-GB" sz="1100" b="0" kern="100" dirty="0">
-                        <a:solidFill>
-                          <a:schemeClr val="tx1"/>
-                        </a:solidFill>
-                        <a:effectLst/>
-                        <a:latin typeface="Aptos" panose="020B0004020202020204" pitchFamily="34" charset="0"/>
-                        <a:ea typeface="Aptos" panose="020B0004020202020204" pitchFamily="34" charset="0"/>
-                        <a:cs typeface="Arial" panose="020B0604020202020204" pitchFamily="34" charset="0"/>
-                      </a:endParaRPr>
-                    </a:p>
-                  </a:txBody>
-                  <a:tcPr marL="68580" marR="68580" marT="0" marB="0"/>
-                </a:tc>
-                <a:tc>
-                  <a:txBody>
-                    <a:bodyPr/>
-                    <a:lstStyle/>
-                    <a:p>
-                      <a:pPr algn="just">
-                        <a:lnSpc>
-                          <a:spcPct val="150000"/>
-                        </a:lnSpc>
-                        <a:spcAft>
-                          <a:spcPts val="1000"/>
-                        </a:spcAft>
-                        <a:buNone/>
-                      </a:pPr>
-                      <a:r>
-                        <a:rPr lang="en-GB" sz="1200" b="0" kern="100" dirty="0">
-                          <a:solidFill>
-                            <a:schemeClr val="tx1"/>
-                          </a:solidFill>
-                          <a:effectLst/>
-                          <a:highlight>
-                            <a:srgbClr val="FFFF00"/>
-                          </a:highlight>
-                          <a:latin typeface="Times New Roman" panose="02020603050405020304" pitchFamily="18" charset="0"/>
-                          <a:ea typeface="Aptos" panose="020B0004020202020204" pitchFamily="34" charset="0"/>
-                          <a:cs typeface="Arial" panose="020B0604020202020204" pitchFamily="34" charset="0"/>
-                        </a:rPr>
-                        <a:t>0.6342</a:t>
-                      </a:r>
-                      <a:endParaRPr lang="en-GB" sz="1100" b="0" kern="100" dirty="0">
-                        <a:solidFill>
-                          <a:schemeClr val="tx1"/>
-                        </a:solidFill>
-                        <a:effectLst/>
-                        <a:latin typeface="Aptos" panose="020B0004020202020204" pitchFamily="34" charset="0"/>
-                        <a:ea typeface="Aptos" panose="020B0004020202020204" pitchFamily="34" charset="0"/>
-                        <a:cs typeface="Arial" panose="020B0604020202020204" pitchFamily="34" charset="0"/>
-                      </a:endParaRPr>
-                    </a:p>
-                  </a:txBody>
-                  <a:tcPr marL="68580" marR="68580" marT="0" marB="0"/>
-                </a:tc>
-                <a:tc>
-                  <a:txBody>
-                    <a:bodyPr/>
-                    <a:lstStyle/>
-                    <a:p>
-                      <a:pPr algn="just">
-                        <a:lnSpc>
-                          <a:spcPct val="150000"/>
-                        </a:lnSpc>
-                        <a:spcAft>
-                          <a:spcPts val="1000"/>
-                        </a:spcAft>
-                        <a:buNone/>
-                      </a:pPr>
-                      <a:r>
-                        <a:rPr lang="en-GB" sz="1200" b="0" kern="100" dirty="0">
-                          <a:solidFill>
-                            <a:schemeClr val="tx1"/>
-                          </a:solidFill>
-                          <a:effectLst/>
-                          <a:latin typeface="Times New Roman" panose="02020603050405020304" pitchFamily="18" charset="0"/>
-                          <a:ea typeface="Aptos" panose="020B0004020202020204" pitchFamily="34" charset="0"/>
-                          <a:cs typeface="Arial" panose="020B0604020202020204" pitchFamily="34" charset="0"/>
-                        </a:rPr>
-                        <a:t>0.0486</a:t>
-                      </a:r>
-                      <a:endParaRPr lang="en-GB" sz="1100" b="0" kern="100" dirty="0">
-                        <a:solidFill>
-                          <a:schemeClr val="tx1"/>
-                        </a:solidFill>
-                        <a:effectLst/>
-                        <a:latin typeface="Aptos" panose="020B0004020202020204" pitchFamily="34" charset="0"/>
-                        <a:ea typeface="Aptos" panose="020B0004020202020204" pitchFamily="34" charset="0"/>
-                        <a:cs typeface="Arial" panose="020B0604020202020204" pitchFamily="34" charset="0"/>
-                      </a:endParaRPr>
-                    </a:p>
-                  </a:txBody>
-                  <a:tcPr marL="68580" marR="68580" marT="0" marB="0"/>
-                </a:tc>
-                <a:tc>
-                  <a:txBody>
-                    <a:bodyPr/>
-                    <a:lstStyle/>
-                    <a:p>
-                      <a:pPr algn="just">
-                        <a:lnSpc>
-                          <a:spcPct val="150000"/>
-                        </a:lnSpc>
-                        <a:spcAft>
-                          <a:spcPts val="1000"/>
-                        </a:spcAft>
-                        <a:buNone/>
-                      </a:pPr>
-                      <a:r>
-                        <a:rPr lang="en-GB" sz="1200" b="0" kern="100" dirty="0">
-                          <a:solidFill>
-                            <a:schemeClr val="tx1"/>
-                          </a:solidFill>
-                          <a:effectLst/>
-                          <a:highlight>
-                            <a:srgbClr val="FFFF00"/>
-                          </a:highlight>
-                          <a:latin typeface="Times New Roman" panose="02020603050405020304" pitchFamily="18" charset="0"/>
-                          <a:ea typeface="Aptos" panose="020B0004020202020204" pitchFamily="34" charset="0"/>
-                          <a:cs typeface="Arial" panose="020B0604020202020204" pitchFamily="34" charset="0"/>
-                        </a:rPr>
-                        <a:t>0.0313</a:t>
-                      </a:r>
-                      <a:endParaRPr lang="en-GB" sz="1100" b="0" kern="100" dirty="0">
-                        <a:solidFill>
-                          <a:schemeClr val="tx1"/>
-                        </a:solidFill>
-                        <a:effectLst/>
-                        <a:latin typeface="Aptos" panose="020B0004020202020204" pitchFamily="34" charset="0"/>
-                        <a:ea typeface="Aptos" panose="020B0004020202020204" pitchFamily="34" charset="0"/>
-                        <a:cs typeface="Arial" panose="020B0604020202020204" pitchFamily="34" charset="0"/>
-                      </a:endParaRPr>
-                    </a:p>
-                  </a:txBody>
-                  <a:tcPr marL="68580" marR="68580" marT="0" marB="0"/>
-                </a:tc>
-                <a:extLst>
-                  <a:ext uri="{0D108BD9-81ED-4DB2-BD59-A6C34878D82A}">
-                    <a16:rowId xmlns:a16="http://schemas.microsoft.com/office/drawing/2014/main" val="2834496182"/>
-                  </a:ext>
-                </a:extLst>
-              </a:tr>
-              <a:tr h="206061">
-                <a:tc>
-                  <a:txBody>
-                    <a:bodyPr/>
-                    <a:lstStyle/>
-                    <a:p>
-                      <a:pPr>
-                        <a:lnSpc>
-                          <a:spcPct val="115000"/>
-                        </a:lnSpc>
-                        <a:spcAft>
-                          <a:spcPts val="1000"/>
-                        </a:spcAft>
-                        <a:buNone/>
-                      </a:pPr>
-                      <a:r>
-                        <a:rPr lang="en-GB" sz="1200" kern="100" dirty="0">
-                          <a:effectLst/>
-                        </a:rPr>
-                        <a:t>GAT</a:t>
-                      </a:r>
-                      <a:endParaRPr lang="en-GB" sz="1100" kern="100" dirty="0">
-                        <a:effectLst/>
-                        <a:latin typeface="Aptos" panose="020B0004020202020204" pitchFamily="34" charset="0"/>
-                        <a:ea typeface="Aptos" panose="020B0004020202020204" pitchFamily="34" charset="0"/>
-                        <a:cs typeface="Arial" panose="020B0604020202020204" pitchFamily="34" charset="0"/>
-                      </a:endParaRPr>
-                    </a:p>
-                  </a:txBody>
-                  <a:tcPr marL="68580" marR="68580" marT="0" marB="0"/>
-                </a:tc>
-                <a:tc>
-                  <a:txBody>
-                    <a:bodyPr/>
-                    <a:lstStyle/>
-                    <a:p>
-                      <a:pPr algn="just">
-                        <a:lnSpc>
-                          <a:spcPct val="150000"/>
-                        </a:lnSpc>
-                        <a:spcAft>
-                          <a:spcPts val="1000"/>
-                        </a:spcAft>
-                        <a:buNone/>
-                      </a:pPr>
-                      <a:r>
-                        <a:rPr lang="en-GB" sz="1200" b="0" kern="100" dirty="0">
-                          <a:solidFill>
-                            <a:srgbClr val="000000"/>
-                          </a:solidFill>
-                          <a:effectLst/>
-                          <a:latin typeface="Times New Roman" panose="02020603050405020304" pitchFamily="18" charset="0"/>
-                          <a:ea typeface="Aptos" panose="020B0004020202020204" pitchFamily="34" charset="0"/>
-                          <a:cs typeface="Arial" panose="020B0604020202020204" pitchFamily="34" charset="0"/>
-                        </a:rPr>
-                        <a:t>0.5756</a:t>
-                      </a:r>
-                      <a:endParaRPr lang="en-GB" sz="1100" b="0" kern="100" dirty="0">
-                        <a:effectLst/>
-                        <a:latin typeface="Aptos" panose="020B0004020202020204" pitchFamily="34" charset="0"/>
-                        <a:ea typeface="Aptos" panose="020B0004020202020204" pitchFamily="34" charset="0"/>
-                        <a:cs typeface="Arial" panose="020B0604020202020204" pitchFamily="34" charset="0"/>
-                      </a:endParaRPr>
-                    </a:p>
-                  </a:txBody>
-                  <a:tcPr marL="68580" marR="68580" marT="0" marB="0"/>
-                </a:tc>
-                <a:tc>
-                  <a:txBody>
-                    <a:bodyPr/>
-                    <a:lstStyle/>
-                    <a:p>
-                      <a:pPr algn="just">
-                        <a:lnSpc>
-                          <a:spcPct val="150000"/>
-                        </a:lnSpc>
-                        <a:spcAft>
-                          <a:spcPts val="1000"/>
-                        </a:spcAft>
-                        <a:buNone/>
-                      </a:pPr>
-                      <a:r>
-                        <a:rPr lang="en-GB" sz="1200" b="0" kern="100" dirty="0">
-                          <a:solidFill>
-                            <a:srgbClr val="000000"/>
-                          </a:solidFill>
-                          <a:effectLst/>
-                          <a:latin typeface="Times New Roman" panose="02020603050405020304" pitchFamily="18" charset="0"/>
-                          <a:ea typeface="Aptos" panose="020B0004020202020204" pitchFamily="34" charset="0"/>
-                          <a:cs typeface="Arial" panose="020B0604020202020204" pitchFamily="34" charset="0"/>
-                        </a:rPr>
-                        <a:t>0.8165</a:t>
-                      </a:r>
-                      <a:endParaRPr lang="en-GB" sz="1100" b="0" kern="100" dirty="0">
-                        <a:effectLst/>
-                        <a:latin typeface="Aptos" panose="020B0004020202020204" pitchFamily="34" charset="0"/>
-                        <a:ea typeface="Aptos" panose="020B0004020202020204" pitchFamily="34" charset="0"/>
-                        <a:cs typeface="Arial" panose="020B0604020202020204" pitchFamily="34" charset="0"/>
-                      </a:endParaRPr>
-                    </a:p>
-                  </a:txBody>
-                  <a:tcPr marL="68580" marR="68580" marT="0" marB="0"/>
-                </a:tc>
-                <a:tc>
-                  <a:txBody>
-                    <a:bodyPr/>
-                    <a:lstStyle/>
-                    <a:p>
-                      <a:pPr algn="just">
-                        <a:lnSpc>
-                          <a:spcPct val="150000"/>
-                        </a:lnSpc>
-                        <a:spcAft>
-                          <a:spcPts val="1000"/>
-                        </a:spcAft>
-                        <a:buNone/>
-                      </a:pPr>
-                      <a:r>
-                        <a:rPr lang="en-GB" sz="1200" b="0" kern="100" dirty="0">
-                          <a:solidFill>
-                            <a:srgbClr val="000000"/>
-                          </a:solidFill>
-                          <a:effectLst/>
-                          <a:latin typeface="Times New Roman" panose="02020603050405020304" pitchFamily="18" charset="0"/>
-                          <a:ea typeface="Aptos" panose="020B0004020202020204" pitchFamily="34" charset="0"/>
-                          <a:cs typeface="Arial" panose="020B0604020202020204" pitchFamily="34" charset="0"/>
-                        </a:rPr>
-                        <a:t>0.9195</a:t>
-                      </a:r>
-                      <a:endParaRPr lang="en-GB" sz="1100" b="0" kern="100" dirty="0">
-                        <a:effectLst/>
-                        <a:latin typeface="Aptos" panose="020B0004020202020204" pitchFamily="34" charset="0"/>
-                        <a:ea typeface="Aptos" panose="020B0004020202020204" pitchFamily="34" charset="0"/>
-                        <a:cs typeface="Arial" panose="020B0604020202020204" pitchFamily="34" charset="0"/>
-                      </a:endParaRPr>
-                    </a:p>
-                  </a:txBody>
-                  <a:tcPr marL="68580" marR="68580" marT="0" marB="0"/>
-                </a:tc>
-                <a:tc>
-                  <a:txBody>
-                    <a:bodyPr/>
-                    <a:lstStyle/>
-                    <a:p>
-                      <a:pPr algn="just">
-                        <a:lnSpc>
-                          <a:spcPct val="150000"/>
-                        </a:lnSpc>
-                        <a:spcAft>
-                          <a:spcPts val="1000"/>
-                        </a:spcAft>
-                        <a:buNone/>
-                      </a:pPr>
-                      <a:r>
-                        <a:rPr lang="en-GB" sz="1200" b="0" kern="100">
-                          <a:solidFill>
-                            <a:srgbClr val="000000"/>
-                          </a:solidFill>
-                          <a:effectLst/>
-                          <a:latin typeface="Times New Roman" panose="02020603050405020304" pitchFamily="18" charset="0"/>
-                          <a:ea typeface="Aptos" panose="020B0004020202020204" pitchFamily="34" charset="0"/>
-                          <a:cs typeface="Arial" panose="020B0604020202020204" pitchFamily="34" charset="0"/>
-                        </a:rPr>
-                        <a:t>0.4592</a:t>
-                      </a:r>
-                      <a:endParaRPr lang="en-GB" sz="1100" b="0" kern="100">
-                        <a:effectLst/>
-                        <a:latin typeface="Aptos" panose="020B0004020202020204" pitchFamily="34" charset="0"/>
-                        <a:ea typeface="Aptos" panose="020B0004020202020204" pitchFamily="34" charset="0"/>
-                        <a:cs typeface="Arial" panose="020B0604020202020204" pitchFamily="34" charset="0"/>
-                      </a:endParaRPr>
-                    </a:p>
-                  </a:txBody>
-                  <a:tcPr marL="68580" marR="68580" marT="0" marB="0"/>
-                </a:tc>
-                <a:tc>
-                  <a:txBody>
-                    <a:bodyPr/>
-                    <a:lstStyle/>
-                    <a:p>
-                      <a:pPr algn="just">
-                        <a:lnSpc>
-                          <a:spcPct val="150000"/>
-                        </a:lnSpc>
-                        <a:spcAft>
-                          <a:spcPts val="1000"/>
-                        </a:spcAft>
-                        <a:buNone/>
-                      </a:pPr>
-                      <a:r>
-                        <a:rPr lang="en-GB" sz="1200" b="0" kern="100">
-                          <a:solidFill>
-                            <a:srgbClr val="000000"/>
-                          </a:solidFill>
-                          <a:effectLst/>
-                          <a:latin typeface="Times New Roman" panose="02020603050405020304" pitchFamily="18" charset="0"/>
-                          <a:ea typeface="Aptos" panose="020B0004020202020204" pitchFamily="34" charset="0"/>
-                          <a:cs typeface="Arial" panose="020B0604020202020204" pitchFamily="34" charset="0"/>
-                        </a:rPr>
-                        <a:t>0.1119</a:t>
-                      </a:r>
-                      <a:endParaRPr lang="en-GB" sz="1100" b="0" kern="100">
-                        <a:effectLst/>
-                        <a:latin typeface="Aptos" panose="020B0004020202020204" pitchFamily="34" charset="0"/>
-                        <a:ea typeface="Aptos" panose="020B0004020202020204" pitchFamily="34" charset="0"/>
-                        <a:cs typeface="Arial" panose="020B0604020202020204" pitchFamily="34" charset="0"/>
-                      </a:endParaRPr>
-                    </a:p>
-                  </a:txBody>
-                  <a:tcPr marL="68580" marR="68580" marT="0" marB="0"/>
-                </a:tc>
-                <a:tc>
-                  <a:txBody>
-                    <a:bodyPr/>
-                    <a:lstStyle/>
-                    <a:p>
-                      <a:pPr algn="just">
-                        <a:lnSpc>
-                          <a:spcPct val="150000"/>
-                        </a:lnSpc>
-                        <a:spcAft>
-                          <a:spcPts val="1000"/>
-                        </a:spcAft>
-                        <a:buNone/>
-                      </a:pPr>
-                      <a:r>
-                        <a:rPr lang="en-GB" sz="1200" b="0" kern="100">
-                          <a:solidFill>
-                            <a:srgbClr val="000000"/>
-                          </a:solidFill>
-                          <a:effectLst/>
-                          <a:highlight>
-                            <a:srgbClr val="FFFF00"/>
-                          </a:highlight>
-                          <a:latin typeface="Times New Roman" panose="02020603050405020304" pitchFamily="18" charset="0"/>
-                          <a:ea typeface="Aptos" panose="020B0004020202020204" pitchFamily="34" charset="0"/>
-                          <a:cs typeface="Arial" panose="020B0604020202020204" pitchFamily="34" charset="0"/>
-                        </a:rPr>
-                        <a:t>0.8214</a:t>
-                      </a:r>
-                      <a:endParaRPr lang="en-GB" sz="1100" b="0" kern="100">
-                        <a:effectLst/>
-                        <a:latin typeface="Aptos" panose="020B0004020202020204" pitchFamily="34" charset="0"/>
-                        <a:ea typeface="Aptos" panose="020B0004020202020204" pitchFamily="34" charset="0"/>
-                        <a:cs typeface="Arial" panose="020B0604020202020204" pitchFamily="34" charset="0"/>
-                      </a:endParaRPr>
-                    </a:p>
-                  </a:txBody>
-                  <a:tcPr marL="68580" marR="68580" marT="0" marB="0"/>
-                </a:tc>
-                <a:tc>
-                  <a:txBody>
-                    <a:bodyPr/>
-                    <a:lstStyle/>
-                    <a:p>
-                      <a:pPr algn="just">
-                        <a:lnSpc>
-                          <a:spcPct val="150000"/>
-                        </a:lnSpc>
-                        <a:spcAft>
-                          <a:spcPts val="1000"/>
-                        </a:spcAft>
-                        <a:buNone/>
-                      </a:pPr>
-                      <a:r>
-                        <a:rPr lang="en-GB" sz="1200" b="0" kern="100">
-                          <a:solidFill>
-                            <a:srgbClr val="000000"/>
-                          </a:solidFill>
-                          <a:effectLst/>
-                          <a:highlight>
-                            <a:srgbClr val="FFFF00"/>
-                          </a:highlight>
-                          <a:latin typeface="Times New Roman" panose="02020603050405020304" pitchFamily="18" charset="0"/>
-                          <a:ea typeface="Aptos" panose="020B0004020202020204" pitchFamily="34" charset="0"/>
-                          <a:cs typeface="Arial" panose="020B0604020202020204" pitchFamily="34" charset="0"/>
-                        </a:rPr>
-                        <a:t>0.6343</a:t>
-                      </a:r>
-                      <a:endParaRPr lang="en-GB" sz="1100" b="0" kern="100">
-                        <a:effectLst/>
-                        <a:latin typeface="Aptos" panose="020B0004020202020204" pitchFamily="34" charset="0"/>
-                        <a:ea typeface="Aptos" panose="020B0004020202020204" pitchFamily="34" charset="0"/>
-                        <a:cs typeface="Arial" panose="020B0604020202020204" pitchFamily="34" charset="0"/>
-                      </a:endParaRPr>
-                    </a:p>
-                  </a:txBody>
-                  <a:tcPr marL="68580" marR="68580" marT="0" marB="0"/>
-                </a:tc>
-                <a:tc>
-                  <a:txBody>
-                    <a:bodyPr/>
-                    <a:lstStyle/>
-                    <a:p>
-                      <a:pPr algn="just">
-                        <a:lnSpc>
-                          <a:spcPct val="150000"/>
-                        </a:lnSpc>
-                        <a:spcAft>
-                          <a:spcPts val="1000"/>
-                        </a:spcAft>
-                        <a:buNone/>
-                      </a:pPr>
-                      <a:r>
-                        <a:rPr lang="en-GB" sz="1200" b="0" kern="100">
-                          <a:solidFill>
-                            <a:srgbClr val="000000"/>
-                          </a:solidFill>
-                          <a:effectLst/>
-                          <a:latin typeface="Times New Roman" panose="02020603050405020304" pitchFamily="18" charset="0"/>
-                          <a:ea typeface="Aptos" panose="020B0004020202020204" pitchFamily="34" charset="0"/>
-                          <a:cs typeface="Arial" panose="020B0604020202020204" pitchFamily="34" charset="0"/>
-                        </a:rPr>
-                        <a:t>0.0441</a:t>
-                      </a:r>
-                      <a:endParaRPr lang="en-GB" sz="1100" b="0" kern="100">
-                        <a:effectLst/>
-                        <a:latin typeface="Aptos" panose="020B0004020202020204" pitchFamily="34" charset="0"/>
-                        <a:ea typeface="Aptos" panose="020B0004020202020204" pitchFamily="34" charset="0"/>
-                        <a:cs typeface="Arial" panose="020B0604020202020204" pitchFamily="34" charset="0"/>
-                      </a:endParaRPr>
-                    </a:p>
-                  </a:txBody>
-                  <a:tcPr marL="68580" marR="68580" marT="0" marB="0"/>
-                </a:tc>
-                <a:tc>
-                  <a:txBody>
-                    <a:bodyPr/>
-                    <a:lstStyle/>
-                    <a:p>
-                      <a:pPr algn="just">
-                        <a:lnSpc>
-                          <a:spcPct val="150000"/>
-                        </a:lnSpc>
-                        <a:spcAft>
-                          <a:spcPts val="1000"/>
-                        </a:spcAft>
-                        <a:buNone/>
-                      </a:pPr>
-                      <a:r>
-                        <a:rPr lang="en-GB" sz="1200" b="0" kern="100">
-                          <a:solidFill>
-                            <a:srgbClr val="000000"/>
-                          </a:solidFill>
-                          <a:effectLst/>
-                          <a:latin typeface="Times New Roman" panose="02020603050405020304" pitchFamily="18" charset="0"/>
-                          <a:ea typeface="Aptos" panose="020B0004020202020204" pitchFamily="34" charset="0"/>
-                          <a:cs typeface="Arial" panose="020B0604020202020204" pitchFamily="34" charset="0"/>
-                        </a:rPr>
-                        <a:t>0.0295</a:t>
-                      </a:r>
-                      <a:endParaRPr lang="en-GB" sz="1100" b="0" kern="100">
-                        <a:effectLst/>
-                        <a:latin typeface="Aptos" panose="020B0004020202020204" pitchFamily="34" charset="0"/>
-                        <a:ea typeface="Aptos" panose="020B0004020202020204" pitchFamily="34" charset="0"/>
-                        <a:cs typeface="Arial" panose="020B0604020202020204" pitchFamily="34" charset="0"/>
-                      </a:endParaRPr>
-                    </a:p>
-                  </a:txBody>
-                  <a:tcPr marL="68580" marR="68580" marT="0" marB="0"/>
-                </a:tc>
-                <a:extLst>
-                  <a:ext uri="{0D108BD9-81ED-4DB2-BD59-A6C34878D82A}">
-                    <a16:rowId xmlns:a16="http://schemas.microsoft.com/office/drawing/2014/main" val="977764320"/>
-                  </a:ext>
-                </a:extLst>
-              </a:tr>
-              <a:tr h="206061">
-                <a:tc>
-                  <a:txBody>
-                    <a:bodyPr/>
-                    <a:lstStyle/>
-                    <a:p>
-                      <a:pPr>
-                        <a:lnSpc>
-                          <a:spcPct val="115000"/>
-                        </a:lnSpc>
-                        <a:spcAft>
-                          <a:spcPts val="1000"/>
-                        </a:spcAft>
-                        <a:buNone/>
-                      </a:pPr>
-                      <a:r>
-                        <a:rPr lang="fr-FR" sz="1200" kern="100" dirty="0">
-                          <a:effectLst/>
-                          <a:latin typeface="Aptos" panose="020B0004020202020204" pitchFamily="34" charset="0"/>
-                          <a:ea typeface="Aptos" panose="020B0004020202020204" pitchFamily="34" charset="0"/>
-                          <a:cs typeface="Arial" panose="020B0604020202020204" pitchFamily="34" charset="0"/>
-                        </a:rPr>
-                        <a:t>V</a:t>
-                      </a:r>
-                      <a:r>
-                        <a:rPr lang="en-GB" sz="1200" kern="100" dirty="0">
-                          <a:effectLst/>
-                          <a:latin typeface="Aptos" panose="020B0004020202020204" pitchFamily="34" charset="0"/>
-                          <a:ea typeface="Aptos" panose="020B0004020202020204" pitchFamily="34" charset="0"/>
-                          <a:cs typeface="Arial" panose="020B0604020202020204" pitchFamily="34" charset="0"/>
-                        </a:rPr>
-                        <a:t>GAE</a:t>
-                      </a:r>
-                      <a:endParaRPr lang="en-GB" sz="1100" kern="100" dirty="0">
-                        <a:effectLst/>
-                        <a:latin typeface="Aptos" panose="020B0004020202020204" pitchFamily="34" charset="0"/>
-                        <a:ea typeface="Aptos" panose="020B0004020202020204" pitchFamily="34" charset="0"/>
-                        <a:cs typeface="Arial" panose="020B0604020202020204" pitchFamily="34" charset="0"/>
-                      </a:endParaRPr>
-                    </a:p>
-                  </a:txBody>
-                  <a:tcPr marL="68580" marR="68580" marT="0" marB="0"/>
-                </a:tc>
-                <a:tc>
-                  <a:txBody>
-                    <a:bodyPr/>
-                    <a:lstStyle/>
-                    <a:p>
-                      <a:pPr algn="just">
-                        <a:lnSpc>
-                          <a:spcPct val="150000"/>
-                        </a:lnSpc>
-                        <a:spcAft>
-                          <a:spcPts val="1000"/>
-                        </a:spcAft>
-                        <a:buNone/>
-                      </a:pPr>
-                      <a:r>
-                        <a:rPr lang="en-GB" sz="1200" b="0" kern="100">
-                          <a:effectLst/>
-                          <a:latin typeface="Times New Roman" panose="02020603050405020304" pitchFamily="18" charset="0"/>
-                          <a:ea typeface="Aptos" panose="020B0004020202020204" pitchFamily="34" charset="0"/>
-                          <a:cs typeface="Arial" panose="020B0604020202020204" pitchFamily="34" charset="0"/>
-                        </a:rPr>
-                        <a:t>0.7324</a:t>
-                      </a:r>
-                      <a:endParaRPr lang="en-GB" sz="1100" b="0" kern="100">
-                        <a:effectLst/>
-                        <a:latin typeface="Aptos" panose="020B0004020202020204" pitchFamily="34" charset="0"/>
-                        <a:ea typeface="Aptos" panose="020B0004020202020204" pitchFamily="34" charset="0"/>
-                        <a:cs typeface="Arial" panose="020B0604020202020204" pitchFamily="34" charset="0"/>
-                      </a:endParaRPr>
-                    </a:p>
-                  </a:txBody>
-                  <a:tcPr marL="68580" marR="68580" marT="0" marB="0"/>
-                </a:tc>
-                <a:tc>
-                  <a:txBody>
-                    <a:bodyPr/>
-                    <a:lstStyle/>
-                    <a:p>
-                      <a:pPr algn="just">
-                        <a:lnSpc>
-                          <a:spcPct val="150000"/>
-                        </a:lnSpc>
-                        <a:spcAft>
-                          <a:spcPts val="1000"/>
-                        </a:spcAft>
-                        <a:buNone/>
-                      </a:pPr>
-                      <a:r>
-                        <a:rPr lang="en-GB" sz="1200" b="0" kern="100">
-                          <a:effectLst/>
-                          <a:highlight>
-                            <a:srgbClr val="FFFF00"/>
-                          </a:highlight>
-                          <a:latin typeface="Times New Roman" panose="02020603050405020304" pitchFamily="18" charset="0"/>
-                          <a:ea typeface="Aptos" panose="020B0004020202020204" pitchFamily="34" charset="0"/>
-                          <a:cs typeface="Arial" panose="020B0604020202020204" pitchFamily="34" charset="0"/>
-                        </a:rPr>
-                        <a:t>1</a:t>
-                      </a:r>
-                      <a:endParaRPr lang="en-GB" sz="1100" b="0" kern="100">
-                        <a:effectLst/>
-                        <a:latin typeface="Aptos" panose="020B0004020202020204" pitchFamily="34" charset="0"/>
-                        <a:ea typeface="Aptos" panose="020B0004020202020204" pitchFamily="34" charset="0"/>
-                        <a:cs typeface="Arial" panose="020B0604020202020204" pitchFamily="34" charset="0"/>
-                      </a:endParaRPr>
-                    </a:p>
-                  </a:txBody>
-                  <a:tcPr marL="68580" marR="68580" marT="0" marB="0"/>
-                </a:tc>
-                <a:tc>
-                  <a:txBody>
-                    <a:bodyPr/>
-                    <a:lstStyle/>
-                    <a:p>
-                      <a:pPr algn="just">
-                        <a:lnSpc>
-                          <a:spcPct val="150000"/>
-                        </a:lnSpc>
-                        <a:spcAft>
-                          <a:spcPts val="1000"/>
-                        </a:spcAft>
-                        <a:buNone/>
-                      </a:pPr>
-                      <a:r>
-                        <a:rPr lang="en-GB" sz="1200" b="0" kern="100" dirty="0">
-                          <a:effectLst/>
-                          <a:highlight>
-                            <a:srgbClr val="FFFF00"/>
-                          </a:highlight>
-                          <a:latin typeface="Times New Roman" panose="02020603050405020304" pitchFamily="18" charset="0"/>
-                          <a:ea typeface="Aptos" panose="020B0004020202020204" pitchFamily="34" charset="0"/>
-                          <a:cs typeface="Arial" panose="020B0604020202020204" pitchFamily="34" charset="0"/>
-                        </a:rPr>
-                        <a:t>0.9231</a:t>
-                      </a:r>
-                      <a:endParaRPr lang="en-GB" sz="1100" b="0" kern="100" dirty="0">
-                        <a:effectLst/>
-                        <a:latin typeface="Aptos" panose="020B0004020202020204" pitchFamily="34" charset="0"/>
-                        <a:ea typeface="Aptos" panose="020B0004020202020204" pitchFamily="34" charset="0"/>
-                        <a:cs typeface="Arial" panose="020B0604020202020204" pitchFamily="34" charset="0"/>
-                      </a:endParaRPr>
-                    </a:p>
-                  </a:txBody>
-                  <a:tcPr marL="68580" marR="68580" marT="0" marB="0"/>
-                </a:tc>
-                <a:tc>
-                  <a:txBody>
-                    <a:bodyPr/>
-                    <a:lstStyle/>
-                    <a:p>
-                      <a:pPr algn="just">
-                        <a:lnSpc>
-                          <a:spcPct val="150000"/>
-                        </a:lnSpc>
-                        <a:spcAft>
-                          <a:spcPts val="1000"/>
-                        </a:spcAft>
-                        <a:buNone/>
-                      </a:pPr>
-                      <a:r>
-                        <a:rPr lang="en-GB" sz="1200" b="0" kern="100" dirty="0">
-                          <a:effectLst/>
-                          <a:latin typeface="Times New Roman" panose="02020603050405020304" pitchFamily="18" charset="0"/>
-                          <a:ea typeface="Aptos" panose="020B0004020202020204" pitchFamily="34" charset="0"/>
-                          <a:cs typeface="Arial" panose="020B0604020202020204" pitchFamily="34" charset="0"/>
-                        </a:rPr>
-                        <a:t>0.445</a:t>
-                      </a:r>
-                      <a:endParaRPr lang="en-GB" sz="1100" b="0" kern="100" dirty="0">
-                        <a:effectLst/>
-                        <a:latin typeface="Aptos" panose="020B0004020202020204" pitchFamily="34" charset="0"/>
-                        <a:ea typeface="Aptos" panose="020B0004020202020204" pitchFamily="34" charset="0"/>
-                        <a:cs typeface="Arial" panose="020B0604020202020204" pitchFamily="34" charset="0"/>
-                      </a:endParaRPr>
-                    </a:p>
-                  </a:txBody>
-                  <a:tcPr marL="68580" marR="68580" marT="0" marB="0"/>
-                </a:tc>
-                <a:tc>
-                  <a:txBody>
-                    <a:bodyPr/>
-                    <a:lstStyle/>
-                    <a:p>
-                      <a:pPr algn="just">
-                        <a:lnSpc>
-                          <a:spcPct val="150000"/>
-                        </a:lnSpc>
-                        <a:spcAft>
-                          <a:spcPts val="1000"/>
-                        </a:spcAft>
-                        <a:buNone/>
-                      </a:pPr>
-                      <a:r>
-                        <a:rPr lang="en-GB" sz="1200" b="0" kern="100" dirty="0">
-                          <a:effectLst/>
-                          <a:latin typeface="Times New Roman" panose="02020603050405020304" pitchFamily="18" charset="0"/>
-                          <a:ea typeface="Aptos" panose="020B0004020202020204" pitchFamily="34" charset="0"/>
-                          <a:cs typeface="Arial" panose="020B0604020202020204" pitchFamily="34" charset="0"/>
-                        </a:rPr>
-                        <a:t>0.1263</a:t>
-                      </a:r>
-                      <a:endParaRPr lang="en-GB" sz="1100" b="0" kern="100" dirty="0">
-                        <a:effectLst/>
-                        <a:latin typeface="Aptos" panose="020B0004020202020204" pitchFamily="34" charset="0"/>
-                        <a:ea typeface="Aptos" panose="020B0004020202020204" pitchFamily="34" charset="0"/>
-                        <a:cs typeface="Arial" panose="020B0604020202020204" pitchFamily="34" charset="0"/>
-                      </a:endParaRPr>
-                    </a:p>
-                  </a:txBody>
-                  <a:tcPr marL="68580" marR="68580" marT="0" marB="0"/>
-                </a:tc>
-                <a:tc>
-                  <a:txBody>
-                    <a:bodyPr/>
-                    <a:lstStyle/>
-                    <a:p>
-                      <a:pPr algn="just">
-                        <a:lnSpc>
-                          <a:spcPct val="150000"/>
-                        </a:lnSpc>
-                        <a:spcAft>
-                          <a:spcPts val="1000"/>
-                        </a:spcAft>
-                        <a:buNone/>
-                      </a:pPr>
-                      <a:r>
-                        <a:rPr lang="en-GB" sz="1200" b="0" kern="100">
-                          <a:effectLst/>
-                          <a:latin typeface="Times New Roman" panose="02020603050405020304" pitchFamily="18" charset="0"/>
-                          <a:ea typeface="Aptos" panose="020B0004020202020204" pitchFamily="34" charset="0"/>
-                          <a:cs typeface="Arial" panose="020B0604020202020204" pitchFamily="34" charset="0"/>
-                        </a:rPr>
-                        <a:t>0.7886</a:t>
-                      </a:r>
-                      <a:endParaRPr lang="en-GB" sz="1100" b="0" kern="100">
-                        <a:effectLst/>
-                        <a:latin typeface="Aptos" panose="020B0004020202020204" pitchFamily="34" charset="0"/>
-                        <a:ea typeface="Aptos" panose="020B0004020202020204" pitchFamily="34" charset="0"/>
-                        <a:cs typeface="Arial" panose="020B0604020202020204" pitchFamily="34" charset="0"/>
-                      </a:endParaRPr>
-                    </a:p>
-                  </a:txBody>
-                  <a:tcPr marL="68580" marR="68580" marT="0" marB="0"/>
-                </a:tc>
-                <a:tc>
-                  <a:txBody>
-                    <a:bodyPr/>
-                    <a:lstStyle/>
-                    <a:p>
-                      <a:pPr algn="just">
-                        <a:lnSpc>
-                          <a:spcPct val="150000"/>
-                        </a:lnSpc>
-                        <a:spcAft>
-                          <a:spcPts val="1000"/>
-                        </a:spcAft>
-                        <a:buNone/>
-                      </a:pPr>
-                      <a:r>
-                        <a:rPr lang="en-GB" sz="1200" b="0" kern="100">
-                          <a:effectLst/>
-                          <a:latin typeface="Times New Roman" panose="02020603050405020304" pitchFamily="18" charset="0"/>
-                          <a:ea typeface="Aptos" panose="020B0004020202020204" pitchFamily="34" charset="0"/>
-                          <a:cs typeface="Arial" panose="020B0604020202020204" pitchFamily="34" charset="0"/>
-                        </a:rPr>
-                        <a:t>0.6095</a:t>
-                      </a:r>
-                      <a:endParaRPr lang="en-GB" sz="1100" b="0" kern="100">
-                        <a:effectLst/>
-                        <a:latin typeface="Aptos" panose="020B0004020202020204" pitchFamily="34" charset="0"/>
-                        <a:ea typeface="Aptos" panose="020B0004020202020204" pitchFamily="34" charset="0"/>
-                        <a:cs typeface="Arial" panose="020B0604020202020204" pitchFamily="34" charset="0"/>
-                      </a:endParaRPr>
-                    </a:p>
-                  </a:txBody>
-                  <a:tcPr marL="68580" marR="68580" marT="0" marB="0"/>
-                </a:tc>
-                <a:tc>
-                  <a:txBody>
-                    <a:bodyPr/>
-                    <a:lstStyle/>
-                    <a:p>
-                      <a:pPr algn="just">
-                        <a:lnSpc>
-                          <a:spcPct val="150000"/>
-                        </a:lnSpc>
-                        <a:spcAft>
-                          <a:spcPts val="1000"/>
-                        </a:spcAft>
-                        <a:buNone/>
-                      </a:pPr>
-                      <a:r>
-                        <a:rPr lang="en-GB" sz="1200" b="0" kern="100">
-                          <a:effectLst/>
-                          <a:latin typeface="Times New Roman" panose="02020603050405020304" pitchFamily="18" charset="0"/>
-                          <a:ea typeface="Aptos" panose="020B0004020202020204" pitchFamily="34" charset="0"/>
-                          <a:cs typeface="Arial" panose="020B0604020202020204" pitchFamily="34" charset="0"/>
-                        </a:rPr>
-                        <a:t>0.0348</a:t>
-                      </a:r>
-                      <a:endParaRPr lang="en-GB" sz="1100" b="0" kern="100">
-                        <a:effectLst/>
-                        <a:latin typeface="Aptos" panose="020B0004020202020204" pitchFamily="34" charset="0"/>
-                        <a:ea typeface="Aptos" panose="020B0004020202020204" pitchFamily="34" charset="0"/>
-                        <a:cs typeface="Arial" panose="020B0604020202020204" pitchFamily="34" charset="0"/>
-                      </a:endParaRPr>
-                    </a:p>
-                  </a:txBody>
-                  <a:tcPr marL="68580" marR="68580" marT="0" marB="0"/>
-                </a:tc>
-                <a:tc>
-                  <a:txBody>
-                    <a:bodyPr/>
-                    <a:lstStyle/>
-                    <a:p>
-                      <a:pPr algn="just">
-                        <a:lnSpc>
-                          <a:spcPct val="150000"/>
-                        </a:lnSpc>
-                        <a:spcAft>
-                          <a:spcPts val="1000"/>
-                        </a:spcAft>
-                        <a:buNone/>
-                      </a:pPr>
-                      <a:r>
-                        <a:rPr lang="en-GB" sz="1200" b="0" kern="100" dirty="0">
-                          <a:effectLst/>
-                          <a:latin typeface="Times New Roman" panose="02020603050405020304" pitchFamily="18" charset="0"/>
-                          <a:ea typeface="Aptos" panose="020B0004020202020204" pitchFamily="34" charset="0"/>
-                          <a:cs typeface="Arial" panose="020B0604020202020204" pitchFamily="34" charset="0"/>
-                        </a:rPr>
-                        <a:t>0.0258</a:t>
-                      </a:r>
-                      <a:endParaRPr lang="en-GB" sz="1100" b="0" kern="100" dirty="0">
-                        <a:effectLst/>
-                        <a:latin typeface="Aptos" panose="020B0004020202020204" pitchFamily="34" charset="0"/>
-                        <a:ea typeface="Aptos" panose="020B0004020202020204" pitchFamily="34" charset="0"/>
-                        <a:cs typeface="Arial" panose="020B0604020202020204" pitchFamily="34" charset="0"/>
-                      </a:endParaRPr>
-                    </a:p>
-                  </a:txBody>
-                  <a:tcPr marL="68580" marR="68580" marT="0" marB="0"/>
-                </a:tc>
-                <a:extLst>
-                  <a:ext uri="{0D108BD9-81ED-4DB2-BD59-A6C34878D82A}">
-                    <a16:rowId xmlns:a16="http://schemas.microsoft.com/office/drawing/2014/main" val="1212663933"/>
-                  </a:ext>
-                </a:extLst>
-              </a:tr>
-              <a:tr h="206061">
-                <a:tc>
-                  <a:txBody>
-                    <a:bodyPr/>
-                    <a:lstStyle/>
-                    <a:p>
-                      <a:pPr>
-                        <a:lnSpc>
-                          <a:spcPct val="115000"/>
-                        </a:lnSpc>
-                        <a:spcAft>
-                          <a:spcPts val="1000"/>
-                        </a:spcAft>
-                        <a:buNone/>
-                      </a:pPr>
-                      <a:r>
-                        <a:rPr lang="fr-FR" sz="1100" kern="100" dirty="0" err="1">
-                          <a:effectLst/>
-                          <a:latin typeface="Aptos" panose="020B0004020202020204" pitchFamily="34" charset="0"/>
-                          <a:ea typeface="Aptos" panose="020B0004020202020204" pitchFamily="34" charset="0"/>
-                          <a:cs typeface="Arial" panose="020B0604020202020204" pitchFamily="34" charset="0"/>
-                        </a:rPr>
-                        <a:t>Autoencoder</a:t>
-                      </a:r>
-                      <a:endParaRPr lang="en-GB" sz="1100" kern="100" dirty="0">
-                        <a:effectLst/>
-                        <a:latin typeface="Aptos" panose="020B0004020202020204" pitchFamily="34" charset="0"/>
-                        <a:ea typeface="Aptos" panose="020B0004020202020204" pitchFamily="34" charset="0"/>
-                        <a:cs typeface="Arial" panose="020B0604020202020204" pitchFamily="34" charset="0"/>
-                      </a:endParaRPr>
-                    </a:p>
-                  </a:txBody>
-                  <a:tcPr marL="68580" marR="68580" marT="0" marB="0"/>
-                </a:tc>
-                <a:tc>
-                  <a:txBody>
-                    <a:bodyPr/>
-                    <a:lstStyle/>
-                    <a:p>
-                      <a:pPr algn="just">
-                        <a:lnSpc>
-                          <a:spcPct val="150000"/>
-                        </a:lnSpc>
-                        <a:spcAft>
-                          <a:spcPts val="1000"/>
-                        </a:spcAft>
-                        <a:buNone/>
-                      </a:pPr>
-                      <a:r>
-                        <a:rPr lang="en-GB" sz="1200" b="0" kern="100">
-                          <a:solidFill>
-                            <a:srgbClr val="000000"/>
-                          </a:solidFill>
-                          <a:effectLst/>
-                          <a:latin typeface="Times New Roman" panose="02020603050405020304" pitchFamily="18" charset="0"/>
-                          <a:ea typeface="Aptos" panose="020B0004020202020204" pitchFamily="34" charset="0"/>
-                          <a:cs typeface="Arial" panose="020B0604020202020204" pitchFamily="34" charset="0"/>
-                        </a:rPr>
-                        <a:t>0.093</a:t>
-                      </a:r>
-                      <a:endParaRPr lang="en-GB" sz="1100" b="0" kern="100">
-                        <a:effectLst/>
-                        <a:latin typeface="Aptos" panose="020B0004020202020204" pitchFamily="34" charset="0"/>
-                        <a:ea typeface="Aptos" panose="020B0004020202020204" pitchFamily="34" charset="0"/>
-                        <a:cs typeface="Arial" panose="020B0604020202020204" pitchFamily="34" charset="0"/>
-                      </a:endParaRPr>
-                    </a:p>
-                  </a:txBody>
-                  <a:tcPr marL="68580" marR="68580" marT="0" marB="0"/>
-                </a:tc>
-                <a:tc>
-                  <a:txBody>
-                    <a:bodyPr/>
-                    <a:lstStyle/>
-                    <a:p>
-                      <a:pPr algn="just">
-                        <a:lnSpc>
-                          <a:spcPct val="150000"/>
-                        </a:lnSpc>
-                        <a:spcAft>
-                          <a:spcPts val="1000"/>
-                        </a:spcAft>
-                        <a:buNone/>
-                      </a:pPr>
-                      <a:r>
-                        <a:rPr lang="en-GB" sz="1200" b="0" kern="100">
-                          <a:solidFill>
-                            <a:srgbClr val="000000"/>
-                          </a:solidFill>
-                          <a:effectLst/>
-                          <a:latin typeface="Times New Roman" panose="02020603050405020304" pitchFamily="18" charset="0"/>
-                          <a:ea typeface="Aptos" panose="020B0004020202020204" pitchFamily="34" charset="0"/>
-                          <a:cs typeface="Arial" panose="020B0604020202020204" pitchFamily="34" charset="0"/>
-                        </a:rPr>
-                        <a:t>0.0279</a:t>
-                      </a:r>
-                      <a:endParaRPr lang="en-GB" sz="1100" b="0" kern="100">
-                        <a:effectLst/>
-                        <a:latin typeface="Aptos" panose="020B0004020202020204" pitchFamily="34" charset="0"/>
-                        <a:ea typeface="Aptos" panose="020B0004020202020204" pitchFamily="34" charset="0"/>
-                        <a:cs typeface="Arial" panose="020B0604020202020204" pitchFamily="34" charset="0"/>
-                      </a:endParaRPr>
-                    </a:p>
-                  </a:txBody>
-                  <a:tcPr marL="68580" marR="68580" marT="0" marB="0"/>
-                </a:tc>
-                <a:tc>
-                  <a:txBody>
-                    <a:bodyPr/>
-                    <a:lstStyle/>
-                    <a:p>
-                      <a:pPr algn="just">
-                        <a:lnSpc>
-                          <a:spcPct val="150000"/>
-                        </a:lnSpc>
-                        <a:spcAft>
-                          <a:spcPts val="1000"/>
-                        </a:spcAft>
-                        <a:buNone/>
-                      </a:pPr>
-                      <a:r>
-                        <a:rPr lang="en-GB" sz="1200" b="0" kern="100" dirty="0">
-                          <a:solidFill>
-                            <a:srgbClr val="000000"/>
-                          </a:solidFill>
-                          <a:effectLst/>
-                          <a:latin typeface="Times New Roman" panose="02020603050405020304" pitchFamily="18" charset="0"/>
-                          <a:ea typeface="Aptos" panose="020B0004020202020204" pitchFamily="34" charset="0"/>
-                          <a:cs typeface="Arial" panose="020B0604020202020204" pitchFamily="34" charset="0"/>
-                        </a:rPr>
-                        <a:t>0.8973</a:t>
-                      </a:r>
-                      <a:endParaRPr lang="en-GB" sz="1100" b="0" kern="100" dirty="0">
-                        <a:effectLst/>
-                        <a:latin typeface="Aptos" panose="020B0004020202020204" pitchFamily="34" charset="0"/>
-                        <a:ea typeface="Aptos" panose="020B0004020202020204" pitchFamily="34" charset="0"/>
-                        <a:cs typeface="Arial" panose="020B0604020202020204" pitchFamily="34" charset="0"/>
-                      </a:endParaRPr>
-                    </a:p>
-                  </a:txBody>
-                  <a:tcPr marL="68580" marR="68580" marT="0" marB="0"/>
-                </a:tc>
-                <a:tc>
-                  <a:txBody>
-                    <a:bodyPr/>
-                    <a:lstStyle/>
-                    <a:p>
-                      <a:pPr algn="just">
-                        <a:lnSpc>
-                          <a:spcPct val="150000"/>
-                        </a:lnSpc>
-                        <a:spcAft>
-                          <a:spcPts val="1000"/>
-                        </a:spcAft>
-                        <a:buNone/>
-                      </a:pPr>
-                      <a:r>
-                        <a:rPr lang="en-GB" sz="1200" b="0" kern="100">
-                          <a:solidFill>
-                            <a:srgbClr val="000000"/>
-                          </a:solidFill>
-                          <a:effectLst/>
-                          <a:latin typeface="Times New Roman" panose="02020603050405020304" pitchFamily="18" charset="0"/>
-                          <a:ea typeface="Aptos" panose="020B0004020202020204" pitchFamily="34" charset="0"/>
-                          <a:cs typeface="Arial" panose="020B0604020202020204" pitchFamily="34" charset="0"/>
-                        </a:rPr>
-                        <a:t>0.1635</a:t>
-                      </a:r>
-                      <a:endParaRPr lang="en-GB" sz="1100" b="0" kern="100">
-                        <a:effectLst/>
-                        <a:latin typeface="Aptos" panose="020B0004020202020204" pitchFamily="34" charset="0"/>
-                        <a:ea typeface="Aptos" panose="020B0004020202020204" pitchFamily="34" charset="0"/>
-                        <a:cs typeface="Arial" panose="020B0604020202020204" pitchFamily="34" charset="0"/>
-                      </a:endParaRPr>
-                    </a:p>
-                  </a:txBody>
-                  <a:tcPr marL="68580" marR="68580" marT="0" marB="0"/>
-                </a:tc>
-                <a:tc>
-                  <a:txBody>
-                    <a:bodyPr/>
-                    <a:lstStyle/>
-                    <a:p>
-                      <a:pPr algn="just">
-                        <a:lnSpc>
-                          <a:spcPct val="150000"/>
-                        </a:lnSpc>
-                        <a:spcAft>
-                          <a:spcPts val="1000"/>
-                        </a:spcAft>
-                        <a:buNone/>
-                      </a:pPr>
-                      <a:r>
-                        <a:rPr lang="en-GB" sz="1200" b="0" kern="100" dirty="0">
-                          <a:solidFill>
-                            <a:srgbClr val="000000"/>
-                          </a:solidFill>
-                          <a:effectLst/>
-                          <a:latin typeface="Times New Roman" panose="02020603050405020304" pitchFamily="18" charset="0"/>
-                          <a:ea typeface="Aptos" panose="020B0004020202020204" pitchFamily="34" charset="0"/>
-                          <a:cs typeface="Arial" panose="020B0604020202020204" pitchFamily="34" charset="0"/>
-                        </a:rPr>
-                        <a:t>0.1177</a:t>
-                      </a:r>
-                      <a:endParaRPr lang="en-GB" sz="1100" b="0" kern="100" dirty="0">
-                        <a:effectLst/>
-                        <a:latin typeface="Aptos" panose="020B0004020202020204" pitchFamily="34" charset="0"/>
-                        <a:ea typeface="Aptos" panose="020B0004020202020204" pitchFamily="34" charset="0"/>
-                        <a:cs typeface="Arial" panose="020B0604020202020204" pitchFamily="34" charset="0"/>
-                      </a:endParaRPr>
-                    </a:p>
-                  </a:txBody>
-                  <a:tcPr marL="68580" marR="68580" marT="0" marB="0"/>
-                </a:tc>
-                <a:tc>
-                  <a:txBody>
-                    <a:bodyPr/>
-                    <a:lstStyle/>
-                    <a:p>
-                      <a:pPr algn="just">
-                        <a:lnSpc>
-                          <a:spcPct val="150000"/>
-                        </a:lnSpc>
-                        <a:spcAft>
-                          <a:spcPts val="1000"/>
-                        </a:spcAft>
-                        <a:buNone/>
-                      </a:pPr>
-                      <a:r>
-                        <a:rPr lang="en-GB" sz="1200" b="0" kern="100" dirty="0">
-                          <a:solidFill>
-                            <a:srgbClr val="000000"/>
-                          </a:solidFill>
-                          <a:effectLst/>
-                          <a:latin typeface="Times New Roman" panose="02020603050405020304" pitchFamily="18" charset="0"/>
-                          <a:ea typeface="Aptos" panose="020B0004020202020204" pitchFamily="34" charset="0"/>
-                          <a:cs typeface="Arial" panose="020B0604020202020204" pitchFamily="34" charset="0"/>
-                        </a:rPr>
-                        <a:t>0.6207</a:t>
-                      </a:r>
-                      <a:endParaRPr lang="en-GB" sz="1100" b="0" kern="100" dirty="0">
-                        <a:effectLst/>
-                        <a:latin typeface="Aptos" panose="020B0004020202020204" pitchFamily="34" charset="0"/>
-                        <a:ea typeface="Aptos" panose="020B0004020202020204" pitchFamily="34" charset="0"/>
-                        <a:cs typeface="Arial" panose="020B0604020202020204" pitchFamily="34" charset="0"/>
-                      </a:endParaRPr>
-                    </a:p>
-                  </a:txBody>
-                  <a:tcPr marL="68580" marR="68580" marT="0" marB="0"/>
-                </a:tc>
-                <a:tc>
-                  <a:txBody>
-                    <a:bodyPr/>
-                    <a:lstStyle/>
-                    <a:p>
-                      <a:pPr algn="just">
-                        <a:lnSpc>
-                          <a:spcPct val="150000"/>
-                        </a:lnSpc>
-                        <a:spcAft>
-                          <a:spcPts val="1000"/>
-                        </a:spcAft>
-                        <a:buNone/>
-                      </a:pPr>
-                      <a:r>
-                        <a:rPr lang="en-GB" sz="1200" b="0" kern="100" dirty="0">
-                          <a:solidFill>
-                            <a:srgbClr val="000000"/>
-                          </a:solidFill>
-                          <a:effectLst/>
-                          <a:latin typeface="Times New Roman" panose="02020603050405020304" pitchFamily="18" charset="0"/>
-                          <a:ea typeface="Aptos" panose="020B0004020202020204" pitchFamily="34" charset="0"/>
-                          <a:cs typeface="Arial" panose="020B0604020202020204" pitchFamily="34" charset="0"/>
-                        </a:rPr>
-                        <a:t>0.567</a:t>
-                      </a:r>
-                      <a:endParaRPr lang="en-GB" sz="1100" b="0" kern="100" dirty="0">
-                        <a:effectLst/>
-                        <a:latin typeface="Aptos" panose="020B0004020202020204" pitchFamily="34" charset="0"/>
-                        <a:ea typeface="Aptos" panose="020B0004020202020204" pitchFamily="34" charset="0"/>
-                        <a:cs typeface="Arial" panose="020B0604020202020204" pitchFamily="34" charset="0"/>
-                      </a:endParaRPr>
-                    </a:p>
-                  </a:txBody>
-                  <a:tcPr marL="68580" marR="68580" marT="0" marB="0"/>
-                </a:tc>
-                <a:tc>
-                  <a:txBody>
-                    <a:bodyPr/>
-                    <a:lstStyle/>
-                    <a:p>
-                      <a:pPr algn="just">
-                        <a:lnSpc>
-                          <a:spcPct val="150000"/>
-                        </a:lnSpc>
-                        <a:spcAft>
-                          <a:spcPts val="1000"/>
-                        </a:spcAft>
-                        <a:buNone/>
-                      </a:pPr>
-                      <a:r>
-                        <a:rPr lang="en-GB" sz="1200" b="0" kern="100" dirty="0">
-                          <a:solidFill>
-                            <a:srgbClr val="000000"/>
-                          </a:solidFill>
-                          <a:effectLst/>
-                          <a:highlight>
-                            <a:srgbClr val="FFFF00"/>
-                          </a:highlight>
-                          <a:latin typeface="Times New Roman" panose="02020603050405020304" pitchFamily="18" charset="0"/>
-                          <a:ea typeface="Aptos" panose="020B0004020202020204" pitchFamily="34" charset="0"/>
-                          <a:cs typeface="Arial" panose="020B0604020202020204" pitchFamily="34" charset="0"/>
-                        </a:rPr>
-                        <a:t>0.0525</a:t>
-                      </a:r>
-                      <a:endParaRPr lang="en-GB" sz="1100" b="0" kern="100" dirty="0">
-                        <a:effectLst/>
-                        <a:latin typeface="Aptos" panose="020B0004020202020204" pitchFamily="34" charset="0"/>
-                        <a:ea typeface="Aptos" panose="020B0004020202020204" pitchFamily="34" charset="0"/>
-                        <a:cs typeface="Arial" panose="020B0604020202020204" pitchFamily="34" charset="0"/>
-                      </a:endParaRPr>
-                    </a:p>
-                  </a:txBody>
-                  <a:tcPr marL="68580" marR="68580" marT="0" marB="0"/>
-                </a:tc>
-                <a:tc>
-                  <a:txBody>
-                    <a:bodyPr/>
-                    <a:lstStyle/>
-                    <a:p>
-                      <a:pPr algn="just">
-                        <a:lnSpc>
-                          <a:spcPct val="150000"/>
-                        </a:lnSpc>
-                        <a:spcAft>
-                          <a:spcPts val="1000"/>
-                        </a:spcAft>
-                        <a:buNone/>
-                      </a:pPr>
-                      <a:r>
-                        <a:rPr lang="en-GB" sz="1200" b="0" kern="100" dirty="0">
-                          <a:solidFill>
-                            <a:srgbClr val="000000"/>
-                          </a:solidFill>
-                          <a:effectLst/>
-                          <a:latin typeface="Times New Roman" panose="02020603050405020304" pitchFamily="18" charset="0"/>
-                          <a:ea typeface="Aptos" panose="020B0004020202020204" pitchFamily="34" charset="0"/>
-                          <a:cs typeface="Arial" panose="020B0604020202020204" pitchFamily="34" charset="0"/>
-                        </a:rPr>
-                        <a:t>0.0296</a:t>
-                      </a:r>
-                      <a:endParaRPr lang="en-GB" sz="1100" b="0" kern="100" dirty="0">
-                        <a:effectLst/>
-                        <a:latin typeface="Aptos" panose="020B0004020202020204" pitchFamily="34" charset="0"/>
-                        <a:ea typeface="Aptos" panose="020B0004020202020204" pitchFamily="34" charset="0"/>
-                        <a:cs typeface="Arial" panose="020B0604020202020204" pitchFamily="34" charset="0"/>
-                      </a:endParaRPr>
-                    </a:p>
-                  </a:txBody>
-                  <a:tcPr marL="68580" marR="68580" marT="0" marB="0"/>
-                </a:tc>
-                <a:extLst>
-                  <a:ext uri="{0D108BD9-81ED-4DB2-BD59-A6C34878D82A}">
-                    <a16:rowId xmlns:a16="http://schemas.microsoft.com/office/drawing/2014/main" val="3958340746"/>
-                  </a:ext>
-                </a:extLst>
-              </a:tr>
-            </a:tbl>
-          </a:graphicData>
-        </a:graphic>
-      </p:graphicFrame>
       <p:sp>
         <p:nvSpPr>
           <p:cNvPr id="3" name="TextBox 2">
@@ -35053,7 +33151,7 @@
         </p:nvSpPr>
         <p:spPr>
           <a:xfrm>
-            <a:off x="524792" y="2624963"/>
+            <a:off x="4499584" y="800930"/>
             <a:ext cx="3766642" cy="307777"/>
           </a:xfrm>
           <a:prstGeom prst="rect">
@@ -35074,2010 +33172,67 @@
           </a:p>
         </p:txBody>
       </p:sp>
-      <p:graphicFrame>
-        <p:nvGraphicFramePr>
-          <p:cNvPr id="8" name="Table 7">
+      <p:pic>
+        <p:nvPicPr>
+          <p:cNvPr id="12" name="Picture 11">
             <a:extLst>
               <a:ext uri="{FF2B5EF4-FFF2-40B4-BE49-F238E27FC236}">
-                <a16:creationId xmlns:a16="http://schemas.microsoft.com/office/drawing/2014/main" id="{1121F5E6-8AF6-29A1-2793-BD2A83488F02}"/>
+                <a16:creationId xmlns:a16="http://schemas.microsoft.com/office/drawing/2014/main" id="{33458901-6E04-5D19-4413-D8DC6FE7E0F6}"/>
               </a:ext>
             </a:extLst>
           </p:cNvPr>
-          <p:cNvGraphicFramePr>
-            <a:graphicFrameLocks noGrp="1"/>
-          </p:cNvGraphicFramePr>
-          <p:nvPr>
-            <p:extLst>
-              <p:ext uri="{D42A27DB-BD31-4B8C-83A1-F6EECF244321}">
-                <p14:modId xmlns:p14="http://schemas.microsoft.com/office/powerpoint/2010/main" val="411462846"/>
-              </p:ext>
-            </p:extLst>
-          </p:nvPr>
-        </p:nvGraphicFramePr>
-        <p:xfrm>
-          <a:off x="601442" y="2932740"/>
-          <a:ext cx="7941115" cy="1409830"/>
-        </p:xfrm>
-        <a:graphic>
-          <a:graphicData uri="http://schemas.openxmlformats.org/drawingml/2006/table">
-            <a:tbl>
-              <a:tblPr firstRow="1" firstCol="1" bandRow="1">
-                <a:tableStyleId>{AE00A097-0C75-493B-BA82-CAC8FEF640B5}</a:tableStyleId>
-              </a:tblPr>
-              <a:tblGrid>
-                <a:gridCol w="983065">
-                  <a:extLst>
-                    <a:ext uri="{9D8B030D-6E8A-4147-A177-3AD203B41FA5}">
-                      <a16:colId xmlns:a16="http://schemas.microsoft.com/office/drawing/2014/main" val="3616488025"/>
-                    </a:ext>
-                  </a:extLst>
-                </a:gridCol>
-                <a:gridCol w="669434">
-                  <a:extLst>
-                    <a:ext uri="{9D8B030D-6E8A-4147-A177-3AD203B41FA5}">
-                      <a16:colId xmlns:a16="http://schemas.microsoft.com/office/drawing/2014/main" val="3155446673"/>
-                    </a:ext>
-                  </a:extLst>
-                </a:gridCol>
-                <a:gridCol w="730291">
-                  <a:extLst>
-                    <a:ext uri="{9D8B030D-6E8A-4147-A177-3AD203B41FA5}">
-                      <a16:colId xmlns:a16="http://schemas.microsoft.com/office/drawing/2014/main" val="4058151891"/>
-                    </a:ext>
-                  </a:extLst>
-                </a:gridCol>
-                <a:gridCol w="842953">
-                  <a:extLst>
-                    <a:ext uri="{9D8B030D-6E8A-4147-A177-3AD203B41FA5}">
-                      <a16:colId xmlns:a16="http://schemas.microsoft.com/office/drawing/2014/main" val="944134335"/>
-                    </a:ext>
-                  </a:extLst>
-                </a:gridCol>
-                <a:gridCol w="868057">
-                  <a:extLst>
-                    <a:ext uri="{9D8B030D-6E8A-4147-A177-3AD203B41FA5}">
-                      <a16:colId xmlns:a16="http://schemas.microsoft.com/office/drawing/2014/main" val="4026360934"/>
-                    </a:ext>
-                  </a:extLst>
-                </a:gridCol>
-                <a:gridCol w="677775">
-                  <a:extLst>
-                    <a:ext uri="{9D8B030D-6E8A-4147-A177-3AD203B41FA5}">
-                      <a16:colId xmlns:a16="http://schemas.microsoft.com/office/drawing/2014/main" val="1686710642"/>
-                    </a:ext>
-                  </a:extLst>
-                </a:gridCol>
-                <a:gridCol w="737809">
-                  <a:extLst>
-                    <a:ext uri="{9D8B030D-6E8A-4147-A177-3AD203B41FA5}">
-                      <a16:colId xmlns:a16="http://schemas.microsoft.com/office/drawing/2014/main" val="3581253123"/>
-                    </a:ext>
-                  </a:extLst>
-                </a:gridCol>
-                <a:gridCol w="737809">
-                  <a:extLst>
-                    <a:ext uri="{9D8B030D-6E8A-4147-A177-3AD203B41FA5}">
-                      <a16:colId xmlns:a16="http://schemas.microsoft.com/office/drawing/2014/main" val="3687334382"/>
-                    </a:ext>
-                  </a:extLst>
-                </a:gridCol>
-                <a:gridCol w="737809">
-                  <a:extLst>
-                    <a:ext uri="{9D8B030D-6E8A-4147-A177-3AD203B41FA5}">
-                      <a16:colId xmlns:a16="http://schemas.microsoft.com/office/drawing/2014/main" val="2782099018"/>
-                    </a:ext>
-                  </a:extLst>
-                </a:gridCol>
-                <a:gridCol w="956113">
-                  <a:extLst>
-                    <a:ext uri="{9D8B030D-6E8A-4147-A177-3AD203B41FA5}">
-                      <a16:colId xmlns:a16="http://schemas.microsoft.com/office/drawing/2014/main" val="2635150379"/>
-                    </a:ext>
-                  </a:extLst>
-                </a:gridCol>
-              </a:tblGrid>
-              <a:tr h="424054">
-                <a:tc>
-                  <a:txBody>
-                    <a:bodyPr/>
-                    <a:lstStyle/>
-                    <a:p>
-                      <a:pPr>
-                        <a:lnSpc>
-                          <a:spcPct val="200000"/>
-                        </a:lnSpc>
-                        <a:spcAft>
-                          <a:spcPts val="1000"/>
-                        </a:spcAft>
-                        <a:buNone/>
-                      </a:pPr>
-                      <a:r>
-                        <a:rPr lang="en-GB" sz="1200" kern="100" dirty="0">
-                          <a:effectLst/>
-                        </a:rPr>
-                        <a:t>Algorithm</a:t>
-                      </a:r>
-                      <a:endParaRPr lang="en-GB" sz="1100" kern="100" dirty="0">
-                        <a:effectLst/>
-                        <a:latin typeface="Aptos" panose="020B0004020202020204" pitchFamily="34" charset="0"/>
-                        <a:ea typeface="Aptos" panose="020B0004020202020204" pitchFamily="34" charset="0"/>
-                        <a:cs typeface="Arial" panose="020B0604020202020204" pitchFamily="34" charset="0"/>
-                      </a:endParaRPr>
-                    </a:p>
-                  </a:txBody>
-                  <a:tcPr marL="68580" marR="68580" marT="0" marB="0"/>
-                </a:tc>
-                <a:tc>
-                  <a:txBody>
-                    <a:bodyPr/>
-                    <a:lstStyle/>
-                    <a:p>
-                      <a:pPr>
-                        <a:lnSpc>
-                          <a:spcPct val="200000"/>
-                        </a:lnSpc>
-                        <a:spcAft>
-                          <a:spcPts val="1000"/>
-                        </a:spcAft>
-                        <a:buNone/>
-                      </a:pPr>
-                      <a:r>
-                        <a:rPr lang="en-GB" sz="1200" kern="100">
-                          <a:effectLst/>
-                        </a:rPr>
-                        <a:t>Karate</a:t>
-                      </a:r>
-                      <a:endParaRPr lang="en-GB" sz="1100" kern="100">
-                        <a:effectLst/>
-                        <a:latin typeface="Aptos" panose="020B0004020202020204" pitchFamily="34" charset="0"/>
-                        <a:ea typeface="Aptos" panose="020B0004020202020204" pitchFamily="34" charset="0"/>
-                        <a:cs typeface="Arial" panose="020B0604020202020204" pitchFamily="34" charset="0"/>
-                      </a:endParaRPr>
-                    </a:p>
-                  </a:txBody>
-                  <a:tcPr marL="68580" marR="68580" marT="0" marB="0"/>
-                </a:tc>
-                <a:tc>
-                  <a:txBody>
-                    <a:bodyPr/>
-                    <a:lstStyle/>
-                    <a:p>
-                      <a:pPr>
-                        <a:lnSpc>
-                          <a:spcPct val="200000"/>
-                        </a:lnSpc>
-                        <a:spcAft>
-                          <a:spcPts val="1000"/>
-                        </a:spcAft>
-                        <a:buNone/>
-                      </a:pPr>
-                      <a:r>
-                        <a:rPr lang="en-GB" sz="1200" kern="100" dirty="0">
-                          <a:effectLst/>
-                        </a:rPr>
-                        <a:t>Dolphins</a:t>
-                      </a:r>
-                      <a:endParaRPr lang="en-GB" sz="1100" kern="100" dirty="0">
-                        <a:effectLst/>
-                        <a:latin typeface="Aptos" panose="020B0004020202020204" pitchFamily="34" charset="0"/>
-                        <a:ea typeface="Aptos" panose="020B0004020202020204" pitchFamily="34" charset="0"/>
-                        <a:cs typeface="Arial" panose="020B0604020202020204" pitchFamily="34" charset="0"/>
-                      </a:endParaRPr>
-                    </a:p>
-                  </a:txBody>
-                  <a:tcPr marL="68580" marR="68580" marT="0" marB="0"/>
-                </a:tc>
-                <a:tc>
-                  <a:txBody>
-                    <a:bodyPr/>
-                    <a:lstStyle/>
-                    <a:p>
-                      <a:pPr>
-                        <a:lnSpc>
-                          <a:spcPct val="200000"/>
-                        </a:lnSpc>
-                        <a:spcAft>
-                          <a:spcPts val="1000"/>
-                        </a:spcAft>
-                        <a:buNone/>
-                      </a:pPr>
-                      <a:r>
-                        <a:rPr lang="en-GB" sz="1200" kern="100">
-                          <a:effectLst/>
-                        </a:rPr>
-                        <a:t>Football</a:t>
-                      </a:r>
-                      <a:endParaRPr lang="en-GB" sz="1100" kern="100">
-                        <a:effectLst/>
-                        <a:latin typeface="Aptos" panose="020B0004020202020204" pitchFamily="34" charset="0"/>
-                        <a:ea typeface="Aptos" panose="020B0004020202020204" pitchFamily="34" charset="0"/>
-                        <a:cs typeface="Arial" panose="020B0604020202020204" pitchFamily="34" charset="0"/>
-                      </a:endParaRPr>
-                    </a:p>
-                  </a:txBody>
-                  <a:tcPr marL="68580" marR="68580" marT="0" marB="0"/>
-                </a:tc>
-                <a:tc>
-                  <a:txBody>
-                    <a:bodyPr/>
-                    <a:lstStyle/>
-                    <a:p>
-                      <a:pPr>
-                        <a:lnSpc>
-                          <a:spcPct val="200000"/>
-                        </a:lnSpc>
-                        <a:spcAft>
-                          <a:spcPts val="1000"/>
-                        </a:spcAft>
-                        <a:buNone/>
-                      </a:pPr>
-                      <a:r>
-                        <a:rPr lang="en-GB" sz="1200" kern="100">
-                          <a:effectLst/>
-                        </a:rPr>
-                        <a:t>Polbooks</a:t>
-                      </a:r>
-                      <a:endParaRPr lang="en-GB" sz="1100" kern="100">
-                        <a:effectLst/>
-                        <a:latin typeface="Aptos" panose="020B0004020202020204" pitchFamily="34" charset="0"/>
-                        <a:ea typeface="Aptos" panose="020B0004020202020204" pitchFamily="34" charset="0"/>
-                        <a:cs typeface="Arial" panose="020B0604020202020204" pitchFamily="34" charset="0"/>
-                      </a:endParaRPr>
-                    </a:p>
-                  </a:txBody>
-                  <a:tcPr marL="68580" marR="68580" marT="0" marB="0"/>
-                </a:tc>
-                <a:tc>
-                  <a:txBody>
-                    <a:bodyPr/>
-                    <a:lstStyle/>
-                    <a:p>
-                      <a:pPr>
-                        <a:lnSpc>
-                          <a:spcPct val="200000"/>
-                        </a:lnSpc>
-                        <a:spcAft>
-                          <a:spcPts val="1000"/>
-                        </a:spcAft>
-                        <a:buNone/>
-                      </a:pPr>
-                      <a:r>
-                        <a:rPr lang="en-GB" sz="1200" kern="100">
-                          <a:effectLst/>
-                        </a:rPr>
-                        <a:t>PS</a:t>
-                      </a:r>
-                      <a:endParaRPr lang="en-GB" sz="1100" kern="100">
-                        <a:effectLst/>
-                        <a:latin typeface="Aptos" panose="020B0004020202020204" pitchFamily="34" charset="0"/>
-                        <a:ea typeface="Aptos" panose="020B0004020202020204" pitchFamily="34" charset="0"/>
-                        <a:cs typeface="Arial" panose="020B0604020202020204" pitchFamily="34" charset="0"/>
-                      </a:endParaRPr>
-                    </a:p>
-                  </a:txBody>
-                  <a:tcPr marL="68580" marR="68580" marT="0" marB="0"/>
-                </a:tc>
-                <a:tc>
-                  <a:txBody>
-                    <a:bodyPr/>
-                    <a:lstStyle/>
-                    <a:p>
-                      <a:pPr>
-                        <a:lnSpc>
-                          <a:spcPct val="200000"/>
-                        </a:lnSpc>
-                        <a:spcAft>
-                          <a:spcPts val="1000"/>
-                        </a:spcAft>
-                        <a:buNone/>
-                      </a:pPr>
-                      <a:r>
-                        <a:rPr lang="en-GB" sz="1200" kern="100">
-                          <a:effectLst/>
-                        </a:rPr>
-                        <a:t>VS13</a:t>
-                      </a:r>
-                      <a:endParaRPr lang="en-GB" sz="1100" kern="100">
-                        <a:effectLst/>
-                        <a:latin typeface="Aptos" panose="020B0004020202020204" pitchFamily="34" charset="0"/>
-                        <a:ea typeface="Aptos" panose="020B0004020202020204" pitchFamily="34" charset="0"/>
-                        <a:cs typeface="Arial" panose="020B0604020202020204" pitchFamily="34" charset="0"/>
-                      </a:endParaRPr>
-                    </a:p>
-                  </a:txBody>
-                  <a:tcPr marL="68580" marR="68580" marT="0" marB="0"/>
-                </a:tc>
-                <a:tc>
-                  <a:txBody>
-                    <a:bodyPr/>
-                    <a:lstStyle/>
-                    <a:p>
-                      <a:pPr>
-                        <a:lnSpc>
-                          <a:spcPct val="200000"/>
-                        </a:lnSpc>
-                        <a:spcAft>
-                          <a:spcPts val="1000"/>
-                        </a:spcAft>
-                        <a:buNone/>
-                      </a:pPr>
-                      <a:r>
-                        <a:rPr lang="en-GB" sz="1200" kern="100">
-                          <a:effectLst/>
-                        </a:rPr>
-                        <a:t>VS15</a:t>
-                      </a:r>
-                      <a:endParaRPr lang="en-GB" sz="1100" kern="100">
-                        <a:effectLst/>
-                        <a:latin typeface="Aptos" panose="020B0004020202020204" pitchFamily="34" charset="0"/>
-                        <a:ea typeface="Aptos" panose="020B0004020202020204" pitchFamily="34" charset="0"/>
-                        <a:cs typeface="Arial" panose="020B0604020202020204" pitchFamily="34" charset="0"/>
-                      </a:endParaRPr>
-                    </a:p>
-                  </a:txBody>
-                  <a:tcPr marL="68580" marR="68580" marT="0" marB="0"/>
-                </a:tc>
-                <a:tc>
-                  <a:txBody>
-                    <a:bodyPr/>
-                    <a:lstStyle/>
-                    <a:p>
-                      <a:pPr>
-                        <a:lnSpc>
-                          <a:spcPct val="200000"/>
-                        </a:lnSpc>
-                        <a:spcAft>
-                          <a:spcPts val="1000"/>
-                        </a:spcAft>
-                        <a:buNone/>
-                      </a:pPr>
-                      <a:r>
-                        <a:rPr lang="en-GB" sz="1200" kern="100">
-                          <a:effectLst/>
-                        </a:rPr>
-                        <a:t>FB</a:t>
-                      </a:r>
-                      <a:endParaRPr lang="en-GB" sz="1100" kern="100">
-                        <a:effectLst/>
-                        <a:latin typeface="Aptos" panose="020B0004020202020204" pitchFamily="34" charset="0"/>
-                        <a:ea typeface="Aptos" panose="020B0004020202020204" pitchFamily="34" charset="0"/>
-                        <a:cs typeface="Arial" panose="020B0604020202020204" pitchFamily="34" charset="0"/>
-                      </a:endParaRPr>
-                    </a:p>
-                  </a:txBody>
-                  <a:tcPr marL="68580" marR="68580" marT="0" marB="0"/>
-                </a:tc>
-                <a:tc>
-                  <a:txBody>
-                    <a:bodyPr/>
-                    <a:lstStyle/>
-                    <a:p>
-                      <a:pPr>
-                        <a:lnSpc>
-                          <a:spcPct val="200000"/>
-                        </a:lnSpc>
-                        <a:spcAft>
-                          <a:spcPts val="1000"/>
-                        </a:spcAft>
-                        <a:buNone/>
-                      </a:pPr>
-                      <a:r>
-                        <a:rPr lang="en-GB" sz="1200" kern="100" dirty="0" err="1">
-                          <a:effectLst/>
-                        </a:rPr>
-                        <a:t>LastFM</a:t>
-                      </a:r>
-                      <a:endParaRPr lang="en-GB" sz="1100" kern="100" dirty="0">
-                        <a:effectLst/>
-                        <a:latin typeface="Aptos" panose="020B0004020202020204" pitchFamily="34" charset="0"/>
-                        <a:ea typeface="Aptos" panose="020B0004020202020204" pitchFamily="34" charset="0"/>
-                        <a:cs typeface="Arial" panose="020B0604020202020204" pitchFamily="34" charset="0"/>
-                      </a:endParaRPr>
-                    </a:p>
-                  </a:txBody>
-                  <a:tcPr marL="68580" marR="68580" marT="0" marB="0"/>
-                </a:tc>
-                <a:extLst>
-                  <a:ext uri="{0D108BD9-81ED-4DB2-BD59-A6C34878D82A}">
-                    <a16:rowId xmlns:a16="http://schemas.microsoft.com/office/drawing/2014/main" val="2862840606"/>
-                  </a:ext>
-                </a:extLst>
-              </a:tr>
-              <a:tr h="206061">
-                <a:tc>
-                  <a:txBody>
-                    <a:bodyPr/>
-                    <a:lstStyle/>
-                    <a:p>
-                      <a:pPr>
-                        <a:lnSpc>
-                          <a:spcPct val="115000"/>
-                        </a:lnSpc>
-                        <a:spcAft>
-                          <a:spcPts val="1000"/>
-                        </a:spcAft>
-                        <a:buNone/>
-                      </a:pPr>
-                      <a:r>
-                        <a:rPr lang="en-GB" sz="1200" kern="100" dirty="0">
-                          <a:effectLst/>
-                        </a:rPr>
-                        <a:t>GCN</a:t>
-                      </a:r>
-                      <a:endParaRPr lang="en-GB" sz="1100" kern="100" dirty="0">
-                        <a:effectLst/>
-                        <a:latin typeface="Aptos" panose="020B0004020202020204" pitchFamily="34" charset="0"/>
-                        <a:ea typeface="Aptos" panose="020B0004020202020204" pitchFamily="34" charset="0"/>
-                        <a:cs typeface="Arial" panose="020B0604020202020204" pitchFamily="34" charset="0"/>
-                      </a:endParaRPr>
-                    </a:p>
-                  </a:txBody>
-                  <a:tcPr marL="68580" marR="68580" marT="0" marB="0"/>
-                </a:tc>
-                <a:tc>
-                  <a:txBody>
-                    <a:bodyPr/>
-                    <a:lstStyle/>
-                    <a:p>
-                      <a:pPr>
-                        <a:lnSpc>
-                          <a:spcPct val="150000"/>
-                        </a:lnSpc>
-                        <a:spcAft>
-                          <a:spcPts val="1000"/>
-                        </a:spcAft>
-                        <a:buNone/>
-                      </a:pPr>
-                      <a:r>
-                        <a:rPr lang="en-GB" sz="1200" b="0" kern="100">
-                          <a:solidFill>
-                            <a:schemeClr val="tx1"/>
-                          </a:solidFill>
-                          <a:effectLst/>
-                          <a:highlight>
-                            <a:srgbClr val="FFFF00"/>
-                          </a:highlight>
-                          <a:latin typeface="Times New Roman" panose="02020603050405020304" pitchFamily="18" charset="0"/>
-                          <a:ea typeface="Aptos" panose="020B0004020202020204" pitchFamily="34" charset="0"/>
-                          <a:cs typeface="Arial" panose="020B0604020202020204" pitchFamily="34" charset="0"/>
-                        </a:rPr>
-                        <a:t>0.8823</a:t>
-                      </a:r>
-                      <a:endParaRPr lang="en-GB" sz="1100" b="0" kern="100">
-                        <a:solidFill>
-                          <a:schemeClr val="tx1"/>
-                        </a:solidFill>
-                        <a:effectLst/>
-                        <a:latin typeface="Aptos" panose="020B0004020202020204" pitchFamily="34" charset="0"/>
-                        <a:ea typeface="Aptos" panose="020B0004020202020204" pitchFamily="34" charset="0"/>
-                        <a:cs typeface="Arial" panose="020B0604020202020204" pitchFamily="34" charset="0"/>
-                      </a:endParaRPr>
-                    </a:p>
-                  </a:txBody>
-                  <a:tcPr marL="68580" marR="68580" marT="0" marB="0"/>
-                </a:tc>
-                <a:tc>
-                  <a:txBody>
-                    <a:bodyPr/>
-                    <a:lstStyle/>
-                    <a:p>
-                      <a:pPr>
-                        <a:lnSpc>
-                          <a:spcPct val="150000"/>
-                        </a:lnSpc>
-                        <a:spcAft>
-                          <a:spcPts val="1000"/>
-                        </a:spcAft>
-                        <a:buNone/>
-                      </a:pPr>
-                      <a:r>
-                        <a:rPr lang="en-GB" sz="1200" b="0" kern="100">
-                          <a:solidFill>
-                            <a:schemeClr val="tx1"/>
-                          </a:solidFill>
-                          <a:effectLst/>
-                          <a:latin typeface="Times New Roman" panose="02020603050405020304" pitchFamily="18" charset="0"/>
-                          <a:ea typeface="Aptos" panose="020B0004020202020204" pitchFamily="34" charset="0"/>
-                          <a:cs typeface="Arial" panose="020B0604020202020204" pitchFamily="34" charset="0"/>
-                        </a:rPr>
-                        <a:t>0.9348</a:t>
-                      </a:r>
-                      <a:endParaRPr lang="en-GB" sz="1100" b="0" kern="100">
-                        <a:solidFill>
-                          <a:schemeClr val="tx1"/>
-                        </a:solidFill>
-                        <a:effectLst/>
-                        <a:latin typeface="Aptos" panose="020B0004020202020204" pitchFamily="34" charset="0"/>
-                        <a:ea typeface="Aptos" panose="020B0004020202020204" pitchFamily="34" charset="0"/>
-                        <a:cs typeface="Arial" panose="020B0604020202020204" pitchFamily="34" charset="0"/>
-                      </a:endParaRPr>
-                    </a:p>
-                  </a:txBody>
-                  <a:tcPr marL="68580" marR="68580" marT="0" marB="0"/>
-                </a:tc>
-                <a:tc>
-                  <a:txBody>
-                    <a:bodyPr/>
-                    <a:lstStyle/>
-                    <a:p>
-                      <a:pPr>
-                        <a:lnSpc>
-                          <a:spcPct val="150000"/>
-                        </a:lnSpc>
-                        <a:spcAft>
-                          <a:spcPts val="1000"/>
-                        </a:spcAft>
-                        <a:buNone/>
-                      </a:pPr>
-                      <a:r>
-                        <a:rPr lang="en-GB" sz="1200" b="0" kern="100">
-                          <a:solidFill>
-                            <a:schemeClr val="tx1"/>
-                          </a:solidFill>
-                          <a:effectLst/>
-                          <a:highlight>
-                            <a:srgbClr val="FFFF00"/>
-                          </a:highlight>
-                          <a:latin typeface="Times New Roman" panose="02020603050405020304" pitchFamily="18" charset="0"/>
-                          <a:ea typeface="Aptos" panose="020B0004020202020204" pitchFamily="34" charset="0"/>
-                          <a:cs typeface="Arial" panose="020B0604020202020204" pitchFamily="34" charset="0"/>
-                        </a:rPr>
-                        <a:t>0.8995</a:t>
-                      </a:r>
-                      <a:endParaRPr lang="en-GB" sz="1100" b="0" kern="100">
-                        <a:solidFill>
-                          <a:schemeClr val="tx1"/>
-                        </a:solidFill>
-                        <a:effectLst/>
-                        <a:latin typeface="Aptos" panose="020B0004020202020204" pitchFamily="34" charset="0"/>
-                        <a:ea typeface="Aptos" panose="020B0004020202020204" pitchFamily="34" charset="0"/>
-                        <a:cs typeface="Arial" panose="020B0604020202020204" pitchFamily="34" charset="0"/>
-                      </a:endParaRPr>
-                    </a:p>
-                  </a:txBody>
-                  <a:tcPr marL="68580" marR="68580" marT="0" marB="0"/>
-                </a:tc>
-                <a:tc>
-                  <a:txBody>
-                    <a:bodyPr/>
-                    <a:lstStyle/>
-                    <a:p>
-                      <a:pPr>
-                        <a:lnSpc>
-                          <a:spcPct val="150000"/>
-                        </a:lnSpc>
-                        <a:spcAft>
-                          <a:spcPts val="1000"/>
-                        </a:spcAft>
-                        <a:buNone/>
-                      </a:pPr>
-                      <a:r>
-                        <a:rPr lang="en-GB" sz="1200" b="0" kern="100">
-                          <a:solidFill>
-                            <a:schemeClr val="tx1"/>
-                          </a:solidFill>
-                          <a:effectLst/>
-                          <a:highlight>
-                            <a:srgbClr val="FFFF00"/>
-                          </a:highlight>
-                          <a:latin typeface="Times New Roman" panose="02020603050405020304" pitchFamily="18" charset="0"/>
-                          <a:ea typeface="Aptos" panose="020B0004020202020204" pitchFamily="34" charset="0"/>
-                          <a:cs typeface="Arial" panose="020B0604020202020204" pitchFamily="34" charset="0"/>
-                        </a:rPr>
-                        <a:t>0.6745</a:t>
-                      </a:r>
-                      <a:endParaRPr lang="en-GB" sz="1100" b="0" kern="100">
-                        <a:solidFill>
-                          <a:schemeClr val="tx1"/>
-                        </a:solidFill>
-                        <a:effectLst/>
-                        <a:latin typeface="Aptos" panose="020B0004020202020204" pitchFamily="34" charset="0"/>
-                        <a:ea typeface="Aptos" panose="020B0004020202020204" pitchFamily="34" charset="0"/>
-                        <a:cs typeface="Arial" panose="020B0604020202020204" pitchFamily="34" charset="0"/>
-                      </a:endParaRPr>
-                    </a:p>
-                  </a:txBody>
-                  <a:tcPr marL="68580" marR="68580" marT="0" marB="0"/>
-                </a:tc>
-                <a:tc>
-                  <a:txBody>
-                    <a:bodyPr/>
-                    <a:lstStyle/>
-                    <a:p>
-                      <a:pPr>
-                        <a:lnSpc>
-                          <a:spcPct val="150000"/>
-                        </a:lnSpc>
-                        <a:spcAft>
-                          <a:spcPts val="1000"/>
-                        </a:spcAft>
-                        <a:buNone/>
-                      </a:pPr>
-                      <a:r>
-                        <a:rPr lang="en-GB" sz="1200" b="0" kern="100">
-                          <a:solidFill>
-                            <a:schemeClr val="tx1"/>
-                          </a:solidFill>
-                          <a:effectLst/>
-                          <a:highlight>
-                            <a:srgbClr val="FFFF00"/>
-                          </a:highlight>
-                          <a:latin typeface="Times New Roman" panose="02020603050405020304" pitchFamily="18" charset="0"/>
-                          <a:ea typeface="Aptos" panose="020B0004020202020204" pitchFamily="34" charset="0"/>
-                          <a:cs typeface="Arial" panose="020B0604020202020204" pitchFamily="34" charset="0"/>
-                        </a:rPr>
-                        <a:t>0.0272</a:t>
-                      </a:r>
-                      <a:endParaRPr lang="en-GB" sz="1100" b="0" kern="100">
-                        <a:solidFill>
-                          <a:schemeClr val="tx1"/>
-                        </a:solidFill>
-                        <a:effectLst/>
-                        <a:latin typeface="Aptos" panose="020B0004020202020204" pitchFamily="34" charset="0"/>
-                        <a:ea typeface="Aptos" panose="020B0004020202020204" pitchFamily="34" charset="0"/>
-                        <a:cs typeface="Arial" panose="020B0604020202020204" pitchFamily="34" charset="0"/>
-                      </a:endParaRPr>
-                    </a:p>
-                  </a:txBody>
-                  <a:tcPr marL="68580" marR="68580" marT="0" marB="0"/>
-                </a:tc>
-                <a:tc>
-                  <a:txBody>
-                    <a:bodyPr/>
-                    <a:lstStyle/>
-                    <a:p>
-                      <a:pPr>
-                        <a:lnSpc>
-                          <a:spcPct val="150000"/>
-                        </a:lnSpc>
-                        <a:spcAft>
-                          <a:spcPts val="1000"/>
-                        </a:spcAft>
-                        <a:buNone/>
-                      </a:pPr>
-                      <a:r>
-                        <a:rPr lang="en-GB" sz="1200" b="0" kern="100">
-                          <a:solidFill>
-                            <a:schemeClr val="tx1"/>
-                          </a:solidFill>
-                          <a:effectLst/>
-                          <a:latin typeface="Times New Roman" panose="02020603050405020304" pitchFamily="18" charset="0"/>
-                          <a:ea typeface="Aptos" panose="020B0004020202020204" pitchFamily="34" charset="0"/>
-                          <a:cs typeface="Arial" panose="020B0604020202020204" pitchFamily="34" charset="0"/>
-                        </a:rPr>
-                        <a:t>0.6808</a:t>
-                      </a:r>
-                      <a:endParaRPr lang="en-GB" sz="1100" b="0" kern="100">
-                        <a:solidFill>
-                          <a:schemeClr val="tx1"/>
-                        </a:solidFill>
-                        <a:effectLst/>
-                        <a:latin typeface="Aptos" panose="020B0004020202020204" pitchFamily="34" charset="0"/>
-                        <a:ea typeface="Aptos" panose="020B0004020202020204" pitchFamily="34" charset="0"/>
-                        <a:cs typeface="Arial" panose="020B0604020202020204" pitchFamily="34" charset="0"/>
-                      </a:endParaRPr>
-                    </a:p>
-                  </a:txBody>
-                  <a:tcPr marL="68580" marR="68580" marT="0" marB="0"/>
-                </a:tc>
-                <a:tc>
-                  <a:txBody>
-                    <a:bodyPr/>
-                    <a:lstStyle/>
-                    <a:p>
-                      <a:pPr>
-                        <a:lnSpc>
-                          <a:spcPct val="150000"/>
-                        </a:lnSpc>
-                        <a:spcAft>
-                          <a:spcPts val="1000"/>
-                        </a:spcAft>
-                        <a:buNone/>
-                      </a:pPr>
-                      <a:r>
-                        <a:rPr lang="en-GB" sz="1200" b="0" kern="100">
-                          <a:solidFill>
-                            <a:schemeClr val="tx1"/>
-                          </a:solidFill>
-                          <a:effectLst/>
-                          <a:latin typeface="Times New Roman" panose="02020603050405020304" pitchFamily="18" charset="0"/>
-                          <a:ea typeface="Aptos" panose="020B0004020202020204" pitchFamily="34" charset="0"/>
-                          <a:cs typeface="Arial" panose="020B0604020202020204" pitchFamily="34" charset="0"/>
-                        </a:rPr>
-                        <a:t>0.4339</a:t>
-                      </a:r>
-                      <a:endParaRPr lang="en-GB" sz="1100" b="0" kern="100">
-                        <a:solidFill>
-                          <a:schemeClr val="tx1"/>
-                        </a:solidFill>
-                        <a:effectLst/>
-                        <a:latin typeface="Aptos" panose="020B0004020202020204" pitchFamily="34" charset="0"/>
-                        <a:ea typeface="Aptos" panose="020B0004020202020204" pitchFamily="34" charset="0"/>
-                        <a:cs typeface="Arial" panose="020B0604020202020204" pitchFamily="34" charset="0"/>
-                      </a:endParaRPr>
-                    </a:p>
-                  </a:txBody>
-                  <a:tcPr marL="68580" marR="68580" marT="0" marB="0"/>
-                </a:tc>
-                <a:tc>
-                  <a:txBody>
-                    <a:bodyPr/>
-                    <a:lstStyle/>
-                    <a:p>
-                      <a:pPr>
-                        <a:lnSpc>
-                          <a:spcPct val="150000"/>
-                        </a:lnSpc>
-                        <a:spcAft>
-                          <a:spcPts val="1000"/>
-                        </a:spcAft>
-                        <a:buNone/>
-                      </a:pPr>
-                      <a:r>
-                        <a:rPr lang="en-GB" sz="1200" b="0" kern="100">
-                          <a:solidFill>
-                            <a:schemeClr val="tx1"/>
-                          </a:solidFill>
-                          <a:effectLst/>
-                          <a:latin typeface="Times New Roman" panose="02020603050405020304" pitchFamily="18" charset="0"/>
-                          <a:ea typeface="Aptos" panose="020B0004020202020204" pitchFamily="34" charset="0"/>
-                          <a:cs typeface="Arial" panose="020B0604020202020204" pitchFamily="34" charset="0"/>
-                        </a:rPr>
-                        <a:t>0.0614</a:t>
-                      </a:r>
-                      <a:endParaRPr lang="en-GB" sz="1100" b="0" kern="100">
-                        <a:solidFill>
-                          <a:schemeClr val="tx1"/>
-                        </a:solidFill>
-                        <a:effectLst/>
-                        <a:latin typeface="Aptos" panose="020B0004020202020204" pitchFamily="34" charset="0"/>
-                        <a:ea typeface="Aptos" panose="020B0004020202020204" pitchFamily="34" charset="0"/>
-                        <a:cs typeface="Arial" panose="020B0604020202020204" pitchFamily="34" charset="0"/>
-                      </a:endParaRPr>
-                    </a:p>
-                  </a:txBody>
-                  <a:tcPr marL="68580" marR="68580" marT="0" marB="0"/>
-                </a:tc>
-                <a:tc>
-                  <a:txBody>
-                    <a:bodyPr/>
-                    <a:lstStyle/>
-                    <a:p>
-                      <a:pPr>
-                        <a:lnSpc>
-                          <a:spcPct val="150000"/>
-                        </a:lnSpc>
-                        <a:spcAft>
-                          <a:spcPts val="1000"/>
-                        </a:spcAft>
-                        <a:buNone/>
-                      </a:pPr>
-                      <a:r>
-                        <a:rPr lang="en-GB" sz="1200" b="0" kern="100">
-                          <a:solidFill>
-                            <a:schemeClr val="tx1"/>
-                          </a:solidFill>
-                          <a:effectLst/>
-                          <a:latin typeface="Times New Roman" panose="02020603050405020304" pitchFamily="18" charset="0"/>
-                          <a:ea typeface="Aptos" panose="020B0004020202020204" pitchFamily="34" charset="0"/>
-                          <a:cs typeface="Arial" panose="020B0604020202020204" pitchFamily="34" charset="0"/>
-                        </a:rPr>
-                        <a:t>0.0073</a:t>
-                      </a:r>
-                      <a:endParaRPr lang="en-GB" sz="1100" b="0" kern="100">
-                        <a:solidFill>
-                          <a:schemeClr val="tx1"/>
-                        </a:solidFill>
-                        <a:effectLst/>
-                        <a:latin typeface="Aptos" panose="020B0004020202020204" pitchFamily="34" charset="0"/>
-                        <a:ea typeface="Aptos" panose="020B0004020202020204" pitchFamily="34" charset="0"/>
-                        <a:cs typeface="Arial" panose="020B0604020202020204" pitchFamily="34" charset="0"/>
-                      </a:endParaRPr>
-                    </a:p>
-                  </a:txBody>
-                  <a:tcPr marL="68580" marR="68580" marT="0" marB="0"/>
-                </a:tc>
-                <a:extLst>
-                  <a:ext uri="{0D108BD9-81ED-4DB2-BD59-A6C34878D82A}">
-                    <a16:rowId xmlns:a16="http://schemas.microsoft.com/office/drawing/2014/main" val="2834496182"/>
-                  </a:ext>
-                </a:extLst>
-              </a:tr>
-              <a:tr h="206061">
-                <a:tc>
-                  <a:txBody>
-                    <a:bodyPr/>
-                    <a:lstStyle/>
-                    <a:p>
-                      <a:pPr>
-                        <a:lnSpc>
-                          <a:spcPct val="115000"/>
-                        </a:lnSpc>
-                        <a:spcAft>
-                          <a:spcPts val="1000"/>
-                        </a:spcAft>
-                        <a:buNone/>
-                      </a:pPr>
-                      <a:r>
-                        <a:rPr lang="en-GB" sz="1200" kern="100" dirty="0">
-                          <a:effectLst/>
-                        </a:rPr>
-                        <a:t>GAT</a:t>
-                      </a:r>
-                      <a:endParaRPr lang="en-GB" sz="1100" kern="100" dirty="0">
-                        <a:effectLst/>
-                        <a:latin typeface="Aptos" panose="020B0004020202020204" pitchFamily="34" charset="0"/>
-                        <a:ea typeface="Aptos" panose="020B0004020202020204" pitchFamily="34" charset="0"/>
-                        <a:cs typeface="Arial" panose="020B0604020202020204" pitchFamily="34" charset="0"/>
-                      </a:endParaRPr>
-                    </a:p>
-                  </a:txBody>
-                  <a:tcPr marL="68580" marR="68580" marT="0" marB="0"/>
-                </a:tc>
-                <a:tc>
-                  <a:txBody>
-                    <a:bodyPr/>
-                    <a:lstStyle/>
-                    <a:p>
-                      <a:pPr>
-                        <a:lnSpc>
-                          <a:spcPct val="150000"/>
-                        </a:lnSpc>
-                        <a:spcAft>
-                          <a:spcPts val="1000"/>
-                        </a:spcAft>
-                        <a:buNone/>
-                      </a:pPr>
-                      <a:r>
-                        <a:rPr lang="en-GB" sz="1200" b="0" kern="100">
-                          <a:solidFill>
-                            <a:schemeClr val="tx1"/>
-                          </a:solidFill>
-                          <a:effectLst/>
-                          <a:latin typeface="Times New Roman" panose="02020603050405020304" pitchFamily="18" charset="0"/>
-                          <a:ea typeface="Aptos" panose="020B0004020202020204" pitchFamily="34" charset="0"/>
-                          <a:cs typeface="Arial" panose="020B0604020202020204" pitchFamily="34" charset="0"/>
-                        </a:rPr>
-                        <a:t>0.6682</a:t>
-                      </a:r>
-                      <a:endParaRPr lang="en-GB" sz="1100" b="0" kern="100">
-                        <a:solidFill>
-                          <a:schemeClr val="tx1"/>
-                        </a:solidFill>
-                        <a:effectLst/>
-                        <a:latin typeface="Aptos" panose="020B0004020202020204" pitchFamily="34" charset="0"/>
-                        <a:ea typeface="Aptos" panose="020B0004020202020204" pitchFamily="34" charset="0"/>
-                        <a:cs typeface="Arial" panose="020B0604020202020204" pitchFamily="34" charset="0"/>
-                      </a:endParaRPr>
-                    </a:p>
-                  </a:txBody>
-                  <a:tcPr marL="68580" marR="68580" marT="0" marB="0"/>
-                </a:tc>
-                <a:tc>
-                  <a:txBody>
-                    <a:bodyPr/>
-                    <a:lstStyle/>
-                    <a:p>
-                      <a:pPr>
-                        <a:lnSpc>
-                          <a:spcPct val="150000"/>
-                        </a:lnSpc>
-                        <a:spcAft>
-                          <a:spcPts val="1000"/>
-                        </a:spcAft>
-                        <a:buNone/>
-                      </a:pPr>
-                      <a:r>
-                        <a:rPr lang="en-GB" sz="1200" b="0" kern="100">
-                          <a:solidFill>
-                            <a:schemeClr val="tx1"/>
-                          </a:solidFill>
-                          <a:effectLst/>
-                          <a:latin typeface="Times New Roman" panose="02020603050405020304" pitchFamily="18" charset="0"/>
-                          <a:ea typeface="Aptos" panose="020B0004020202020204" pitchFamily="34" charset="0"/>
-                          <a:cs typeface="Arial" panose="020B0604020202020204" pitchFamily="34" charset="0"/>
-                        </a:rPr>
-                        <a:t>0.8725</a:t>
-                      </a:r>
-                      <a:endParaRPr lang="en-GB" sz="1100" b="0" kern="100">
-                        <a:solidFill>
-                          <a:schemeClr val="tx1"/>
-                        </a:solidFill>
-                        <a:effectLst/>
-                        <a:latin typeface="Aptos" panose="020B0004020202020204" pitchFamily="34" charset="0"/>
-                        <a:ea typeface="Aptos" panose="020B0004020202020204" pitchFamily="34" charset="0"/>
-                        <a:cs typeface="Arial" panose="020B0604020202020204" pitchFamily="34" charset="0"/>
-                      </a:endParaRPr>
-                    </a:p>
-                  </a:txBody>
-                  <a:tcPr marL="68580" marR="68580" marT="0" marB="0"/>
-                </a:tc>
-                <a:tc>
-                  <a:txBody>
-                    <a:bodyPr/>
-                    <a:lstStyle/>
-                    <a:p>
-                      <a:pPr>
-                        <a:lnSpc>
-                          <a:spcPct val="150000"/>
-                        </a:lnSpc>
-                        <a:spcAft>
-                          <a:spcPts val="1000"/>
-                        </a:spcAft>
-                        <a:buNone/>
-                      </a:pPr>
-                      <a:r>
-                        <a:rPr lang="en-GB" sz="1200" b="0" kern="100">
-                          <a:solidFill>
-                            <a:schemeClr val="tx1"/>
-                          </a:solidFill>
-                          <a:effectLst/>
-                          <a:latin typeface="Times New Roman" panose="02020603050405020304" pitchFamily="18" charset="0"/>
-                          <a:ea typeface="Aptos" panose="020B0004020202020204" pitchFamily="34" charset="0"/>
-                          <a:cs typeface="Arial" panose="020B0604020202020204" pitchFamily="34" charset="0"/>
-                        </a:rPr>
-                        <a:t>0.8955</a:t>
-                      </a:r>
-                      <a:endParaRPr lang="en-GB" sz="1100" b="0" kern="100">
-                        <a:solidFill>
-                          <a:schemeClr val="tx1"/>
-                        </a:solidFill>
-                        <a:effectLst/>
-                        <a:latin typeface="Aptos" panose="020B0004020202020204" pitchFamily="34" charset="0"/>
-                        <a:ea typeface="Aptos" panose="020B0004020202020204" pitchFamily="34" charset="0"/>
-                        <a:cs typeface="Arial" panose="020B0604020202020204" pitchFamily="34" charset="0"/>
-                      </a:endParaRPr>
-                    </a:p>
-                  </a:txBody>
-                  <a:tcPr marL="68580" marR="68580" marT="0" marB="0"/>
-                </a:tc>
-                <a:tc>
-                  <a:txBody>
-                    <a:bodyPr/>
-                    <a:lstStyle/>
-                    <a:p>
-                      <a:pPr>
-                        <a:lnSpc>
-                          <a:spcPct val="150000"/>
-                        </a:lnSpc>
-                        <a:spcAft>
-                          <a:spcPts val="1000"/>
-                        </a:spcAft>
-                        <a:buNone/>
-                      </a:pPr>
-                      <a:r>
-                        <a:rPr lang="en-GB" sz="1200" b="0" kern="100">
-                          <a:solidFill>
-                            <a:schemeClr val="tx1"/>
-                          </a:solidFill>
-                          <a:effectLst/>
-                          <a:latin typeface="Times New Roman" panose="02020603050405020304" pitchFamily="18" charset="0"/>
-                          <a:ea typeface="Aptos" panose="020B0004020202020204" pitchFamily="34" charset="0"/>
-                          <a:cs typeface="Arial" panose="020B0604020202020204" pitchFamily="34" charset="0"/>
-                        </a:rPr>
-                        <a:t>0.4903</a:t>
-                      </a:r>
-                      <a:endParaRPr lang="en-GB" sz="1100" b="0" kern="100">
-                        <a:solidFill>
-                          <a:schemeClr val="tx1"/>
-                        </a:solidFill>
-                        <a:effectLst/>
-                        <a:latin typeface="Aptos" panose="020B0004020202020204" pitchFamily="34" charset="0"/>
-                        <a:ea typeface="Aptos" panose="020B0004020202020204" pitchFamily="34" charset="0"/>
-                        <a:cs typeface="Arial" panose="020B0604020202020204" pitchFamily="34" charset="0"/>
-                      </a:endParaRPr>
-                    </a:p>
-                  </a:txBody>
-                  <a:tcPr marL="68580" marR="68580" marT="0" marB="0"/>
-                </a:tc>
-                <a:tc>
-                  <a:txBody>
-                    <a:bodyPr/>
-                    <a:lstStyle/>
-                    <a:p>
-                      <a:pPr>
-                        <a:lnSpc>
-                          <a:spcPct val="150000"/>
-                        </a:lnSpc>
-                        <a:spcAft>
-                          <a:spcPts val="1000"/>
-                        </a:spcAft>
-                        <a:buNone/>
-                      </a:pPr>
-                      <a:r>
-                        <a:rPr lang="en-GB" sz="1200" b="0" kern="100">
-                          <a:solidFill>
-                            <a:schemeClr val="tx1"/>
-                          </a:solidFill>
-                          <a:effectLst/>
-                          <a:latin typeface="Times New Roman" panose="02020603050405020304" pitchFamily="18" charset="0"/>
-                          <a:ea typeface="Aptos" panose="020B0004020202020204" pitchFamily="34" charset="0"/>
-                          <a:cs typeface="Arial" panose="020B0604020202020204" pitchFamily="34" charset="0"/>
-                        </a:rPr>
-                        <a:t>0.0129</a:t>
-                      </a:r>
-                      <a:endParaRPr lang="en-GB" sz="1100" b="0" kern="100">
-                        <a:solidFill>
-                          <a:schemeClr val="tx1"/>
-                        </a:solidFill>
-                        <a:effectLst/>
-                        <a:latin typeface="Aptos" panose="020B0004020202020204" pitchFamily="34" charset="0"/>
-                        <a:ea typeface="Aptos" panose="020B0004020202020204" pitchFamily="34" charset="0"/>
-                        <a:cs typeface="Arial" panose="020B0604020202020204" pitchFamily="34" charset="0"/>
-                      </a:endParaRPr>
-                    </a:p>
-                  </a:txBody>
-                  <a:tcPr marL="68580" marR="68580" marT="0" marB="0"/>
-                </a:tc>
-                <a:tc>
-                  <a:txBody>
-                    <a:bodyPr/>
-                    <a:lstStyle/>
-                    <a:p>
-                      <a:pPr>
-                        <a:lnSpc>
-                          <a:spcPct val="150000"/>
-                        </a:lnSpc>
-                        <a:spcAft>
-                          <a:spcPts val="1000"/>
-                        </a:spcAft>
-                        <a:buNone/>
-                      </a:pPr>
-                      <a:r>
-                        <a:rPr lang="en-GB" sz="1200" b="0" kern="100">
-                          <a:solidFill>
-                            <a:schemeClr val="tx1"/>
-                          </a:solidFill>
-                          <a:effectLst/>
-                          <a:highlight>
-                            <a:srgbClr val="FFFF00"/>
-                          </a:highlight>
-                          <a:latin typeface="Times New Roman" panose="02020603050405020304" pitchFamily="18" charset="0"/>
-                          <a:ea typeface="Aptos" panose="020B0004020202020204" pitchFamily="34" charset="0"/>
-                          <a:cs typeface="Arial" panose="020B0604020202020204" pitchFamily="34" charset="0"/>
-                        </a:rPr>
-                        <a:t>0.7574</a:t>
-                      </a:r>
-                      <a:endParaRPr lang="en-GB" sz="1100" b="0" kern="100">
-                        <a:solidFill>
-                          <a:schemeClr val="tx1"/>
-                        </a:solidFill>
-                        <a:effectLst/>
-                        <a:latin typeface="Aptos" panose="020B0004020202020204" pitchFamily="34" charset="0"/>
-                        <a:ea typeface="Aptos" panose="020B0004020202020204" pitchFamily="34" charset="0"/>
-                        <a:cs typeface="Arial" panose="020B0604020202020204" pitchFamily="34" charset="0"/>
-                      </a:endParaRPr>
-                    </a:p>
-                  </a:txBody>
-                  <a:tcPr marL="68580" marR="68580" marT="0" marB="0"/>
-                </a:tc>
-                <a:tc>
-                  <a:txBody>
-                    <a:bodyPr/>
-                    <a:lstStyle/>
-                    <a:p>
-                      <a:pPr>
-                        <a:lnSpc>
-                          <a:spcPct val="150000"/>
-                        </a:lnSpc>
-                        <a:spcAft>
-                          <a:spcPts val="1000"/>
-                        </a:spcAft>
-                        <a:buNone/>
-                      </a:pPr>
-                      <a:r>
-                        <a:rPr lang="en-GB" sz="1200" b="0" kern="100">
-                          <a:solidFill>
-                            <a:schemeClr val="tx1"/>
-                          </a:solidFill>
-                          <a:effectLst/>
-                          <a:highlight>
-                            <a:srgbClr val="FFFF00"/>
-                          </a:highlight>
-                          <a:latin typeface="Times New Roman" panose="02020603050405020304" pitchFamily="18" charset="0"/>
-                          <a:ea typeface="Aptos" panose="020B0004020202020204" pitchFamily="34" charset="0"/>
-                          <a:cs typeface="Arial" panose="020B0604020202020204" pitchFamily="34" charset="0"/>
-                        </a:rPr>
-                        <a:t>0.4490</a:t>
-                      </a:r>
-                      <a:endParaRPr lang="en-GB" sz="1100" b="0" kern="100">
-                        <a:solidFill>
-                          <a:schemeClr val="tx1"/>
-                        </a:solidFill>
-                        <a:effectLst/>
-                        <a:latin typeface="Aptos" panose="020B0004020202020204" pitchFamily="34" charset="0"/>
-                        <a:ea typeface="Aptos" panose="020B0004020202020204" pitchFamily="34" charset="0"/>
-                        <a:cs typeface="Arial" panose="020B0604020202020204" pitchFamily="34" charset="0"/>
-                      </a:endParaRPr>
-                    </a:p>
-                  </a:txBody>
-                  <a:tcPr marL="68580" marR="68580" marT="0" marB="0"/>
-                </a:tc>
-                <a:tc>
-                  <a:txBody>
-                    <a:bodyPr/>
-                    <a:lstStyle/>
-                    <a:p>
-                      <a:pPr>
-                        <a:lnSpc>
-                          <a:spcPct val="150000"/>
-                        </a:lnSpc>
-                        <a:spcAft>
-                          <a:spcPts val="1000"/>
-                        </a:spcAft>
-                        <a:buNone/>
-                      </a:pPr>
-                      <a:r>
-                        <a:rPr lang="en-GB" sz="1200" b="0" kern="100">
-                          <a:solidFill>
-                            <a:schemeClr val="tx1"/>
-                          </a:solidFill>
-                          <a:effectLst/>
-                          <a:latin typeface="Times New Roman" panose="02020603050405020304" pitchFamily="18" charset="0"/>
-                          <a:ea typeface="Aptos" panose="020B0004020202020204" pitchFamily="34" charset="0"/>
-                          <a:cs typeface="Arial" panose="020B0604020202020204" pitchFamily="34" charset="0"/>
-                        </a:rPr>
-                        <a:t>0.0528</a:t>
-                      </a:r>
-                      <a:endParaRPr lang="en-GB" sz="1100" b="0" kern="100">
-                        <a:solidFill>
-                          <a:schemeClr val="tx1"/>
-                        </a:solidFill>
-                        <a:effectLst/>
-                        <a:latin typeface="Aptos" panose="020B0004020202020204" pitchFamily="34" charset="0"/>
-                        <a:ea typeface="Aptos" panose="020B0004020202020204" pitchFamily="34" charset="0"/>
-                        <a:cs typeface="Arial" panose="020B0604020202020204" pitchFamily="34" charset="0"/>
-                      </a:endParaRPr>
-                    </a:p>
-                  </a:txBody>
-                  <a:tcPr marL="68580" marR="68580" marT="0" marB="0"/>
-                </a:tc>
-                <a:tc>
-                  <a:txBody>
-                    <a:bodyPr/>
-                    <a:lstStyle/>
-                    <a:p>
-                      <a:pPr>
-                        <a:lnSpc>
-                          <a:spcPct val="150000"/>
-                        </a:lnSpc>
-                        <a:spcAft>
-                          <a:spcPts val="1000"/>
-                        </a:spcAft>
-                        <a:buNone/>
-                      </a:pPr>
-                      <a:r>
-                        <a:rPr lang="en-GB" sz="1200" b="0" kern="100">
-                          <a:solidFill>
-                            <a:schemeClr val="tx1"/>
-                          </a:solidFill>
-                          <a:effectLst/>
-                          <a:latin typeface="Times New Roman" panose="02020603050405020304" pitchFamily="18" charset="0"/>
-                          <a:ea typeface="Aptos" panose="020B0004020202020204" pitchFamily="34" charset="0"/>
-                          <a:cs typeface="Arial" panose="020B0604020202020204" pitchFamily="34" charset="0"/>
-                        </a:rPr>
-                        <a:t>0.0064</a:t>
-                      </a:r>
-                      <a:endParaRPr lang="en-GB" sz="1100" b="0" kern="100">
-                        <a:solidFill>
-                          <a:schemeClr val="tx1"/>
-                        </a:solidFill>
-                        <a:effectLst/>
-                        <a:latin typeface="Aptos" panose="020B0004020202020204" pitchFamily="34" charset="0"/>
-                        <a:ea typeface="Aptos" panose="020B0004020202020204" pitchFamily="34" charset="0"/>
-                        <a:cs typeface="Arial" panose="020B0604020202020204" pitchFamily="34" charset="0"/>
-                      </a:endParaRPr>
-                    </a:p>
-                  </a:txBody>
-                  <a:tcPr marL="68580" marR="68580" marT="0" marB="0"/>
-                </a:tc>
-                <a:extLst>
-                  <a:ext uri="{0D108BD9-81ED-4DB2-BD59-A6C34878D82A}">
-                    <a16:rowId xmlns:a16="http://schemas.microsoft.com/office/drawing/2014/main" val="977764320"/>
-                  </a:ext>
-                </a:extLst>
-              </a:tr>
-              <a:tr h="206061">
-                <a:tc>
-                  <a:txBody>
-                    <a:bodyPr/>
-                    <a:lstStyle/>
-                    <a:p>
-                      <a:pPr>
-                        <a:lnSpc>
-                          <a:spcPct val="115000"/>
-                        </a:lnSpc>
-                        <a:spcAft>
-                          <a:spcPts val="1000"/>
-                        </a:spcAft>
-                        <a:buNone/>
-                      </a:pPr>
-                      <a:r>
-                        <a:rPr lang="fr-FR" sz="1200" kern="100" dirty="0">
-                          <a:effectLst/>
-                          <a:latin typeface="Aptos" panose="020B0004020202020204" pitchFamily="34" charset="0"/>
-                          <a:ea typeface="Aptos" panose="020B0004020202020204" pitchFamily="34" charset="0"/>
-                          <a:cs typeface="Arial" panose="020B0604020202020204" pitchFamily="34" charset="0"/>
-                        </a:rPr>
-                        <a:t>V</a:t>
-                      </a:r>
-                      <a:r>
-                        <a:rPr lang="en-GB" sz="1200" kern="100" dirty="0">
-                          <a:effectLst/>
-                          <a:latin typeface="Aptos" panose="020B0004020202020204" pitchFamily="34" charset="0"/>
-                          <a:ea typeface="Aptos" panose="020B0004020202020204" pitchFamily="34" charset="0"/>
-                          <a:cs typeface="Arial" panose="020B0604020202020204" pitchFamily="34" charset="0"/>
-                        </a:rPr>
-                        <a:t>GAE</a:t>
-                      </a:r>
-                      <a:endParaRPr lang="en-GB" sz="1100" kern="100" dirty="0">
-                        <a:effectLst/>
-                        <a:latin typeface="Aptos" panose="020B0004020202020204" pitchFamily="34" charset="0"/>
-                        <a:ea typeface="Aptos" panose="020B0004020202020204" pitchFamily="34" charset="0"/>
-                        <a:cs typeface="Arial" panose="020B0604020202020204" pitchFamily="34" charset="0"/>
-                      </a:endParaRPr>
-                    </a:p>
-                  </a:txBody>
-                  <a:tcPr marL="68580" marR="68580" marT="0" marB="0"/>
-                </a:tc>
-                <a:tc>
-                  <a:txBody>
-                    <a:bodyPr/>
-                    <a:lstStyle/>
-                    <a:p>
-                      <a:pPr>
-                        <a:lnSpc>
-                          <a:spcPct val="150000"/>
-                        </a:lnSpc>
-                        <a:spcAft>
-                          <a:spcPts val="1000"/>
-                        </a:spcAft>
-                        <a:buNone/>
-                      </a:pPr>
-                      <a:r>
-                        <a:rPr lang="en-GB" sz="1200" b="0" kern="100">
-                          <a:solidFill>
-                            <a:schemeClr val="tx1"/>
-                          </a:solidFill>
-                          <a:effectLst/>
-                          <a:latin typeface="Times New Roman" panose="02020603050405020304" pitchFamily="18" charset="0"/>
-                          <a:ea typeface="Aptos" panose="020B0004020202020204" pitchFamily="34" charset="0"/>
-                          <a:cs typeface="Arial" panose="020B0604020202020204" pitchFamily="34" charset="0"/>
-                        </a:rPr>
-                        <a:t>0.7717</a:t>
-                      </a:r>
-                      <a:endParaRPr lang="en-GB" sz="1100" b="0" kern="100">
-                        <a:solidFill>
-                          <a:schemeClr val="tx1"/>
-                        </a:solidFill>
-                        <a:effectLst/>
-                        <a:latin typeface="Aptos" panose="020B0004020202020204" pitchFamily="34" charset="0"/>
-                        <a:ea typeface="Aptos" panose="020B0004020202020204" pitchFamily="34" charset="0"/>
-                        <a:cs typeface="Arial" panose="020B0604020202020204" pitchFamily="34" charset="0"/>
-                      </a:endParaRPr>
-                    </a:p>
-                  </a:txBody>
-                  <a:tcPr marL="68580" marR="68580" marT="0" marB="0"/>
-                </a:tc>
-                <a:tc>
-                  <a:txBody>
-                    <a:bodyPr/>
-                    <a:lstStyle/>
-                    <a:p>
-                      <a:pPr>
-                        <a:lnSpc>
-                          <a:spcPct val="150000"/>
-                        </a:lnSpc>
-                        <a:spcAft>
-                          <a:spcPts val="1000"/>
-                        </a:spcAft>
-                        <a:buNone/>
-                      </a:pPr>
-                      <a:r>
-                        <a:rPr lang="en-GB" sz="1200" b="0" kern="100">
-                          <a:solidFill>
-                            <a:schemeClr val="tx1"/>
-                          </a:solidFill>
-                          <a:effectLst/>
-                          <a:highlight>
-                            <a:srgbClr val="FFFF00"/>
-                          </a:highlight>
-                          <a:latin typeface="Times New Roman" panose="02020603050405020304" pitchFamily="18" charset="0"/>
-                          <a:ea typeface="Aptos" panose="020B0004020202020204" pitchFamily="34" charset="0"/>
-                          <a:cs typeface="Arial" panose="020B0604020202020204" pitchFamily="34" charset="0"/>
-                        </a:rPr>
-                        <a:t>1.0000</a:t>
-                      </a:r>
-                      <a:endParaRPr lang="en-GB" sz="1100" b="0" kern="100">
-                        <a:solidFill>
-                          <a:schemeClr val="tx1"/>
-                        </a:solidFill>
-                        <a:effectLst/>
-                        <a:latin typeface="Aptos" panose="020B0004020202020204" pitchFamily="34" charset="0"/>
-                        <a:ea typeface="Aptos" panose="020B0004020202020204" pitchFamily="34" charset="0"/>
-                        <a:cs typeface="Arial" panose="020B0604020202020204" pitchFamily="34" charset="0"/>
-                      </a:endParaRPr>
-                    </a:p>
-                  </a:txBody>
-                  <a:tcPr marL="68580" marR="68580" marT="0" marB="0"/>
-                </a:tc>
-                <a:tc>
-                  <a:txBody>
-                    <a:bodyPr/>
-                    <a:lstStyle/>
-                    <a:p>
-                      <a:pPr>
-                        <a:lnSpc>
-                          <a:spcPct val="150000"/>
-                        </a:lnSpc>
-                        <a:spcAft>
-                          <a:spcPts val="1000"/>
-                        </a:spcAft>
-                        <a:buNone/>
-                      </a:pPr>
-                      <a:r>
-                        <a:rPr lang="en-GB" sz="1200" b="0" kern="100">
-                          <a:solidFill>
-                            <a:schemeClr val="tx1"/>
-                          </a:solidFill>
-                          <a:effectLst/>
-                          <a:latin typeface="Times New Roman" panose="02020603050405020304" pitchFamily="18" charset="0"/>
-                          <a:ea typeface="Aptos" panose="020B0004020202020204" pitchFamily="34" charset="0"/>
-                          <a:cs typeface="Arial" panose="020B0604020202020204" pitchFamily="34" charset="0"/>
-                        </a:rPr>
-                        <a:t>0.8905</a:t>
-                      </a:r>
-                      <a:endParaRPr lang="en-GB" sz="1100" b="0" kern="100">
-                        <a:solidFill>
-                          <a:schemeClr val="tx1"/>
-                        </a:solidFill>
-                        <a:effectLst/>
-                        <a:latin typeface="Aptos" panose="020B0004020202020204" pitchFamily="34" charset="0"/>
-                        <a:ea typeface="Aptos" panose="020B0004020202020204" pitchFamily="34" charset="0"/>
-                        <a:cs typeface="Arial" panose="020B0604020202020204" pitchFamily="34" charset="0"/>
-                      </a:endParaRPr>
-                    </a:p>
-                  </a:txBody>
-                  <a:tcPr marL="68580" marR="68580" marT="0" marB="0"/>
-                </a:tc>
-                <a:tc>
-                  <a:txBody>
-                    <a:bodyPr/>
-                    <a:lstStyle/>
-                    <a:p>
-                      <a:pPr>
-                        <a:lnSpc>
-                          <a:spcPct val="150000"/>
-                        </a:lnSpc>
-                        <a:spcAft>
-                          <a:spcPts val="1000"/>
-                        </a:spcAft>
-                        <a:buNone/>
-                      </a:pPr>
-                      <a:r>
-                        <a:rPr lang="en-GB" sz="1200" b="0" kern="100">
-                          <a:solidFill>
-                            <a:schemeClr val="tx1"/>
-                          </a:solidFill>
-                          <a:effectLst/>
-                          <a:latin typeface="Times New Roman" panose="02020603050405020304" pitchFamily="18" charset="0"/>
-                          <a:ea typeface="Aptos" panose="020B0004020202020204" pitchFamily="34" charset="0"/>
-                          <a:cs typeface="Arial" panose="020B0604020202020204" pitchFamily="34" charset="0"/>
-                        </a:rPr>
-                        <a:t>0.4953</a:t>
-                      </a:r>
-                      <a:endParaRPr lang="en-GB" sz="1100" b="0" kern="100">
-                        <a:solidFill>
-                          <a:schemeClr val="tx1"/>
-                        </a:solidFill>
-                        <a:effectLst/>
-                        <a:latin typeface="Aptos" panose="020B0004020202020204" pitchFamily="34" charset="0"/>
-                        <a:ea typeface="Aptos" panose="020B0004020202020204" pitchFamily="34" charset="0"/>
-                        <a:cs typeface="Arial" panose="020B0604020202020204" pitchFamily="34" charset="0"/>
-                      </a:endParaRPr>
-                    </a:p>
-                  </a:txBody>
-                  <a:tcPr marL="68580" marR="68580" marT="0" marB="0"/>
-                </a:tc>
-                <a:tc>
-                  <a:txBody>
-                    <a:bodyPr/>
-                    <a:lstStyle/>
-                    <a:p>
-                      <a:pPr>
-                        <a:lnSpc>
-                          <a:spcPct val="150000"/>
-                        </a:lnSpc>
-                        <a:spcAft>
-                          <a:spcPts val="1000"/>
-                        </a:spcAft>
-                        <a:buNone/>
-                      </a:pPr>
-                      <a:r>
-                        <a:rPr lang="en-GB" sz="1200" b="0" kern="100">
-                          <a:solidFill>
-                            <a:schemeClr val="tx1"/>
-                          </a:solidFill>
-                          <a:effectLst/>
-                          <a:latin typeface="Times New Roman" panose="02020603050405020304" pitchFamily="18" charset="0"/>
-                          <a:ea typeface="Aptos" panose="020B0004020202020204" pitchFamily="34" charset="0"/>
-                          <a:cs typeface="Arial" panose="020B0604020202020204" pitchFamily="34" charset="0"/>
-                        </a:rPr>
-                        <a:t>0.0234</a:t>
-                      </a:r>
-                      <a:endParaRPr lang="en-GB" sz="1100" b="0" kern="100">
-                        <a:solidFill>
-                          <a:schemeClr val="tx1"/>
-                        </a:solidFill>
-                        <a:effectLst/>
-                        <a:latin typeface="Aptos" panose="020B0004020202020204" pitchFamily="34" charset="0"/>
-                        <a:ea typeface="Aptos" panose="020B0004020202020204" pitchFamily="34" charset="0"/>
-                        <a:cs typeface="Arial" panose="020B0604020202020204" pitchFamily="34" charset="0"/>
-                      </a:endParaRPr>
-                    </a:p>
-                  </a:txBody>
-                  <a:tcPr marL="68580" marR="68580" marT="0" marB="0"/>
-                </a:tc>
-                <a:tc>
-                  <a:txBody>
-                    <a:bodyPr/>
-                    <a:lstStyle/>
-                    <a:p>
-                      <a:pPr>
-                        <a:lnSpc>
-                          <a:spcPct val="150000"/>
-                        </a:lnSpc>
-                        <a:spcAft>
-                          <a:spcPts val="1000"/>
-                        </a:spcAft>
-                        <a:buNone/>
-                      </a:pPr>
-                      <a:r>
-                        <a:rPr lang="en-GB" sz="1200" b="0" kern="100">
-                          <a:solidFill>
-                            <a:schemeClr val="tx1"/>
-                          </a:solidFill>
-                          <a:effectLst/>
-                          <a:latin typeface="Times New Roman" panose="02020603050405020304" pitchFamily="18" charset="0"/>
-                          <a:ea typeface="Aptos" panose="020B0004020202020204" pitchFamily="34" charset="0"/>
-                          <a:cs typeface="Arial" panose="020B0604020202020204" pitchFamily="34" charset="0"/>
-                        </a:rPr>
-                        <a:t>0.7252</a:t>
-                      </a:r>
-                      <a:endParaRPr lang="en-GB" sz="1100" b="0" kern="100">
-                        <a:solidFill>
-                          <a:schemeClr val="tx1"/>
-                        </a:solidFill>
-                        <a:effectLst/>
-                        <a:latin typeface="Aptos" panose="020B0004020202020204" pitchFamily="34" charset="0"/>
-                        <a:ea typeface="Aptos" panose="020B0004020202020204" pitchFamily="34" charset="0"/>
-                        <a:cs typeface="Arial" panose="020B0604020202020204" pitchFamily="34" charset="0"/>
-                      </a:endParaRPr>
-                    </a:p>
-                  </a:txBody>
-                  <a:tcPr marL="68580" marR="68580" marT="0" marB="0"/>
-                </a:tc>
-                <a:tc>
-                  <a:txBody>
-                    <a:bodyPr/>
-                    <a:lstStyle/>
-                    <a:p>
-                      <a:pPr>
-                        <a:lnSpc>
-                          <a:spcPct val="150000"/>
-                        </a:lnSpc>
-                        <a:spcAft>
-                          <a:spcPts val="1000"/>
-                        </a:spcAft>
-                        <a:buNone/>
-                      </a:pPr>
-                      <a:r>
-                        <a:rPr lang="en-GB" sz="1200" b="0" kern="100">
-                          <a:solidFill>
-                            <a:schemeClr val="tx1"/>
-                          </a:solidFill>
-                          <a:effectLst/>
-                          <a:latin typeface="Times New Roman" panose="02020603050405020304" pitchFamily="18" charset="0"/>
-                          <a:ea typeface="Aptos" panose="020B0004020202020204" pitchFamily="34" charset="0"/>
-                          <a:cs typeface="Arial" panose="020B0604020202020204" pitchFamily="34" charset="0"/>
-                        </a:rPr>
-                        <a:t>0.4248</a:t>
-                      </a:r>
-                      <a:endParaRPr lang="en-GB" sz="1100" b="0" kern="100">
-                        <a:solidFill>
-                          <a:schemeClr val="tx1"/>
-                        </a:solidFill>
-                        <a:effectLst/>
-                        <a:latin typeface="Aptos" panose="020B0004020202020204" pitchFamily="34" charset="0"/>
-                        <a:ea typeface="Aptos" panose="020B0004020202020204" pitchFamily="34" charset="0"/>
-                        <a:cs typeface="Arial" panose="020B0604020202020204" pitchFamily="34" charset="0"/>
-                      </a:endParaRPr>
-                    </a:p>
-                  </a:txBody>
-                  <a:tcPr marL="68580" marR="68580" marT="0" marB="0"/>
-                </a:tc>
-                <a:tc>
-                  <a:txBody>
-                    <a:bodyPr/>
-                    <a:lstStyle/>
-                    <a:p>
-                      <a:pPr>
-                        <a:lnSpc>
-                          <a:spcPct val="150000"/>
-                        </a:lnSpc>
-                        <a:spcAft>
-                          <a:spcPts val="1000"/>
-                        </a:spcAft>
-                        <a:buNone/>
-                      </a:pPr>
-                      <a:r>
-                        <a:rPr lang="en-GB" sz="1200" b="0" kern="100">
-                          <a:solidFill>
-                            <a:schemeClr val="tx1"/>
-                          </a:solidFill>
-                          <a:effectLst/>
-                          <a:latin typeface="Times New Roman" panose="02020603050405020304" pitchFamily="18" charset="0"/>
-                          <a:ea typeface="Aptos" panose="020B0004020202020204" pitchFamily="34" charset="0"/>
-                          <a:cs typeface="Arial" panose="020B0604020202020204" pitchFamily="34" charset="0"/>
-                        </a:rPr>
-                        <a:t>0.0278</a:t>
-                      </a:r>
-                      <a:endParaRPr lang="en-GB" sz="1100" b="0" kern="100">
-                        <a:solidFill>
-                          <a:schemeClr val="tx1"/>
-                        </a:solidFill>
-                        <a:effectLst/>
-                        <a:latin typeface="Aptos" panose="020B0004020202020204" pitchFamily="34" charset="0"/>
-                        <a:ea typeface="Aptos" panose="020B0004020202020204" pitchFamily="34" charset="0"/>
-                        <a:cs typeface="Arial" panose="020B0604020202020204" pitchFamily="34" charset="0"/>
-                      </a:endParaRPr>
-                    </a:p>
-                  </a:txBody>
-                  <a:tcPr marL="68580" marR="68580" marT="0" marB="0"/>
-                </a:tc>
-                <a:tc>
-                  <a:txBody>
-                    <a:bodyPr/>
-                    <a:lstStyle/>
-                    <a:p>
-                      <a:pPr>
-                        <a:lnSpc>
-                          <a:spcPct val="150000"/>
-                        </a:lnSpc>
-                        <a:spcAft>
-                          <a:spcPts val="1000"/>
-                        </a:spcAft>
-                        <a:buNone/>
-                      </a:pPr>
-                      <a:r>
-                        <a:rPr lang="en-GB" sz="1200" b="0" kern="100">
-                          <a:solidFill>
-                            <a:schemeClr val="tx1"/>
-                          </a:solidFill>
-                          <a:effectLst/>
-                          <a:latin typeface="Times New Roman" panose="02020603050405020304" pitchFamily="18" charset="0"/>
-                          <a:ea typeface="Aptos" panose="020B0004020202020204" pitchFamily="34" charset="0"/>
-                          <a:cs typeface="Arial" panose="020B0604020202020204" pitchFamily="34" charset="0"/>
-                        </a:rPr>
-                        <a:t>0.0049</a:t>
-                      </a:r>
-                      <a:endParaRPr lang="en-GB" sz="1100" b="0" kern="100">
-                        <a:solidFill>
-                          <a:schemeClr val="tx1"/>
-                        </a:solidFill>
-                        <a:effectLst/>
-                        <a:latin typeface="Aptos" panose="020B0004020202020204" pitchFamily="34" charset="0"/>
-                        <a:ea typeface="Aptos" panose="020B0004020202020204" pitchFamily="34" charset="0"/>
-                        <a:cs typeface="Arial" panose="020B0604020202020204" pitchFamily="34" charset="0"/>
-                      </a:endParaRPr>
-                    </a:p>
-                  </a:txBody>
-                  <a:tcPr marL="68580" marR="68580" marT="0" marB="0"/>
-                </a:tc>
-                <a:extLst>
-                  <a:ext uri="{0D108BD9-81ED-4DB2-BD59-A6C34878D82A}">
-                    <a16:rowId xmlns:a16="http://schemas.microsoft.com/office/drawing/2014/main" val="1212663933"/>
-                  </a:ext>
-                </a:extLst>
-              </a:tr>
-              <a:tr h="206061">
-                <a:tc>
-                  <a:txBody>
-                    <a:bodyPr/>
-                    <a:lstStyle/>
-                    <a:p>
-                      <a:pPr>
-                        <a:lnSpc>
-                          <a:spcPct val="115000"/>
-                        </a:lnSpc>
-                        <a:spcAft>
-                          <a:spcPts val="1000"/>
-                        </a:spcAft>
-                        <a:buNone/>
-                      </a:pPr>
-                      <a:r>
-                        <a:rPr lang="fr-FR" sz="1100" kern="100" dirty="0" err="1">
-                          <a:effectLst/>
-                          <a:latin typeface="Aptos" panose="020B0004020202020204" pitchFamily="34" charset="0"/>
-                          <a:ea typeface="Aptos" panose="020B0004020202020204" pitchFamily="34" charset="0"/>
-                          <a:cs typeface="Arial" panose="020B0604020202020204" pitchFamily="34" charset="0"/>
-                        </a:rPr>
-                        <a:t>Autoencoder</a:t>
-                      </a:r>
-                      <a:endParaRPr lang="en-GB" sz="1100" kern="100" dirty="0">
-                        <a:effectLst/>
-                        <a:latin typeface="Aptos" panose="020B0004020202020204" pitchFamily="34" charset="0"/>
-                        <a:ea typeface="Aptos" panose="020B0004020202020204" pitchFamily="34" charset="0"/>
-                        <a:cs typeface="Arial" panose="020B0604020202020204" pitchFamily="34" charset="0"/>
-                      </a:endParaRPr>
-                    </a:p>
-                  </a:txBody>
-                  <a:tcPr marL="68580" marR="68580" marT="0" marB="0"/>
-                </a:tc>
-                <a:tc>
-                  <a:txBody>
-                    <a:bodyPr/>
-                    <a:lstStyle/>
-                    <a:p>
-                      <a:pPr>
-                        <a:lnSpc>
-                          <a:spcPct val="150000"/>
-                        </a:lnSpc>
-                        <a:spcAft>
-                          <a:spcPts val="1000"/>
-                        </a:spcAft>
-                        <a:buNone/>
-                      </a:pPr>
-                      <a:r>
-                        <a:rPr lang="en-GB" sz="1200" b="0" kern="100">
-                          <a:solidFill>
-                            <a:schemeClr val="tx1"/>
-                          </a:solidFill>
-                          <a:effectLst/>
-                          <a:latin typeface="Times New Roman" panose="02020603050405020304" pitchFamily="18" charset="0"/>
-                          <a:ea typeface="Aptos" panose="020B0004020202020204" pitchFamily="34" charset="0"/>
-                          <a:cs typeface="Arial" panose="020B0604020202020204" pitchFamily="34" charset="0"/>
-                        </a:rPr>
-                        <a:t>0.0072</a:t>
-                      </a:r>
-                      <a:endParaRPr lang="en-GB" sz="1100" b="0" kern="100">
-                        <a:solidFill>
-                          <a:schemeClr val="tx1"/>
-                        </a:solidFill>
-                        <a:effectLst/>
-                        <a:latin typeface="Aptos" panose="020B0004020202020204" pitchFamily="34" charset="0"/>
-                        <a:ea typeface="Aptos" panose="020B0004020202020204" pitchFamily="34" charset="0"/>
-                        <a:cs typeface="Arial" panose="020B0604020202020204" pitchFamily="34" charset="0"/>
-                      </a:endParaRPr>
-                    </a:p>
-                  </a:txBody>
-                  <a:tcPr marL="68580" marR="68580" marT="0" marB="0"/>
-                </a:tc>
-                <a:tc>
-                  <a:txBody>
-                    <a:bodyPr/>
-                    <a:lstStyle/>
-                    <a:p>
-                      <a:pPr>
-                        <a:lnSpc>
-                          <a:spcPct val="150000"/>
-                        </a:lnSpc>
-                        <a:spcAft>
-                          <a:spcPts val="1000"/>
-                        </a:spcAft>
-                        <a:buNone/>
-                      </a:pPr>
-                      <a:r>
-                        <a:rPr lang="en-GB" sz="1200" b="0" kern="100">
-                          <a:solidFill>
-                            <a:schemeClr val="tx1"/>
-                          </a:solidFill>
-                          <a:effectLst/>
-                          <a:latin typeface="Times New Roman" panose="02020603050405020304" pitchFamily="18" charset="0"/>
-                          <a:ea typeface="Aptos" panose="020B0004020202020204" pitchFamily="34" charset="0"/>
-                          <a:cs typeface="Arial" panose="020B0604020202020204" pitchFamily="34" charset="0"/>
-                        </a:rPr>
-                        <a:t>0.0578</a:t>
-                      </a:r>
-                      <a:endParaRPr lang="en-GB" sz="1100" b="0" kern="100">
-                        <a:solidFill>
-                          <a:schemeClr val="tx1"/>
-                        </a:solidFill>
-                        <a:effectLst/>
-                        <a:latin typeface="Aptos" panose="020B0004020202020204" pitchFamily="34" charset="0"/>
-                        <a:ea typeface="Aptos" panose="020B0004020202020204" pitchFamily="34" charset="0"/>
-                        <a:cs typeface="Arial" panose="020B0604020202020204" pitchFamily="34" charset="0"/>
-                      </a:endParaRPr>
-                    </a:p>
-                  </a:txBody>
-                  <a:tcPr marL="68580" marR="68580" marT="0" marB="0"/>
-                </a:tc>
-                <a:tc>
-                  <a:txBody>
-                    <a:bodyPr/>
-                    <a:lstStyle/>
-                    <a:p>
-                      <a:pPr>
-                        <a:lnSpc>
-                          <a:spcPct val="150000"/>
-                        </a:lnSpc>
-                        <a:spcAft>
-                          <a:spcPts val="1000"/>
-                        </a:spcAft>
-                        <a:buNone/>
-                      </a:pPr>
-                      <a:r>
-                        <a:rPr lang="en-GB" sz="1200" b="0" kern="100">
-                          <a:solidFill>
-                            <a:schemeClr val="tx1"/>
-                          </a:solidFill>
-                          <a:effectLst/>
-                          <a:latin typeface="Times New Roman" panose="02020603050405020304" pitchFamily="18" charset="0"/>
-                          <a:ea typeface="Aptos" panose="020B0004020202020204" pitchFamily="34" charset="0"/>
-                          <a:cs typeface="Arial" panose="020B0604020202020204" pitchFamily="34" charset="0"/>
-                        </a:rPr>
-                        <a:t>0.8358</a:t>
-                      </a:r>
-                      <a:endParaRPr lang="en-GB" sz="1100" b="0" kern="100">
-                        <a:solidFill>
-                          <a:schemeClr val="tx1"/>
-                        </a:solidFill>
-                        <a:effectLst/>
-                        <a:latin typeface="Aptos" panose="020B0004020202020204" pitchFamily="34" charset="0"/>
-                        <a:ea typeface="Aptos" panose="020B0004020202020204" pitchFamily="34" charset="0"/>
-                        <a:cs typeface="Arial" panose="020B0604020202020204" pitchFamily="34" charset="0"/>
-                      </a:endParaRPr>
-                    </a:p>
-                  </a:txBody>
-                  <a:tcPr marL="68580" marR="68580" marT="0" marB="0"/>
-                </a:tc>
-                <a:tc>
-                  <a:txBody>
-                    <a:bodyPr/>
-                    <a:lstStyle/>
-                    <a:p>
-                      <a:pPr>
-                        <a:lnSpc>
-                          <a:spcPct val="150000"/>
-                        </a:lnSpc>
-                        <a:spcAft>
-                          <a:spcPts val="1000"/>
-                        </a:spcAft>
-                        <a:buNone/>
-                      </a:pPr>
-                      <a:r>
-                        <a:rPr lang="en-GB" sz="1200" b="0" kern="100">
-                          <a:solidFill>
-                            <a:schemeClr val="tx1"/>
-                          </a:solidFill>
-                          <a:effectLst/>
-                          <a:latin typeface="Times New Roman" panose="02020603050405020304" pitchFamily="18" charset="0"/>
-                          <a:ea typeface="Aptos" panose="020B0004020202020204" pitchFamily="34" charset="0"/>
-                          <a:cs typeface="Arial" panose="020B0604020202020204" pitchFamily="34" charset="0"/>
-                        </a:rPr>
-                        <a:t>0.0181</a:t>
-                      </a:r>
-                      <a:endParaRPr lang="en-GB" sz="1100" b="0" kern="100">
-                        <a:solidFill>
-                          <a:schemeClr val="tx1"/>
-                        </a:solidFill>
-                        <a:effectLst/>
-                        <a:latin typeface="Aptos" panose="020B0004020202020204" pitchFamily="34" charset="0"/>
-                        <a:ea typeface="Aptos" panose="020B0004020202020204" pitchFamily="34" charset="0"/>
-                        <a:cs typeface="Arial" panose="020B0604020202020204" pitchFamily="34" charset="0"/>
-                      </a:endParaRPr>
-                    </a:p>
-                  </a:txBody>
-                  <a:tcPr marL="68580" marR="68580" marT="0" marB="0"/>
-                </a:tc>
-                <a:tc>
-                  <a:txBody>
-                    <a:bodyPr/>
-                    <a:lstStyle/>
-                    <a:p>
-                      <a:pPr>
-                        <a:lnSpc>
-                          <a:spcPct val="150000"/>
-                        </a:lnSpc>
-                        <a:spcAft>
-                          <a:spcPts val="1000"/>
-                        </a:spcAft>
-                        <a:buNone/>
-                      </a:pPr>
-                      <a:r>
-                        <a:rPr lang="en-GB" sz="1200" b="0" kern="100">
-                          <a:solidFill>
-                            <a:schemeClr val="tx1"/>
-                          </a:solidFill>
-                          <a:effectLst/>
-                          <a:latin typeface="Times New Roman" panose="02020603050405020304" pitchFamily="18" charset="0"/>
-                          <a:ea typeface="Aptos" panose="020B0004020202020204" pitchFamily="34" charset="0"/>
-                          <a:cs typeface="Arial" panose="020B0604020202020204" pitchFamily="34" charset="0"/>
-                        </a:rPr>
-                        <a:t>0.0144</a:t>
-                      </a:r>
-                      <a:endParaRPr lang="en-GB" sz="1100" b="0" kern="100">
-                        <a:solidFill>
-                          <a:schemeClr val="tx1"/>
-                        </a:solidFill>
-                        <a:effectLst/>
-                        <a:latin typeface="Aptos" panose="020B0004020202020204" pitchFamily="34" charset="0"/>
-                        <a:ea typeface="Aptos" panose="020B0004020202020204" pitchFamily="34" charset="0"/>
-                        <a:cs typeface="Arial" panose="020B0604020202020204" pitchFamily="34" charset="0"/>
-                      </a:endParaRPr>
-                    </a:p>
-                  </a:txBody>
-                  <a:tcPr marL="68580" marR="68580" marT="0" marB="0"/>
-                </a:tc>
-                <a:tc>
-                  <a:txBody>
-                    <a:bodyPr/>
-                    <a:lstStyle/>
-                    <a:p>
-                      <a:pPr>
-                        <a:lnSpc>
-                          <a:spcPct val="150000"/>
-                        </a:lnSpc>
-                        <a:spcAft>
-                          <a:spcPts val="1000"/>
-                        </a:spcAft>
-                        <a:buNone/>
-                      </a:pPr>
-                      <a:r>
-                        <a:rPr lang="en-GB" sz="1200" b="0" kern="100">
-                          <a:solidFill>
-                            <a:schemeClr val="tx1"/>
-                          </a:solidFill>
-                          <a:effectLst/>
-                          <a:latin typeface="Times New Roman" panose="02020603050405020304" pitchFamily="18" charset="0"/>
-                          <a:ea typeface="Aptos" panose="020B0004020202020204" pitchFamily="34" charset="0"/>
-                          <a:cs typeface="Arial" panose="020B0604020202020204" pitchFamily="34" charset="0"/>
-                        </a:rPr>
-                        <a:t>0.3707</a:t>
-                      </a:r>
-                      <a:endParaRPr lang="en-GB" sz="1100" b="0" kern="100">
-                        <a:solidFill>
-                          <a:schemeClr val="tx1"/>
-                        </a:solidFill>
-                        <a:effectLst/>
-                        <a:latin typeface="Aptos" panose="020B0004020202020204" pitchFamily="34" charset="0"/>
-                        <a:ea typeface="Aptos" panose="020B0004020202020204" pitchFamily="34" charset="0"/>
-                        <a:cs typeface="Arial" panose="020B0604020202020204" pitchFamily="34" charset="0"/>
-                      </a:endParaRPr>
-                    </a:p>
-                  </a:txBody>
-                  <a:tcPr marL="68580" marR="68580" marT="0" marB="0"/>
-                </a:tc>
-                <a:tc>
-                  <a:txBody>
-                    <a:bodyPr/>
-                    <a:lstStyle/>
-                    <a:p>
-                      <a:pPr>
-                        <a:lnSpc>
-                          <a:spcPct val="150000"/>
-                        </a:lnSpc>
-                        <a:spcAft>
-                          <a:spcPts val="1000"/>
-                        </a:spcAft>
-                        <a:buNone/>
-                      </a:pPr>
-                      <a:r>
-                        <a:rPr lang="en-GB" sz="1200" b="0" kern="100">
-                          <a:solidFill>
-                            <a:schemeClr val="tx1"/>
-                          </a:solidFill>
-                          <a:effectLst/>
-                          <a:latin typeface="Times New Roman" panose="02020603050405020304" pitchFamily="18" charset="0"/>
-                          <a:ea typeface="Aptos" panose="020B0004020202020204" pitchFamily="34" charset="0"/>
-                          <a:cs typeface="Arial" panose="020B0604020202020204" pitchFamily="34" charset="0"/>
-                        </a:rPr>
-                        <a:t>0.3719</a:t>
-                      </a:r>
-                      <a:endParaRPr lang="en-GB" sz="1100" b="0" kern="100">
-                        <a:solidFill>
-                          <a:schemeClr val="tx1"/>
-                        </a:solidFill>
-                        <a:effectLst/>
-                        <a:latin typeface="Aptos" panose="020B0004020202020204" pitchFamily="34" charset="0"/>
-                        <a:ea typeface="Aptos" panose="020B0004020202020204" pitchFamily="34" charset="0"/>
-                        <a:cs typeface="Arial" panose="020B0604020202020204" pitchFamily="34" charset="0"/>
-                      </a:endParaRPr>
-                    </a:p>
-                  </a:txBody>
-                  <a:tcPr marL="68580" marR="68580" marT="0" marB="0"/>
-                </a:tc>
-                <a:tc>
-                  <a:txBody>
-                    <a:bodyPr/>
-                    <a:lstStyle/>
-                    <a:p>
-                      <a:pPr>
-                        <a:lnSpc>
-                          <a:spcPct val="150000"/>
-                        </a:lnSpc>
-                        <a:spcAft>
-                          <a:spcPts val="1000"/>
-                        </a:spcAft>
-                        <a:buNone/>
-                      </a:pPr>
-                      <a:r>
-                        <a:rPr lang="en-GB" sz="1200" b="0" kern="100">
-                          <a:solidFill>
-                            <a:schemeClr val="tx1"/>
-                          </a:solidFill>
-                          <a:effectLst/>
-                          <a:highlight>
-                            <a:srgbClr val="FFFF00"/>
-                          </a:highlight>
-                          <a:latin typeface="Times New Roman" panose="02020603050405020304" pitchFamily="18" charset="0"/>
-                          <a:ea typeface="Aptos" panose="020B0004020202020204" pitchFamily="34" charset="0"/>
-                          <a:cs typeface="Arial" panose="020B0604020202020204" pitchFamily="34" charset="0"/>
-                        </a:rPr>
-                        <a:t>0.0622</a:t>
-                      </a:r>
-                      <a:endParaRPr lang="en-GB" sz="1100" b="0" kern="100">
-                        <a:solidFill>
-                          <a:schemeClr val="tx1"/>
-                        </a:solidFill>
-                        <a:effectLst/>
-                        <a:latin typeface="Aptos" panose="020B0004020202020204" pitchFamily="34" charset="0"/>
-                        <a:ea typeface="Aptos" panose="020B0004020202020204" pitchFamily="34" charset="0"/>
-                        <a:cs typeface="Arial" panose="020B0604020202020204" pitchFamily="34" charset="0"/>
-                      </a:endParaRPr>
-                    </a:p>
-                  </a:txBody>
-                  <a:tcPr marL="68580" marR="68580" marT="0" marB="0"/>
-                </a:tc>
-                <a:tc>
-                  <a:txBody>
-                    <a:bodyPr/>
-                    <a:lstStyle/>
-                    <a:p>
-                      <a:pPr>
-                        <a:lnSpc>
-                          <a:spcPct val="150000"/>
-                        </a:lnSpc>
-                        <a:spcAft>
-                          <a:spcPts val="1000"/>
-                        </a:spcAft>
-                        <a:buNone/>
-                      </a:pPr>
-                      <a:r>
-                        <a:rPr lang="en-GB" sz="1200" b="0" kern="100" dirty="0">
-                          <a:solidFill>
-                            <a:schemeClr val="tx1"/>
-                          </a:solidFill>
-                          <a:effectLst/>
-                          <a:latin typeface="Times New Roman" panose="02020603050405020304" pitchFamily="18" charset="0"/>
-                          <a:ea typeface="Aptos" panose="020B0004020202020204" pitchFamily="34" charset="0"/>
-                          <a:cs typeface="Arial" panose="020B0604020202020204" pitchFamily="34" charset="0"/>
-                        </a:rPr>
-                        <a:t>0.0061</a:t>
-                      </a:r>
-                      <a:endParaRPr lang="en-GB" sz="1100" b="0" kern="100" dirty="0">
-                        <a:solidFill>
-                          <a:schemeClr val="tx1"/>
-                        </a:solidFill>
-                        <a:effectLst/>
-                        <a:latin typeface="Aptos" panose="020B0004020202020204" pitchFamily="34" charset="0"/>
-                        <a:ea typeface="Aptos" panose="020B0004020202020204" pitchFamily="34" charset="0"/>
-                        <a:cs typeface="Arial" panose="020B0604020202020204" pitchFamily="34" charset="0"/>
-                      </a:endParaRPr>
-                    </a:p>
-                  </a:txBody>
-                  <a:tcPr marL="68580" marR="68580" marT="0" marB="0"/>
-                </a:tc>
-                <a:extLst>
-                  <a:ext uri="{0D108BD9-81ED-4DB2-BD59-A6C34878D82A}">
-                    <a16:rowId xmlns:a16="http://schemas.microsoft.com/office/drawing/2014/main" val="3958340746"/>
-                  </a:ext>
-                </a:extLst>
-              </a:tr>
-            </a:tbl>
-          </a:graphicData>
-        </a:graphic>
-      </p:graphicFrame>
+          <p:cNvPicPr>
+            <a:picLocks noChangeAspect="1"/>
+          </p:cNvPicPr>
+          <p:nvPr/>
+        </p:nvPicPr>
+        <p:blipFill>
+          <a:blip r:embed="rId3"/>
+          <a:srcRect r="10932"/>
+          <a:stretch>
+            <a:fillRect/>
+          </a:stretch>
+        </p:blipFill>
+        <p:spPr>
+          <a:xfrm>
+            <a:off x="4572000" y="1267272"/>
+            <a:ext cx="4164166" cy="2285015"/>
+          </a:xfrm>
+          <a:prstGeom prst="rect">
+            <a:avLst/>
+          </a:prstGeom>
+        </p:spPr>
+      </p:pic>
+      <p:pic>
+        <p:nvPicPr>
+          <p:cNvPr id="14" name="Picture 13">
+            <a:extLst>
+              <a:ext uri="{FF2B5EF4-FFF2-40B4-BE49-F238E27FC236}">
+                <a16:creationId xmlns:a16="http://schemas.microsoft.com/office/drawing/2014/main" id="{FC2369E0-D8A8-17C6-B33B-117CA1283481}"/>
+              </a:ext>
+            </a:extLst>
+          </p:cNvPr>
+          <p:cNvPicPr>
+            <a:picLocks noChangeAspect="1"/>
+          </p:cNvPicPr>
+          <p:nvPr/>
+        </p:nvPicPr>
+        <p:blipFill>
+          <a:blip r:embed="rId4"/>
+          <a:stretch>
+            <a:fillRect/>
+          </a:stretch>
+        </p:blipFill>
+        <p:spPr>
+          <a:xfrm>
+            <a:off x="277728" y="1267272"/>
+            <a:ext cx="4221856" cy="2285015"/>
+          </a:xfrm>
+          <a:prstGeom prst="rect">
+            <a:avLst/>
+          </a:prstGeom>
+        </p:spPr>
+      </p:pic>
     </p:spTree>
     <p:extLst>
       <p:ext uri="{BB962C8B-B14F-4D97-AF65-F5344CB8AC3E}">
@@ -38225,6 +34380,147 @@
         <p:cNvPr id="1" name="Shape 1470">
           <a:extLst>
             <a:ext uri="{FF2B5EF4-FFF2-40B4-BE49-F238E27FC236}">
+              <a16:creationId xmlns:a16="http://schemas.microsoft.com/office/drawing/2014/main" id="{F9003DFF-C6BF-4710-AAE4-32A1C7461EF5}"/>
+            </a:ext>
+          </a:extLst>
+        </p:cNvPr>
+        <p:cNvGrpSpPr/>
+        <p:nvPr/>
+      </p:nvGrpSpPr>
+      <p:grpSpPr>
+        <a:xfrm>
+          <a:off x="0" y="0"/>
+          <a:ext cx="0" cy="0"/>
+          <a:chOff x="0" y="0"/>
+          <a:chExt cx="0" cy="0"/>
+        </a:xfrm>
+      </p:grpSpPr>
+      <p:sp>
+        <p:nvSpPr>
+          <p:cNvPr id="7" name="Google Shape;1704;p38">
+            <a:extLst>
+              <a:ext uri="{FF2B5EF4-FFF2-40B4-BE49-F238E27FC236}">
+                <a16:creationId xmlns:a16="http://schemas.microsoft.com/office/drawing/2014/main" id="{C02207D6-B671-9CA1-46D4-A7679B5D11AB}"/>
+              </a:ext>
+            </a:extLst>
+          </p:cNvPr>
+          <p:cNvSpPr txBox="1">
+            <a:spLocks noGrp="1"/>
+          </p:cNvSpPr>
+          <p:nvPr>
+            <p:ph type="title"/>
+          </p:nvPr>
+        </p:nvSpPr>
+        <p:spPr>
+          <a:xfrm>
+            <a:off x="524792" y="288525"/>
+            <a:ext cx="8211374" cy="572700"/>
+          </a:xfrm>
+          <a:prstGeom prst="rect">
+            <a:avLst/>
+          </a:prstGeom>
+        </p:spPr>
+        <p:txBody>
+          <a:bodyPr spcFirstLastPara="1" wrap="square" lIns="91425" tIns="91425" rIns="91425" bIns="91425" anchor="t" anchorCtr="0">
+            <a:noAutofit/>
+          </a:bodyPr>
+          <a:lstStyle/>
+          <a:p>
+            <a:r>
+              <a:rPr lang="en-GB" sz="2400" dirty="0"/>
+              <a:t>Results - Recommender System Integration</a:t>
+            </a:r>
+            <a:endParaRPr sz="2400" dirty="0"/>
+          </a:p>
+        </p:txBody>
+      </p:sp>
+      <p:sp>
+        <p:nvSpPr>
+          <p:cNvPr id="5" name="TextBox 4">
+            <a:extLst>
+              <a:ext uri="{FF2B5EF4-FFF2-40B4-BE49-F238E27FC236}">
+                <a16:creationId xmlns:a16="http://schemas.microsoft.com/office/drawing/2014/main" id="{3E339749-D715-4BFD-60B7-FC19968FCE67}"/>
+              </a:ext>
+            </a:extLst>
+          </p:cNvPr>
+          <p:cNvSpPr txBox="1"/>
+          <p:nvPr/>
+        </p:nvSpPr>
+        <p:spPr>
+          <a:xfrm>
+            <a:off x="524792" y="783022"/>
+            <a:ext cx="3766642" cy="307777"/>
+          </a:xfrm>
+          <a:prstGeom prst="rect">
+            <a:avLst/>
+          </a:prstGeom>
+          <a:noFill/>
+        </p:spPr>
+        <p:txBody>
+          <a:bodyPr wrap="square" rtlCol="0">
+            <a:spAutoFit/>
+          </a:bodyPr>
+          <a:lstStyle/>
+          <a:p>
+            <a:r>
+              <a:rPr lang="en-GB" b="1" dirty="0"/>
+              <a:t>Performance Summary</a:t>
+            </a:r>
+            <a:endParaRPr lang="en-GB" dirty="0"/>
+          </a:p>
+        </p:txBody>
+      </p:sp>
+      <p:pic>
+        <p:nvPicPr>
+          <p:cNvPr id="10" name="Picture 9">
+            <a:extLst>
+              <a:ext uri="{FF2B5EF4-FFF2-40B4-BE49-F238E27FC236}">
+                <a16:creationId xmlns:a16="http://schemas.microsoft.com/office/drawing/2014/main" id="{23EEF4F9-E35D-6CA9-CC11-687DC7260DFC}"/>
+              </a:ext>
+            </a:extLst>
+          </p:cNvPr>
+          <p:cNvPicPr>
+            <a:picLocks noChangeAspect="1"/>
+          </p:cNvPicPr>
+          <p:nvPr/>
+        </p:nvPicPr>
+        <p:blipFill>
+          <a:blip r:embed="rId3"/>
+          <a:stretch>
+            <a:fillRect/>
+          </a:stretch>
+        </p:blipFill>
+        <p:spPr>
+          <a:xfrm>
+            <a:off x="271216" y="1090800"/>
+            <a:ext cx="8212930" cy="3269678"/>
+          </a:xfrm>
+          <a:prstGeom prst="rect">
+            <a:avLst/>
+          </a:prstGeom>
+        </p:spPr>
+      </p:pic>
+    </p:spTree>
+    <p:extLst>
+      <p:ext uri="{BB962C8B-B14F-4D97-AF65-F5344CB8AC3E}">
+        <p14:creationId xmlns:p14="http://schemas.microsoft.com/office/powerpoint/2010/main" val="751735043"/>
+      </p:ext>
+    </p:extLst>
+  </p:cSld>
+  <p:clrMapOvr>
+    <a:masterClrMapping/>
+  </p:clrMapOvr>
+</p:sld>
+</file>
+
+<file path=ppt/slides/slide26.xml><?xml version="1.0" encoding="utf-8"?>
+<p:sld xmlns:a="http://schemas.openxmlformats.org/drawingml/2006/main" xmlns:r="http://schemas.openxmlformats.org/officeDocument/2006/relationships" xmlns:p="http://schemas.openxmlformats.org/presentationml/2006/main">
+  <p:cSld>
+    <p:spTree>
+      <p:nvGrpSpPr>
+        <p:cNvPr id="1" name="Shape 1470">
+          <a:extLst>
+            <a:ext uri="{FF2B5EF4-FFF2-40B4-BE49-F238E27FC236}">
               <a16:creationId xmlns:a16="http://schemas.microsoft.com/office/drawing/2014/main" id="{09BFE3BD-AAAC-77ED-FF08-109F87A6A8AD}"/>
             </a:ext>
           </a:extLst>
@@ -38317,10 +34613,10 @@
       </p:sp>
       <p:pic>
         <p:nvPicPr>
-          <p:cNvPr id="12" name="Picture 11">
+          <p:cNvPr id="6" name="Picture 5">
             <a:extLst>
               <a:ext uri="{FF2B5EF4-FFF2-40B4-BE49-F238E27FC236}">
-                <a16:creationId xmlns:a16="http://schemas.microsoft.com/office/drawing/2014/main" id="{D4814F4A-03B3-3F52-892B-81F3A519E78A}"/>
+                <a16:creationId xmlns:a16="http://schemas.microsoft.com/office/drawing/2014/main" id="{69C95ABC-45F6-CEDC-8195-39D884B76A38}"/>
               </a:ext>
             </a:extLst>
           </p:cNvPr>
@@ -38337,8 +34633,8 @@
         </p:blipFill>
         <p:spPr>
           <a:xfrm>
-            <a:off x="297675" y="1106069"/>
-            <a:ext cx="8211374" cy="3393807"/>
+            <a:off x="272772" y="1090800"/>
+            <a:ext cx="8211374" cy="3269678"/>
           </a:xfrm>
           <a:prstGeom prst="rect">
             <a:avLst/>
@@ -38349,147 +34645,6 @@
     <p:extLst>
       <p:ext uri="{BB962C8B-B14F-4D97-AF65-F5344CB8AC3E}">
         <p14:creationId xmlns:p14="http://schemas.microsoft.com/office/powerpoint/2010/main" val="828109283"/>
-      </p:ext>
-    </p:extLst>
-  </p:cSld>
-  <p:clrMapOvr>
-    <a:masterClrMapping/>
-  </p:clrMapOvr>
-</p:sld>
-</file>
-
-<file path=ppt/slides/slide26.xml><?xml version="1.0" encoding="utf-8"?>
-<p:sld xmlns:a="http://schemas.openxmlformats.org/drawingml/2006/main" xmlns:r="http://schemas.openxmlformats.org/officeDocument/2006/relationships" xmlns:p="http://schemas.openxmlformats.org/presentationml/2006/main">
-  <p:cSld>
-    <p:spTree>
-      <p:nvGrpSpPr>
-        <p:cNvPr id="1" name="Shape 1470">
-          <a:extLst>
-            <a:ext uri="{FF2B5EF4-FFF2-40B4-BE49-F238E27FC236}">
-              <a16:creationId xmlns:a16="http://schemas.microsoft.com/office/drawing/2014/main" id="{F9003DFF-C6BF-4710-AAE4-32A1C7461EF5}"/>
-            </a:ext>
-          </a:extLst>
-        </p:cNvPr>
-        <p:cNvGrpSpPr/>
-        <p:nvPr/>
-      </p:nvGrpSpPr>
-      <p:grpSpPr>
-        <a:xfrm>
-          <a:off x="0" y="0"/>
-          <a:ext cx="0" cy="0"/>
-          <a:chOff x="0" y="0"/>
-          <a:chExt cx="0" cy="0"/>
-        </a:xfrm>
-      </p:grpSpPr>
-      <p:sp>
-        <p:nvSpPr>
-          <p:cNvPr id="7" name="Google Shape;1704;p38">
-            <a:extLst>
-              <a:ext uri="{FF2B5EF4-FFF2-40B4-BE49-F238E27FC236}">
-                <a16:creationId xmlns:a16="http://schemas.microsoft.com/office/drawing/2014/main" id="{C02207D6-B671-9CA1-46D4-A7679B5D11AB}"/>
-              </a:ext>
-            </a:extLst>
-          </p:cNvPr>
-          <p:cNvSpPr txBox="1">
-            <a:spLocks noGrp="1"/>
-          </p:cNvSpPr>
-          <p:nvPr>
-            <p:ph type="title"/>
-          </p:nvPr>
-        </p:nvSpPr>
-        <p:spPr>
-          <a:xfrm>
-            <a:off x="524792" y="288525"/>
-            <a:ext cx="8211374" cy="572700"/>
-          </a:xfrm>
-          <a:prstGeom prst="rect">
-            <a:avLst/>
-          </a:prstGeom>
-        </p:spPr>
-        <p:txBody>
-          <a:bodyPr spcFirstLastPara="1" wrap="square" lIns="91425" tIns="91425" rIns="91425" bIns="91425" anchor="t" anchorCtr="0">
-            <a:noAutofit/>
-          </a:bodyPr>
-          <a:lstStyle/>
-          <a:p>
-            <a:r>
-              <a:rPr lang="en-GB" sz="2400" dirty="0"/>
-              <a:t>Results - Recommender System Integration</a:t>
-            </a:r>
-            <a:endParaRPr sz="2400" dirty="0"/>
-          </a:p>
-        </p:txBody>
-      </p:sp>
-      <p:sp>
-        <p:nvSpPr>
-          <p:cNvPr id="5" name="TextBox 4">
-            <a:extLst>
-              <a:ext uri="{FF2B5EF4-FFF2-40B4-BE49-F238E27FC236}">
-                <a16:creationId xmlns:a16="http://schemas.microsoft.com/office/drawing/2014/main" id="{3E339749-D715-4BFD-60B7-FC19968FCE67}"/>
-              </a:ext>
-            </a:extLst>
-          </p:cNvPr>
-          <p:cNvSpPr txBox="1"/>
-          <p:nvPr/>
-        </p:nvSpPr>
-        <p:spPr>
-          <a:xfrm>
-            <a:off x="524792" y="783022"/>
-            <a:ext cx="3766642" cy="307777"/>
-          </a:xfrm>
-          <a:prstGeom prst="rect">
-            <a:avLst/>
-          </a:prstGeom>
-          <a:noFill/>
-        </p:spPr>
-        <p:txBody>
-          <a:bodyPr wrap="square" rtlCol="0">
-            <a:spAutoFit/>
-          </a:bodyPr>
-          <a:lstStyle/>
-          <a:p>
-            <a:r>
-              <a:rPr lang="en-GB" b="1" dirty="0"/>
-              <a:t>Performance Summary</a:t>
-            </a:r>
-            <a:endParaRPr lang="en-GB" dirty="0"/>
-          </a:p>
-        </p:txBody>
-      </p:sp>
-      <p:pic>
-        <p:nvPicPr>
-          <p:cNvPr id="3" name="Picture 2">
-            <a:extLst>
-              <a:ext uri="{FF2B5EF4-FFF2-40B4-BE49-F238E27FC236}">
-                <a16:creationId xmlns:a16="http://schemas.microsoft.com/office/drawing/2014/main" id="{ACD56017-2FDE-11E4-00CE-E127EA14550A}"/>
-              </a:ext>
-            </a:extLst>
-          </p:cNvPr>
-          <p:cNvPicPr>
-            <a:picLocks noChangeAspect="1"/>
-          </p:cNvPicPr>
-          <p:nvPr/>
-        </p:nvPicPr>
-        <p:blipFill>
-          <a:blip r:embed="rId3"/>
-          <a:stretch>
-            <a:fillRect/>
-          </a:stretch>
-        </p:blipFill>
-        <p:spPr>
-          <a:xfrm>
-            <a:off x="271216" y="1090800"/>
-            <a:ext cx="8212930" cy="3269678"/>
-          </a:xfrm>
-          <a:prstGeom prst="rect">
-            <a:avLst/>
-          </a:prstGeom>
-        </p:spPr>
-      </p:pic>
-    </p:spTree>
-    <p:extLst>
-      <p:ext uri="{BB962C8B-B14F-4D97-AF65-F5344CB8AC3E}">
-        <p14:creationId xmlns:p14="http://schemas.microsoft.com/office/powerpoint/2010/main" val="751735043"/>
       </p:ext>
     </p:extLst>
   </p:cSld>
@@ -40048,7 +36203,7 @@
         <p:spPr>
           <a:xfrm>
             <a:off x="749133" y="1252895"/>
-            <a:ext cx="7645733" cy="2637710"/>
+            <a:ext cx="7645733" cy="1021883"/>
           </a:xfrm>
           <a:prstGeom prst="rect">
             <a:avLst/>
@@ -40065,12 +36220,12 @@
               <a:lnSpc>
                 <a:spcPct val="150000"/>
               </a:lnSpc>
-              <a:buFont typeface="+mj-lt"/>
-              <a:buAutoNum type="arabicPeriod"/>
+              <a:buFont typeface="Arial" panose="020B0604020202020204" pitchFamily="34" charset="0"/>
+              <a:buChar char="•"/>
             </a:pPr>
             <a:r>
               <a:rPr lang="en-GB" dirty="0"/>
-              <a:t>Study and categorize community detection approaches (classical &amp; modern)</a:t>
+              <a:t>Classify classical and modern algorithms and run them on real &amp; synthetic networks.</a:t>
             </a:r>
           </a:p>
           <a:p>
@@ -40078,12 +36233,12 @@
               <a:lnSpc>
                 <a:spcPct val="150000"/>
               </a:lnSpc>
-              <a:buFont typeface="+mj-lt"/>
-              <a:buAutoNum type="arabicPeriod"/>
+              <a:buFont typeface="Arial" panose="020B0604020202020204" pitchFamily="34" charset="0"/>
+              <a:buChar char="•"/>
             </a:pPr>
             <a:r>
               <a:rPr lang="en-GB" dirty="0"/>
-              <a:t>Implement representative algorithms from different categories</a:t>
+              <a:t>Evaluate using Modularity, NMI, and ARI; assess utility for marketing &amp; recommendation.</a:t>
             </a:r>
           </a:p>
           <a:p>
@@ -40091,77 +36246,12 @@
               <a:lnSpc>
                 <a:spcPct val="150000"/>
               </a:lnSpc>
-              <a:buFont typeface="+mj-lt"/>
-              <a:buAutoNum type="arabicPeriod"/>
+              <a:buFont typeface="Arial" panose="020B0604020202020204" pitchFamily="34" charset="0"/>
+              <a:buChar char="•"/>
             </a:pPr>
             <a:r>
               <a:rPr lang="en-GB" dirty="0"/>
-              <a:t>Apply algorithms to real-world and synthetic network datasets</a:t>
-            </a:r>
-          </a:p>
-          <a:p>
-            <a:pPr marL="342900" indent="-342900">
-              <a:lnSpc>
-                <a:spcPct val="150000"/>
-              </a:lnSpc>
-              <a:buFont typeface="+mj-lt"/>
-              <a:buAutoNum type="arabicPeriod"/>
-            </a:pPr>
-            <a:r>
-              <a:rPr lang="en-GB" dirty="0"/>
-              <a:t>Evaluate using structural metrics (modularity, NMI, ARI)</a:t>
-            </a:r>
-          </a:p>
-          <a:p>
-            <a:pPr marL="342900" indent="-342900">
-              <a:lnSpc>
-                <a:spcPct val="150000"/>
-              </a:lnSpc>
-              <a:buFont typeface="+mj-lt"/>
-              <a:buAutoNum type="arabicPeriod"/>
-            </a:pPr>
-            <a:r>
-              <a:rPr lang="en-GB" dirty="0"/>
-              <a:t>Assess practical usefulness for targeted marketing &amp; recommendation</a:t>
-            </a:r>
-          </a:p>
-          <a:p>
-            <a:pPr marL="342900" indent="-342900">
-              <a:lnSpc>
-                <a:spcPct val="150000"/>
-              </a:lnSpc>
-              <a:buFont typeface="+mj-lt"/>
-              <a:buAutoNum type="arabicPeriod"/>
-            </a:pPr>
-            <a:r>
-              <a:rPr lang="en-GB" dirty="0"/>
-              <a:t>Compare performance and identify strengths/limitations</a:t>
-            </a:r>
-          </a:p>
-          <a:p>
-            <a:pPr marL="342900" indent="-342900">
-              <a:lnSpc>
-                <a:spcPct val="150000"/>
-              </a:lnSpc>
-              <a:buFont typeface="+mj-lt"/>
-              <a:buAutoNum type="arabicPeriod"/>
-            </a:pPr>
-            <a:r>
-              <a:rPr lang="en-GB" dirty="0"/>
-              <a:t>Provide insights on trade-offs between simplicity, scalability, and effectiveness</a:t>
-            </a:r>
-          </a:p>
-          <a:p>
-            <a:pPr marL="342900" indent="-342900">
-              <a:lnSpc>
-                <a:spcPct val="150000"/>
-              </a:lnSpc>
-              <a:buFont typeface="+mj-lt"/>
-              <a:buAutoNum type="arabicPeriod"/>
-            </a:pPr>
-            <a:r>
-              <a:rPr lang="en-GB" dirty="0"/>
-              <a:t>Build an interactive web application for illustration.</a:t>
+              <a:t>Develop an interactive web application for visualization.</a:t>
             </a:r>
           </a:p>
         </p:txBody>
@@ -40464,521 +36554,6 @@
                                           <p:spTgt spid="5">
                                             <p:txEl>
                                               <p:pRg st="2" end="2"/>
-                                            </p:txEl>
-                                          </p:spTgt>
-                                        </p:tgtEl>
-                                        <p:attrNameLst>
-                                          <p:attrName>ppt_y</p:attrName>
-                                        </p:attrNameLst>
-                                      </p:cBhvr>
-                                      <p:tavLst>
-                                        <p:tav tm="0">
-                                          <p:val>
-                                            <p:strVal val="1+#ppt_h/2"/>
-                                          </p:val>
-                                        </p:tav>
-                                        <p:tav tm="100000">
-                                          <p:val>
-                                            <p:strVal val="#ppt_y"/>
-                                          </p:val>
-                                        </p:tav>
-                                      </p:tavLst>
-                                    </p:anim>
-                                  </p:childTnLst>
-                                </p:cTn>
-                              </p:par>
-                            </p:childTnLst>
-                          </p:cTn>
-                        </p:par>
-                      </p:childTnLst>
-                    </p:cTn>
-                  </p:par>
-                  <p:par>
-                    <p:cTn id="21" fill="hold">
-                      <p:stCondLst>
-                        <p:cond delay="indefinite"/>
-                      </p:stCondLst>
-                      <p:childTnLst>
-                        <p:par>
-                          <p:cTn id="22" fill="hold">
-                            <p:stCondLst>
-                              <p:cond delay="0"/>
-                            </p:stCondLst>
-                            <p:childTnLst>
-                              <p:par>
-                                <p:cTn id="23" presetID="2" presetClass="entr" presetSubtype="4" fill="hold" nodeType="clickEffect">
-                                  <p:stCondLst>
-                                    <p:cond delay="0"/>
-                                  </p:stCondLst>
-                                  <p:childTnLst>
-                                    <p:set>
-                                      <p:cBhvr>
-                                        <p:cTn id="24" dur="1" fill="hold">
-                                          <p:stCondLst>
-                                            <p:cond delay="0"/>
-                                          </p:stCondLst>
-                                        </p:cTn>
-                                        <p:tgtEl>
-                                          <p:spTgt spid="5">
-                                            <p:txEl>
-                                              <p:pRg st="3" end="3"/>
-                                            </p:txEl>
-                                          </p:spTgt>
-                                        </p:tgtEl>
-                                        <p:attrNameLst>
-                                          <p:attrName>style.visibility</p:attrName>
-                                        </p:attrNameLst>
-                                      </p:cBhvr>
-                                      <p:to>
-                                        <p:strVal val="visible"/>
-                                      </p:to>
-                                    </p:set>
-                                    <p:anim calcmode="lin" valueType="num">
-                                      <p:cBhvr additive="base">
-                                        <p:cTn id="25" dur="500" fill="hold"/>
-                                        <p:tgtEl>
-                                          <p:spTgt spid="5">
-                                            <p:txEl>
-                                              <p:pRg st="3" end="3"/>
-                                            </p:txEl>
-                                          </p:spTgt>
-                                        </p:tgtEl>
-                                        <p:attrNameLst>
-                                          <p:attrName>ppt_x</p:attrName>
-                                        </p:attrNameLst>
-                                      </p:cBhvr>
-                                      <p:tavLst>
-                                        <p:tav tm="0">
-                                          <p:val>
-                                            <p:strVal val="#ppt_x"/>
-                                          </p:val>
-                                        </p:tav>
-                                        <p:tav tm="100000">
-                                          <p:val>
-                                            <p:strVal val="#ppt_x"/>
-                                          </p:val>
-                                        </p:tav>
-                                      </p:tavLst>
-                                    </p:anim>
-                                    <p:anim calcmode="lin" valueType="num">
-                                      <p:cBhvr additive="base">
-                                        <p:cTn id="26" dur="500" fill="hold"/>
-                                        <p:tgtEl>
-                                          <p:spTgt spid="5">
-                                            <p:txEl>
-                                              <p:pRg st="3" end="3"/>
-                                            </p:txEl>
-                                          </p:spTgt>
-                                        </p:tgtEl>
-                                        <p:attrNameLst>
-                                          <p:attrName>ppt_y</p:attrName>
-                                        </p:attrNameLst>
-                                      </p:cBhvr>
-                                      <p:tavLst>
-                                        <p:tav tm="0">
-                                          <p:val>
-                                            <p:strVal val="1+#ppt_h/2"/>
-                                          </p:val>
-                                        </p:tav>
-                                        <p:tav tm="100000">
-                                          <p:val>
-                                            <p:strVal val="#ppt_y"/>
-                                          </p:val>
-                                        </p:tav>
-                                      </p:tavLst>
-                                    </p:anim>
-                                  </p:childTnLst>
-                                </p:cTn>
-                              </p:par>
-                            </p:childTnLst>
-                          </p:cTn>
-                        </p:par>
-                      </p:childTnLst>
-                    </p:cTn>
-                  </p:par>
-                  <p:par>
-                    <p:cTn id="27" fill="hold">
-                      <p:stCondLst>
-                        <p:cond delay="indefinite"/>
-                      </p:stCondLst>
-                      <p:childTnLst>
-                        <p:par>
-                          <p:cTn id="28" fill="hold">
-                            <p:stCondLst>
-                              <p:cond delay="0"/>
-                            </p:stCondLst>
-                            <p:childTnLst>
-                              <p:par>
-                                <p:cTn id="29" presetID="2" presetClass="entr" presetSubtype="4" fill="hold" nodeType="clickEffect">
-                                  <p:stCondLst>
-                                    <p:cond delay="0"/>
-                                  </p:stCondLst>
-                                  <p:childTnLst>
-                                    <p:set>
-                                      <p:cBhvr>
-                                        <p:cTn id="30" dur="1" fill="hold">
-                                          <p:stCondLst>
-                                            <p:cond delay="0"/>
-                                          </p:stCondLst>
-                                        </p:cTn>
-                                        <p:tgtEl>
-                                          <p:spTgt spid="5">
-                                            <p:txEl>
-                                              <p:pRg st="4" end="4"/>
-                                            </p:txEl>
-                                          </p:spTgt>
-                                        </p:tgtEl>
-                                        <p:attrNameLst>
-                                          <p:attrName>style.visibility</p:attrName>
-                                        </p:attrNameLst>
-                                      </p:cBhvr>
-                                      <p:to>
-                                        <p:strVal val="visible"/>
-                                      </p:to>
-                                    </p:set>
-                                    <p:anim calcmode="lin" valueType="num">
-                                      <p:cBhvr additive="base">
-                                        <p:cTn id="31" dur="500" fill="hold"/>
-                                        <p:tgtEl>
-                                          <p:spTgt spid="5">
-                                            <p:txEl>
-                                              <p:pRg st="4" end="4"/>
-                                            </p:txEl>
-                                          </p:spTgt>
-                                        </p:tgtEl>
-                                        <p:attrNameLst>
-                                          <p:attrName>ppt_x</p:attrName>
-                                        </p:attrNameLst>
-                                      </p:cBhvr>
-                                      <p:tavLst>
-                                        <p:tav tm="0">
-                                          <p:val>
-                                            <p:strVal val="#ppt_x"/>
-                                          </p:val>
-                                        </p:tav>
-                                        <p:tav tm="100000">
-                                          <p:val>
-                                            <p:strVal val="#ppt_x"/>
-                                          </p:val>
-                                        </p:tav>
-                                      </p:tavLst>
-                                    </p:anim>
-                                    <p:anim calcmode="lin" valueType="num">
-                                      <p:cBhvr additive="base">
-                                        <p:cTn id="32" dur="500" fill="hold"/>
-                                        <p:tgtEl>
-                                          <p:spTgt spid="5">
-                                            <p:txEl>
-                                              <p:pRg st="4" end="4"/>
-                                            </p:txEl>
-                                          </p:spTgt>
-                                        </p:tgtEl>
-                                        <p:attrNameLst>
-                                          <p:attrName>ppt_y</p:attrName>
-                                        </p:attrNameLst>
-                                      </p:cBhvr>
-                                      <p:tavLst>
-                                        <p:tav tm="0">
-                                          <p:val>
-                                            <p:strVal val="1+#ppt_h/2"/>
-                                          </p:val>
-                                        </p:tav>
-                                        <p:tav tm="100000">
-                                          <p:val>
-                                            <p:strVal val="#ppt_y"/>
-                                          </p:val>
-                                        </p:tav>
-                                      </p:tavLst>
-                                    </p:anim>
-                                  </p:childTnLst>
-                                </p:cTn>
-                              </p:par>
-                            </p:childTnLst>
-                          </p:cTn>
-                        </p:par>
-                      </p:childTnLst>
-                    </p:cTn>
-                  </p:par>
-                  <p:par>
-                    <p:cTn id="33" fill="hold">
-                      <p:stCondLst>
-                        <p:cond delay="indefinite"/>
-                      </p:stCondLst>
-                      <p:childTnLst>
-                        <p:par>
-                          <p:cTn id="34" fill="hold">
-                            <p:stCondLst>
-                              <p:cond delay="0"/>
-                            </p:stCondLst>
-                            <p:childTnLst>
-                              <p:par>
-                                <p:cTn id="35" presetID="2" presetClass="entr" presetSubtype="4" fill="hold" nodeType="clickEffect">
-                                  <p:stCondLst>
-                                    <p:cond delay="0"/>
-                                  </p:stCondLst>
-                                  <p:childTnLst>
-                                    <p:set>
-                                      <p:cBhvr>
-                                        <p:cTn id="36" dur="1" fill="hold">
-                                          <p:stCondLst>
-                                            <p:cond delay="0"/>
-                                          </p:stCondLst>
-                                        </p:cTn>
-                                        <p:tgtEl>
-                                          <p:spTgt spid="5">
-                                            <p:txEl>
-                                              <p:pRg st="5" end="5"/>
-                                            </p:txEl>
-                                          </p:spTgt>
-                                        </p:tgtEl>
-                                        <p:attrNameLst>
-                                          <p:attrName>style.visibility</p:attrName>
-                                        </p:attrNameLst>
-                                      </p:cBhvr>
-                                      <p:to>
-                                        <p:strVal val="visible"/>
-                                      </p:to>
-                                    </p:set>
-                                    <p:anim calcmode="lin" valueType="num">
-                                      <p:cBhvr additive="base">
-                                        <p:cTn id="37" dur="500" fill="hold"/>
-                                        <p:tgtEl>
-                                          <p:spTgt spid="5">
-                                            <p:txEl>
-                                              <p:pRg st="5" end="5"/>
-                                            </p:txEl>
-                                          </p:spTgt>
-                                        </p:tgtEl>
-                                        <p:attrNameLst>
-                                          <p:attrName>ppt_x</p:attrName>
-                                        </p:attrNameLst>
-                                      </p:cBhvr>
-                                      <p:tavLst>
-                                        <p:tav tm="0">
-                                          <p:val>
-                                            <p:strVal val="#ppt_x"/>
-                                          </p:val>
-                                        </p:tav>
-                                        <p:tav tm="100000">
-                                          <p:val>
-                                            <p:strVal val="#ppt_x"/>
-                                          </p:val>
-                                        </p:tav>
-                                      </p:tavLst>
-                                    </p:anim>
-                                    <p:anim calcmode="lin" valueType="num">
-                                      <p:cBhvr additive="base">
-                                        <p:cTn id="38" dur="500" fill="hold"/>
-                                        <p:tgtEl>
-                                          <p:spTgt spid="5">
-                                            <p:txEl>
-                                              <p:pRg st="5" end="5"/>
-                                            </p:txEl>
-                                          </p:spTgt>
-                                        </p:tgtEl>
-                                        <p:attrNameLst>
-                                          <p:attrName>ppt_y</p:attrName>
-                                        </p:attrNameLst>
-                                      </p:cBhvr>
-                                      <p:tavLst>
-                                        <p:tav tm="0">
-                                          <p:val>
-                                            <p:strVal val="1+#ppt_h/2"/>
-                                          </p:val>
-                                        </p:tav>
-                                        <p:tav tm="100000">
-                                          <p:val>
-                                            <p:strVal val="#ppt_y"/>
-                                          </p:val>
-                                        </p:tav>
-                                      </p:tavLst>
-                                    </p:anim>
-                                  </p:childTnLst>
-                                </p:cTn>
-                              </p:par>
-                            </p:childTnLst>
-                          </p:cTn>
-                        </p:par>
-                      </p:childTnLst>
-                    </p:cTn>
-                  </p:par>
-                  <p:par>
-                    <p:cTn id="39" fill="hold">
-                      <p:stCondLst>
-                        <p:cond delay="indefinite"/>
-                      </p:stCondLst>
-                      <p:childTnLst>
-                        <p:par>
-                          <p:cTn id="40" fill="hold">
-                            <p:stCondLst>
-                              <p:cond delay="0"/>
-                            </p:stCondLst>
-                            <p:childTnLst>
-                              <p:par>
-                                <p:cTn id="41" presetID="2" presetClass="entr" presetSubtype="4" fill="hold" nodeType="clickEffect">
-                                  <p:stCondLst>
-                                    <p:cond delay="0"/>
-                                  </p:stCondLst>
-                                  <p:childTnLst>
-                                    <p:set>
-                                      <p:cBhvr>
-                                        <p:cTn id="42" dur="1" fill="hold">
-                                          <p:stCondLst>
-                                            <p:cond delay="0"/>
-                                          </p:stCondLst>
-                                        </p:cTn>
-                                        <p:tgtEl>
-                                          <p:spTgt spid="5">
-                                            <p:txEl>
-                                              <p:pRg st="6" end="6"/>
-                                            </p:txEl>
-                                          </p:spTgt>
-                                        </p:tgtEl>
-                                        <p:attrNameLst>
-                                          <p:attrName>style.visibility</p:attrName>
-                                        </p:attrNameLst>
-                                      </p:cBhvr>
-                                      <p:to>
-                                        <p:strVal val="visible"/>
-                                      </p:to>
-                                    </p:set>
-                                    <p:anim calcmode="lin" valueType="num">
-                                      <p:cBhvr additive="base">
-                                        <p:cTn id="43" dur="500" fill="hold"/>
-                                        <p:tgtEl>
-                                          <p:spTgt spid="5">
-                                            <p:txEl>
-                                              <p:pRg st="6" end="6"/>
-                                            </p:txEl>
-                                          </p:spTgt>
-                                        </p:tgtEl>
-                                        <p:attrNameLst>
-                                          <p:attrName>ppt_x</p:attrName>
-                                        </p:attrNameLst>
-                                      </p:cBhvr>
-                                      <p:tavLst>
-                                        <p:tav tm="0">
-                                          <p:val>
-                                            <p:strVal val="#ppt_x"/>
-                                          </p:val>
-                                        </p:tav>
-                                        <p:tav tm="100000">
-                                          <p:val>
-                                            <p:strVal val="#ppt_x"/>
-                                          </p:val>
-                                        </p:tav>
-                                      </p:tavLst>
-                                    </p:anim>
-                                    <p:anim calcmode="lin" valueType="num">
-                                      <p:cBhvr additive="base">
-                                        <p:cTn id="44" dur="500" fill="hold"/>
-                                        <p:tgtEl>
-                                          <p:spTgt spid="5">
-                                            <p:txEl>
-                                              <p:pRg st="6" end="6"/>
-                                            </p:txEl>
-                                          </p:spTgt>
-                                        </p:tgtEl>
-                                        <p:attrNameLst>
-                                          <p:attrName>ppt_y</p:attrName>
-                                        </p:attrNameLst>
-                                      </p:cBhvr>
-                                      <p:tavLst>
-                                        <p:tav tm="0">
-                                          <p:val>
-                                            <p:strVal val="1+#ppt_h/2"/>
-                                          </p:val>
-                                        </p:tav>
-                                        <p:tav tm="100000">
-                                          <p:val>
-                                            <p:strVal val="#ppt_y"/>
-                                          </p:val>
-                                        </p:tav>
-                                      </p:tavLst>
-                                    </p:anim>
-                                  </p:childTnLst>
-                                </p:cTn>
-                              </p:par>
-                            </p:childTnLst>
-                          </p:cTn>
-                        </p:par>
-                      </p:childTnLst>
-                    </p:cTn>
-                  </p:par>
-                  <p:par>
-                    <p:cTn id="45" fill="hold">
-                      <p:stCondLst>
-                        <p:cond delay="indefinite"/>
-                      </p:stCondLst>
-                      <p:childTnLst>
-                        <p:par>
-                          <p:cTn id="46" fill="hold">
-                            <p:stCondLst>
-                              <p:cond delay="0"/>
-                            </p:stCondLst>
-                            <p:childTnLst>
-                              <p:par>
-                                <p:cTn id="47" presetID="2" presetClass="entr" presetSubtype="4" fill="hold" nodeType="clickEffect">
-                                  <p:stCondLst>
-                                    <p:cond delay="0"/>
-                                  </p:stCondLst>
-                                  <p:childTnLst>
-                                    <p:set>
-                                      <p:cBhvr>
-                                        <p:cTn id="48" dur="1" fill="hold">
-                                          <p:stCondLst>
-                                            <p:cond delay="0"/>
-                                          </p:stCondLst>
-                                        </p:cTn>
-                                        <p:tgtEl>
-                                          <p:spTgt spid="5">
-                                            <p:txEl>
-                                              <p:pRg st="7" end="7"/>
-                                            </p:txEl>
-                                          </p:spTgt>
-                                        </p:tgtEl>
-                                        <p:attrNameLst>
-                                          <p:attrName>style.visibility</p:attrName>
-                                        </p:attrNameLst>
-                                      </p:cBhvr>
-                                      <p:to>
-                                        <p:strVal val="visible"/>
-                                      </p:to>
-                                    </p:set>
-                                    <p:anim calcmode="lin" valueType="num">
-                                      <p:cBhvr additive="base">
-                                        <p:cTn id="49" dur="500" fill="hold"/>
-                                        <p:tgtEl>
-                                          <p:spTgt spid="5">
-                                            <p:txEl>
-                                              <p:pRg st="7" end="7"/>
-                                            </p:txEl>
-                                          </p:spTgt>
-                                        </p:tgtEl>
-                                        <p:attrNameLst>
-                                          <p:attrName>ppt_x</p:attrName>
-                                        </p:attrNameLst>
-                                      </p:cBhvr>
-                                      <p:tavLst>
-                                        <p:tav tm="0">
-                                          <p:val>
-                                            <p:strVal val="#ppt_x"/>
-                                          </p:val>
-                                        </p:tav>
-                                        <p:tav tm="100000">
-                                          <p:val>
-                                            <p:strVal val="#ppt_x"/>
-                                          </p:val>
-                                        </p:tav>
-                                      </p:tavLst>
-                                    </p:anim>
-                                    <p:anim calcmode="lin" valueType="num">
-                                      <p:cBhvr additive="base">
-                                        <p:cTn id="50" dur="500" fill="hold"/>
-                                        <p:tgtEl>
-                                          <p:spTgt spid="5">
-                                            <p:txEl>
-                                              <p:pRg st="7" end="7"/>
                                             </p:txEl>
                                           </p:spTgt>
                                         </p:tgtEl>
